--- a/docs/apresentacoes/05-analises.pptx
+++ b/docs/apresentacoes/05-analises.pptx
@@ -115,23 +115,23 @@
   <p:extLst>
     <p:ext uri="{521415D9-36F7-43E2-AB2F-B90AF26B5E84}">
       <p14:sectionLst xmlns:p14="http://schemas.microsoft.com/office/powerpoint/2010/main">
-        <p14:section name="Abertura" id="{8e60b42d-aa82-49f8-db90-c879edf04f0e}">
+        <p14:section name="Abertura" id="{d221a04b-04a1-7ff6-0ab1-4fc84b08a28f}">
           <p14:sldIdLst>
             <p14:sldId id="256"/>
           </p14:sldIdLst>
         </p14:section>
-        <p14:section name="Contexto" id="{1e9c8a5d-72e4-cb6f-92ac-52de621d1b1a}">
+        <p14:section name="Contexto" id="{5d24d65c-265c-51b1-20d8-0f02ce1d033a}">
           <p14:sldIdLst>
             <p14:sldId id="257"/>
           </p14:sldIdLst>
         </p14:section>
-        <p14:section name="Camada analítica" id="{4f110933-3379-9ad0-ae78-6b4c109880c8}">
+        <p14:section name="Camada analítica" id="{d3192ab5-d389-a19d-b96d-2aa8037611c9}">
           <p14:sldIdLst>
             <p14:sldId id="258"/>
             <p14:sldId id="259"/>
           </p14:sldIdLst>
         </p14:section>
-        <p14:section name="Apps freestyle" id="{9e1fbdcb-70e7-4d9e-fd96-b976324231f8}">
+        <p14:section name="Apps freestyle" id="{dbfca20c-6195-fcb9-0996-e3359d7c3113}">
           <p14:sldIdLst>
             <p14:sldId id="260"/>
             <p14:sldId id="261"/>
@@ -139,7 +139,7 @@
             <p14:sldId id="263"/>
           </p14:sldIdLst>
         </p14:section>
-        <p14:section name="Encerramento" id="{5b8b87c1-d56a-ff19-8a51-2379b6ef2afd}">
+        <p14:section name="Encerramento" id="{6bd4895e-5db4-bd5a-5efc-630953b9a8f8}">
           <p14:sldIdLst>
             <p14:sldId id="264"/>
           </p14:sldIdLst>
@@ -5616,9 +5616,14 @@
             </a:avLst>
           </a:prstGeom>
           <a:solidFill>
-            <a:srgbClr val="1D2D3E"/>
+            <a:srgbClr val="1F1F1F"/>
           </a:solidFill>
-          <a:ln/>
+          <a:ln w="9525">
+            <a:solidFill>
+              <a:srgbClr val="2B2B2B"/>
+            </a:solidFill>
+            <a:prstDash val="solid"/>
+          </a:ln>
           <a:effectLst>
             <a:outerShdw sx="100000" sy="100000" kx="0" ky="0" algn="bl" rotWithShape="0" blurRad="101600" dist="25400" dir="5400000">
               <a:srgbClr val="223649">
@@ -5655,13 +5660,41 @@
             <a:r>
               <a:rPr lang="en-US" sz="1200" dirty="0">
                 <a:solidFill>
-                  <a:srgbClr val="89D1FF"/>
-                </a:solidFill>
-                <a:latin typeface="Courier New" pitchFamily="34" charset="0"/>
-                <a:ea typeface="Courier New" pitchFamily="34" charset="-122"/>
-                <a:cs typeface="Courier New" pitchFamily="34" charset="-120"/>
-              </a:rPr>
-              <a:t>@Aggregation.ApplySupported: {</a:t>
+                  <a:srgbClr val="DCDCAA"/>
+                </a:solidFill>
+                <a:latin typeface="Courier New" pitchFamily="34" charset="0"/>
+                <a:ea typeface="Courier New" pitchFamily="34" charset="-122"/>
+                <a:cs typeface="Courier New" pitchFamily="34" charset="-120"/>
+              </a:rPr>
+              <a:t>@Aggregation.ApplySupported</a:t>
+            </a:r>
+            <a:pPr indent="0" marL="0">
+              <a:buNone/>
+            </a:pPr>
+            <a:r>
+              <a:rPr lang="en-US" sz="1200" dirty="0">
+                <a:solidFill>
+                  <a:srgbClr val="CCCCCC"/>
+                </a:solidFill>
+                <a:latin typeface="Courier New" pitchFamily="34" charset="0"/>
+                <a:ea typeface="Courier New" pitchFamily="34" charset="-122"/>
+                <a:cs typeface="Courier New" pitchFamily="34" charset="-120"/>
+              </a:rPr>
+              <a:t>: </a:t>
+            </a:r>
+            <a:pPr indent="0" marL="0">
+              <a:buNone/>
+            </a:pPr>
+            <a:r>
+              <a:rPr lang="en-US" sz="1200" dirty="0">
+                <a:solidFill>
+                  <a:srgbClr val="FFD700"/>
+                </a:solidFill>
+                <a:latin typeface="Courier New" pitchFamily="34" charset="0"/>
+                <a:ea typeface="Courier New" pitchFamily="34" charset="-122"/>
+                <a:cs typeface="Courier New" pitchFamily="34" charset="-120"/>
+              </a:rPr>
+              <a:t>{</a:t>
             </a:r>
             <a:endParaRPr lang="en-US" sz="1200" dirty="0"/>
           </a:p>
@@ -5672,13 +5705,111 @@
             <a:r>
               <a:rPr lang="en-US" sz="1200" dirty="0">
                 <a:solidFill>
-                  <a:srgbClr val="EAECEE"/>
-                </a:solidFill>
-                <a:latin typeface="Courier New" pitchFamily="34" charset="0"/>
-                <a:ea typeface="Courier New" pitchFamily="34" charset="-122"/>
-                <a:cs typeface="Courier New" pitchFamily="34" charset="-120"/>
-              </a:rPr>
-              <a:t>  Transformations: ['aggregate', 'groupby',</a:t>
+                  <a:srgbClr val="CCCCCC"/>
+                </a:solidFill>
+                <a:latin typeface="Courier New" pitchFamily="34" charset="0"/>
+                <a:ea typeface="Courier New" pitchFamily="34" charset="-122"/>
+                <a:cs typeface="Courier New" pitchFamily="34" charset="-120"/>
+              </a:rPr>
+              <a:t>  </a:t>
+            </a:r>
+            <a:pPr indent="0" marL="0">
+              <a:buNone/>
+            </a:pPr>
+            <a:r>
+              <a:rPr lang="en-US" sz="1200" dirty="0">
+                <a:solidFill>
+                  <a:srgbClr val="4EC9B0"/>
+                </a:solidFill>
+                <a:latin typeface="Courier New" pitchFamily="34" charset="0"/>
+                <a:ea typeface="Courier New" pitchFamily="34" charset="-122"/>
+                <a:cs typeface="Courier New" pitchFamily="34" charset="-120"/>
+              </a:rPr>
+              <a:t>Transformations</a:t>
+            </a:r>
+            <a:pPr indent="0" marL="0">
+              <a:buNone/>
+            </a:pPr>
+            <a:r>
+              <a:rPr lang="en-US" sz="1200" dirty="0">
+                <a:solidFill>
+                  <a:srgbClr val="CCCCCC"/>
+                </a:solidFill>
+                <a:latin typeface="Courier New" pitchFamily="34" charset="0"/>
+                <a:ea typeface="Courier New" pitchFamily="34" charset="-122"/>
+                <a:cs typeface="Courier New" pitchFamily="34" charset="-120"/>
+              </a:rPr>
+              <a:t>: </a:t>
+            </a:r>
+            <a:pPr indent="0" marL="0">
+              <a:buNone/>
+            </a:pPr>
+            <a:r>
+              <a:rPr lang="en-US" sz="1200" dirty="0">
+                <a:solidFill>
+                  <a:srgbClr val="DA70D6"/>
+                </a:solidFill>
+                <a:latin typeface="Courier New" pitchFamily="34" charset="0"/>
+                <a:ea typeface="Courier New" pitchFamily="34" charset="-122"/>
+                <a:cs typeface="Courier New" pitchFamily="34" charset="-120"/>
+              </a:rPr>
+              <a:t>[</a:t>
+            </a:r>
+            <a:pPr indent="0" marL="0">
+              <a:buNone/>
+            </a:pPr>
+            <a:r>
+              <a:rPr lang="en-US" sz="1200" dirty="0">
+                <a:solidFill>
+                  <a:srgbClr val="CE9178"/>
+                </a:solidFill>
+                <a:latin typeface="Courier New" pitchFamily="34" charset="0"/>
+                <a:ea typeface="Courier New" pitchFamily="34" charset="-122"/>
+                <a:cs typeface="Courier New" pitchFamily="34" charset="-120"/>
+              </a:rPr>
+              <a:t>'aggregate'</a:t>
+            </a:r>
+            <a:pPr indent="0" marL="0">
+              <a:buNone/>
+            </a:pPr>
+            <a:r>
+              <a:rPr lang="en-US" sz="1200" dirty="0">
+                <a:solidFill>
+                  <a:srgbClr val="CCCCCC"/>
+                </a:solidFill>
+                <a:latin typeface="Courier New" pitchFamily="34" charset="0"/>
+                <a:ea typeface="Courier New" pitchFamily="34" charset="-122"/>
+                <a:cs typeface="Courier New" pitchFamily="34" charset="-120"/>
+              </a:rPr>
+              <a:t>, </a:t>
+            </a:r>
+            <a:pPr indent="0" marL="0">
+              <a:buNone/>
+            </a:pPr>
+            <a:r>
+              <a:rPr lang="en-US" sz="1200" dirty="0">
+                <a:solidFill>
+                  <a:srgbClr val="CE9178"/>
+                </a:solidFill>
+                <a:latin typeface="Courier New" pitchFamily="34" charset="0"/>
+                <a:ea typeface="Courier New" pitchFamily="34" charset="-122"/>
+                <a:cs typeface="Courier New" pitchFamily="34" charset="-120"/>
+              </a:rPr>
+              <a:t>'groupby'</a:t>
+            </a:r>
+            <a:pPr indent="0" marL="0">
+              <a:buNone/>
+            </a:pPr>
+            <a:r>
+              <a:rPr lang="en-US" sz="1200" dirty="0">
+                <a:solidFill>
+                  <a:srgbClr val="CCCCCC"/>
+                </a:solidFill>
+                <a:latin typeface="Courier New" pitchFamily="34" charset="0"/>
+                <a:ea typeface="Courier New" pitchFamily="34" charset="-122"/>
+                <a:cs typeface="Courier New" pitchFamily="34" charset="-120"/>
+              </a:rPr>
+              <a:t>,</a:t>
             </a:r>
             <a:endParaRPr lang="en-US" sz="1200" dirty="0"/>
           </a:p>
@@ -5689,13 +5820,111 @@
             <a:r>
               <a:rPr lang="en-US" sz="1200" dirty="0">
                 <a:solidFill>
-                  <a:srgbClr val="EAECEE"/>
-                </a:solidFill>
-                <a:latin typeface="Courier New" pitchFamily="34" charset="0"/>
-                <a:ea typeface="Courier New" pitchFamily="34" charset="-122"/>
-                <a:cs typeface="Courier New" pitchFamily="34" charset="-120"/>
-              </a:rPr>
-              <a:t>                    'filter', 'orderby', 'top'],</a:t>
+                  <a:srgbClr val="CCCCCC"/>
+                </a:solidFill>
+                <a:latin typeface="Courier New" pitchFamily="34" charset="0"/>
+                <a:ea typeface="Courier New" pitchFamily="34" charset="-122"/>
+                <a:cs typeface="Courier New" pitchFamily="34" charset="-120"/>
+              </a:rPr>
+              <a:t>                    </a:t>
+            </a:r>
+            <a:pPr indent="0" marL="0">
+              <a:buNone/>
+            </a:pPr>
+            <a:r>
+              <a:rPr lang="en-US" sz="1200" dirty="0">
+                <a:solidFill>
+                  <a:srgbClr val="CE9178"/>
+                </a:solidFill>
+                <a:latin typeface="Courier New" pitchFamily="34" charset="0"/>
+                <a:ea typeface="Courier New" pitchFamily="34" charset="-122"/>
+                <a:cs typeface="Courier New" pitchFamily="34" charset="-120"/>
+              </a:rPr>
+              <a:t>'filter'</a:t>
+            </a:r>
+            <a:pPr indent="0" marL="0">
+              <a:buNone/>
+            </a:pPr>
+            <a:r>
+              <a:rPr lang="en-US" sz="1200" dirty="0">
+                <a:solidFill>
+                  <a:srgbClr val="CCCCCC"/>
+                </a:solidFill>
+                <a:latin typeface="Courier New" pitchFamily="34" charset="0"/>
+                <a:ea typeface="Courier New" pitchFamily="34" charset="-122"/>
+                <a:cs typeface="Courier New" pitchFamily="34" charset="-120"/>
+              </a:rPr>
+              <a:t>, </a:t>
+            </a:r>
+            <a:pPr indent="0" marL="0">
+              <a:buNone/>
+            </a:pPr>
+            <a:r>
+              <a:rPr lang="en-US" sz="1200" dirty="0">
+                <a:solidFill>
+                  <a:srgbClr val="CE9178"/>
+                </a:solidFill>
+                <a:latin typeface="Courier New" pitchFamily="34" charset="0"/>
+                <a:ea typeface="Courier New" pitchFamily="34" charset="-122"/>
+                <a:cs typeface="Courier New" pitchFamily="34" charset="-120"/>
+              </a:rPr>
+              <a:t>'orderby'</a:t>
+            </a:r>
+            <a:pPr indent="0" marL="0">
+              <a:buNone/>
+            </a:pPr>
+            <a:r>
+              <a:rPr lang="en-US" sz="1200" dirty="0">
+                <a:solidFill>
+                  <a:srgbClr val="CCCCCC"/>
+                </a:solidFill>
+                <a:latin typeface="Courier New" pitchFamily="34" charset="0"/>
+                <a:ea typeface="Courier New" pitchFamily="34" charset="-122"/>
+                <a:cs typeface="Courier New" pitchFamily="34" charset="-120"/>
+              </a:rPr>
+              <a:t>, </a:t>
+            </a:r>
+            <a:pPr indent="0" marL="0">
+              <a:buNone/>
+            </a:pPr>
+            <a:r>
+              <a:rPr lang="en-US" sz="1200" dirty="0">
+                <a:solidFill>
+                  <a:srgbClr val="CE9178"/>
+                </a:solidFill>
+                <a:latin typeface="Courier New" pitchFamily="34" charset="0"/>
+                <a:ea typeface="Courier New" pitchFamily="34" charset="-122"/>
+                <a:cs typeface="Courier New" pitchFamily="34" charset="-120"/>
+              </a:rPr>
+              <a:t>'top'</a:t>
+            </a:r>
+            <a:pPr indent="0" marL="0">
+              <a:buNone/>
+            </a:pPr>
+            <a:r>
+              <a:rPr lang="en-US" sz="1200" dirty="0">
+                <a:solidFill>
+                  <a:srgbClr val="DA70D6"/>
+                </a:solidFill>
+                <a:latin typeface="Courier New" pitchFamily="34" charset="0"/>
+                <a:ea typeface="Courier New" pitchFamily="34" charset="-122"/>
+                <a:cs typeface="Courier New" pitchFamily="34" charset="-120"/>
+              </a:rPr>
+              <a:t>]</a:t>
+            </a:r>
+            <a:pPr indent="0" marL="0">
+              <a:buNone/>
+            </a:pPr>
+            <a:r>
+              <a:rPr lang="en-US" sz="1200" dirty="0">
+                <a:solidFill>
+                  <a:srgbClr val="CCCCCC"/>
+                </a:solidFill>
+                <a:latin typeface="Courier New" pitchFamily="34" charset="0"/>
+                <a:ea typeface="Courier New" pitchFamily="34" charset="-122"/>
+                <a:cs typeface="Courier New" pitchFamily="34" charset="-120"/>
+              </a:rPr>
+              <a:t>,</a:t>
             </a:r>
             <a:endParaRPr lang="en-US" sz="1200" dirty="0"/>
           </a:p>
@@ -5706,13 +5935,153 @@
             <a:r>
               <a:rPr lang="en-US" sz="1200" dirty="0">
                 <a:solidFill>
-                  <a:srgbClr val="EAECEE"/>
-                </a:solidFill>
-                <a:latin typeface="Courier New" pitchFamily="34" charset="0"/>
-                <a:ea typeface="Courier New" pitchFamily="34" charset="-122"/>
-                <a:cs typeface="Courier New" pitchFamily="34" charset="-120"/>
-              </a:rPr>
-              <a:t>  GroupableProperties: [statusPedido, uf, mesCriacao],</a:t>
+                  <a:srgbClr val="CCCCCC"/>
+                </a:solidFill>
+                <a:latin typeface="Courier New" pitchFamily="34" charset="0"/>
+                <a:ea typeface="Courier New" pitchFamily="34" charset="-122"/>
+                <a:cs typeface="Courier New" pitchFamily="34" charset="-120"/>
+              </a:rPr>
+              <a:t>  </a:t>
+            </a:r>
+            <a:pPr indent="0" marL="0">
+              <a:buNone/>
+            </a:pPr>
+            <a:r>
+              <a:rPr lang="en-US" sz="1200" dirty="0">
+                <a:solidFill>
+                  <a:srgbClr val="4EC9B0"/>
+                </a:solidFill>
+                <a:latin typeface="Courier New" pitchFamily="34" charset="0"/>
+                <a:ea typeface="Courier New" pitchFamily="34" charset="-122"/>
+                <a:cs typeface="Courier New" pitchFamily="34" charset="-120"/>
+              </a:rPr>
+              <a:t>GroupableProperties</a:t>
+            </a:r>
+            <a:pPr indent="0" marL="0">
+              <a:buNone/>
+            </a:pPr>
+            <a:r>
+              <a:rPr lang="en-US" sz="1200" dirty="0">
+                <a:solidFill>
+                  <a:srgbClr val="CCCCCC"/>
+                </a:solidFill>
+                <a:latin typeface="Courier New" pitchFamily="34" charset="0"/>
+                <a:ea typeface="Courier New" pitchFamily="34" charset="-122"/>
+                <a:cs typeface="Courier New" pitchFamily="34" charset="-120"/>
+              </a:rPr>
+              <a:t>: </a:t>
+            </a:r>
+            <a:pPr indent="0" marL="0">
+              <a:buNone/>
+            </a:pPr>
+            <a:r>
+              <a:rPr lang="en-US" sz="1200" dirty="0">
+                <a:solidFill>
+                  <a:srgbClr val="DA70D6"/>
+                </a:solidFill>
+                <a:latin typeface="Courier New" pitchFamily="34" charset="0"/>
+                <a:ea typeface="Courier New" pitchFamily="34" charset="-122"/>
+                <a:cs typeface="Courier New" pitchFamily="34" charset="-120"/>
+              </a:rPr>
+              <a:t>[</a:t>
+            </a:r>
+            <a:pPr indent="0" marL="0">
+              <a:buNone/>
+            </a:pPr>
+            <a:r>
+              <a:rPr lang="en-US" sz="1200" dirty="0">
+                <a:solidFill>
+                  <a:srgbClr val="9CDCFE"/>
+                </a:solidFill>
+                <a:latin typeface="Courier New" pitchFamily="34" charset="0"/>
+                <a:ea typeface="Courier New" pitchFamily="34" charset="-122"/>
+                <a:cs typeface="Courier New" pitchFamily="34" charset="-120"/>
+              </a:rPr>
+              <a:t>statusPedido</a:t>
+            </a:r>
+            <a:pPr indent="0" marL="0">
+              <a:buNone/>
+            </a:pPr>
+            <a:r>
+              <a:rPr lang="en-US" sz="1200" dirty="0">
+                <a:solidFill>
+                  <a:srgbClr val="CCCCCC"/>
+                </a:solidFill>
+                <a:latin typeface="Courier New" pitchFamily="34" charset="0"/>
+                <a:ea typeface="Courier New" pitchFamily="34" charset="-122"/>
+                <a:cs typeface="Courier New" pitchFamily="34" charset="-120"/>
+              </a:rPr>
+              <a:t>, </a:t>
+            </a:r>
+            <a:pPr indent="0" marL="0">
+              <a:buNone/>
+            </a:pPr>
+            <a:r>
+              <a:rPr lang="en-US" sz="1200" dirty="0">
+                <a:solidFill>
+                  <a:srgbClr val="9CDCFE"/>
+                </a:solidFill>
+                <a:latin typeface="Courier New" pitchFamily="34" charset="0"/>
+                <a:ea typeface="Courier New" pitchFamily="34" charset="-122"/>
+                <a:cs typeface="Courier New" pitchFamily="34" charset="-120"/>
+              </a:rPr>
+              <a:t>uf</a:t>
+            </a:r>
+            <a:pPr indent="0" marL="0">
+              <a:buNone/>
+            </a:pPr>
+            <a:r>
+              <a:rPr lang="en-US" sz="1200" dirty="0">
+                <a:solidFill>
+                  <a:srgbClr val="CCCCCC"/>
+                </a:solidFill>
+                <a:latin typeface="Courier New" pitchFamily="34" charset="0"/>
+                <a:ea typeface="Courier New" pitchFamily="34" charset="-122"/>
+                <a:cs typeface="Courier New" pitchFamily="34" charset="-120"/>
+              </a:rPr>
+              <a:t>, </a:t>
+            </a:r>
+            <a:pPr indent="0" marL="0">
+              <a:buNone/>
+            </a:pPr>
+            <a:r>
+              <a:rPr lang="en-US" sz="1200" dirty="0">
+                <a:solidFill>
+                  <a:srgbClr val="9CDCFE"/>
+                </a:solidFill>
+                <a:latin typeface="Courier New" pitchFamily="34" charset="0"/>
+                <a:ea typeface="Courier New" pitchFamily="34" charset="-122"/>
+                <a:cs typeface="Courier New" pitchFamily="34" charset="-120"/>
+              </a:rPr>
+              <a:t>mesCriacao</a:t>
+            </a:r>
+            <a:pPr indent="0" marL="0">
+              <a:buNone/>
+            </a:pPr>
+            <a:r>
+              <a:rPr lang="en-US" sz="1200" dirty="0">
+                <a:solidFill>
+                  <a:srgbClr val="DA70D6"/>
+                </a:solidFill>
+                <a:latin typeface="Courier New" pitchFamily="34" charset="0"/>
+                <a:ea typeface="Courier New" pitchFamily="34" charset="-122"/>
+                <a:cs typeface="Courier New" pitchFamily="34" charset="-120"/>
+              </a:rPr>
+              <a:t>]</a:t>
+            </a:r>
+            <a:pPr indent="0" marL="0">
+              <a:buNone/>
+            </a:pPr>
+            <a:r>
+              <a:rPr lang="en-US" sz="1200" dirty="0">
+                <a:solidFill>
+                  <a:srgbClr val="CCCCCC"/>
+                </a:solidFill>
+                <a:latin typeface="Courier New" pitchFamily="34" charset="0"/>
+                <a:ea typeface="Courier New" pitchFamily="34" charset="-122"/>
+                <a:cs typeface="Courier New" pitchFamily="34" charset="-120"/>
+              </a:rPr>
+              <a:t>,</a:t>
             </a:r>
             <a:endParaRPr lang="en-US" sz="1200" dirty="0"/>
           </a:p>
@@ -5723,13 +6092,167 @@
             <a:r>
               <a:rPr lang="en-US" sz="1200" dirty="0">
                 <a:solidFill>
-                  <a:srgbClr val="EAECEE"/>
-                </a:solidFill>
-                <a:latin typeface="Courier New" pitchFamily="34" charset="0"/>
-                <a:ea typeface="Courier New" pitchFamily="34" charset="-122"/>
-                <a:cs typeface="Courier New" pitchFamily="34" charset="-120"/>
-              </a:rPr>
-              <a:t>  AggregatableProperties: [{ Property: valorTotal }]</a:t>
+                  <a:srgbClr val="CCCCCC"/>
+                </a:solidFill>
+                <a:latin typeface="Courier New" pitchFamily="34" charset="0"/>
+                <a:ea typeface="Courier New" pitchFamily="34" charset="-122"/>
+                <a:cs typeface="Courier New" pitchFamily="34" charset="-120"/>
+              </a:rPr>
+              <a:t>  </a:t>
+            </a:r>
+            <a:pPr indent="0" marL="0">
+              <a:buNone/>
+            </a:pPr>
+            <a:r>
+              <a:rPr lang="en-US" sz="1200" dirty="0">
+                <a:solidFill>
+                  <a:srgbClr val="4EC9B0"/>
+                </a:solidFill>
+                <a:latin typeface="Courier New" pitchFamily="34" charset="0"/>
+                <a:ea typeface="Courier New" pitchFamily="34" charset="-122"/>
+                <a:cs typeface="Courier New" pitchFamily="34" charset="-120"/>
+              </a:rPr>
+              <a:t>AggregatableProperties</a:t>
+            </a:r>
+            <a:pPr indent="0" marL="0">
+              <a:buNone/>
+            </a:pPr>
+            <a:r>
+              <a:rPr lang="en-US" sz="1200" dirty="0">
+                <a:solidFill>
+                  <a:srgbClr val="CCCCCC"/>
+                </a:solidFill>
+                <a:latin typeface="Courier New" pitchFamily="34" charset="0"/>
+                <a:ea typeface="Courier New" pitchFamily="34" charset="-122"/>
+                <a:cs typeface="Courier New" pitchFamily="34" charset="-120"/>
+              </a:rPr>
+              <a:t>: </a:t>
+            </a:r>
+            <a:pPr indent="0" marL="0">
+              <a:buNone/>
+            </a:pPr>
+            <a:r>
+              <a:rPr lang="en-US" sz="1200" dirty="0">
+                <a:solidFill>
+                  <a:srgbClr val="DA70D6"/>
+                </a:solidFill>
+                <a:latin typeface="Courier New" pitchFamily="34" charset="0"/>
+                <a:ea typeface="Courier New" pitchFamily="34" charset="-122"/>
+                <a:cs typeface="Courier New" pitchFamily="34" charset="-120"/>
+              </a:rPr>
+              <a:t>[</a:t>
+            </a:r>
+            <a:pPr indent="0" marL="0">
+              <a:buNone/>
+            </a:pPr>
+            <a:r>
+              <a:rPr lang="en-US" sz="1200" dirty="0">
+                <a:solidFill>
+                  <a:srgbClr val="179FFF"/>
+                </a:solidFill>
+                <a:latin typeface="Courier New" pitchFamily="34" charset="0"/>
+                <a:ea typeface="Courier New" pitchFamily="34" charset="-122"/>
+                <a:cs typeface="Courier New" pitchFamily="34" charset="-120"/>
+              </a:rPr>
+              <a:t>{</a:t>
+            </a:r>
+            <a:pPr indent="0" marL="0">
+              <a:buNone/>
+            </a:pPr>
+            <a:r>
+              <a:rPr lang="en-US" sz="1200" dirty="0">
+                <a:solidFill>
+                  <a:srgbClr val="CCCCCC"/>
+                </a:solidFill>
+                <a:latin typeface="Courier New" pitchFamily="34" charset="0"/>
+                <a:ea typeface="Courier New" pitchFamily="34" charset="-122"/>
+                <a:cs typeface="Courier New" pitchFamily="34" charset="-120"/>
+              </a:rPr>
+              <a:t> </a:t>
+            </a:r>
+            <a:pPr indent="0" marL="0">
+              <a:buNone/>
+            </a:pPr>
+            <a:r>
+              <a:rPr lang="en-US" sz="1200" dirty="0">
+                <a:solidFill>
+                  <a:srgbClr val="4EC9B0"/>
+                </a:solidFill>
+                <a:latin typeface="Courier New" pitchFamily="34" charset="0"/>
+                <a:ea typeface="Courier New" pitchFamily="34" charset="-122"/>
+                <a:cs typeface="Courier New" pitchFamily="34" charset="-120"/>
+              </a:rPr>
+              <a:t>Property</a:t>
+            </a:r>
+            <a:pPr indent="0" marL="0">
+              <a:buNone/>
+            </a:pPr>
+            <a:r>
+              <a:rPr lang="en-US" sz="1200" dirty="0">
+                <a:solidFill>
+                  <a:srgbClr val="CCCCCC"/>
+                </a:solidFill>
+                <a:latin typeface="Courier New" pitchFamily="34" charset="0"/>
+                <a:ea typeface="Courier New" pitchFamily="34" charset="-122"/>
+                <a:cs typeface="Courier New" pitchFamily="34" charset="-120"/>
+              </a:rPr>
+              <a:t>: </a:t>
+            </a:r>
+            <a:pPr indent="0" marL="0">
+              <a:buNone/>
+            </a:pPr>
+            <a:r>
+              <a:rPr lang="en-US" sz="1200" dirty="0">
+                <a:solidFill>
+                  <a:srgbClr val="9CDCFE"/>
+                </a:solidFill>
+                <a:latin typeface="Courier New" pitchFamily="34" charset="0"/>
+                <a:ea typeface="Courier New" pitchFamily="34" charset="-122"/>
+                <a:cs typeface="Courier New" pitchFamily="34" charset="-120"/>
+              </a:rPr>
+              <a:t>valorTotal</a:t>
+            </a:r>
+            <a:pPr indent="0" marL="0">
+              <a:buNone/>
+            </a:pPr>
+            <a:r>
+              <a:rPr lang="en-US" sz="1200" dirty="0">
+                <a:solidFill>
+                  <a:srgbClr val="CCCCCC"/>
+                </a:solidFill>
+                <a:latin typeface="Courier New" pitchFamily="34" charset="0"/>
+                <a:ea typeface="Courier New" pitchFamily="34" charset="-122"/>
+                <a:cs typeface="Courier New" pitchFamily="34" charset="-120"/>
+              </a:rPr>
+              <a:t> </a:t>
+            </a:r>
+            <a:pPr indent="0" marL="0">
+              <a:buNone/>
+            </a:pPr>
+            <a:r>
+              <a:rPr lang="en-US" sz="1200" dirty="0">
+                <a:solidFill>
+                  <a:srgbClr val="179FFF"/>
+                </a:solidFill>
+                <a:latin typeface="Courier New" pitchFamily="34" charset="0"/>
+                <a:ea typeface="Courier New" pitchFamily="34" charset="-122"/>
+                <a:cs typeface="Courier New" pitchFamily="34" charset="-120"/>
+              </a:rPr>
+              <a:t>}</a:t>
+            </a:r>
+            <a:pPr indent="0" marL="0">
+              <a:buNone/>
+            </a:pPr>
+            <a:r>
+              <a:rPr lang="en-US" sz="1200" dirty="0">
+                <a:solidFill>
+                  <a:srgbClr val="DA70D6"/>
+                </a:solidFill>
+                <a:latin typeface="Courier New" pitchFamily="34" charset="0"/>
+                <a:ea typeface="Courier New" pitchFamily="34" charset="-122"/>
+                <a:cs typeface="Courier New" pitchFamily="34" charset="-120"/>
+              </a:rPr>
+              <a:t>]</a:t>
             </a:r>
             <a:endParaRPr lang="en-US" sz="1200" dirty="0"/>
           </a:p>
@@ -5740,7 +6263,7 @@
             <a:r>
               <a:rPr lang="en-US" sz="1200" dirty="0">
                 <a:solidFill>
-                  <a:srgbClr val="EAECEE"/>
+                  <a:srgbClr val="FFD700"/>
                 </a:solidFill>
                 <a:latin typeface="Courier New" pitchFamily="34" charset="0"/>
                 <a:ea typeface="Courier New" pitchFamily="34" charset="-122"/>
@@ -5757,13 +6280,69 @@
             <a:r>
               <a:rPr lang="en-US" sz="1200" dirty="0">
                 <a:solidFill>
-                  <a:srgbClr val="89D1FF"/>
-                </a:solidFill>
-                <a:latin typeface="Courier New" pitchFamily="34" charset="0"/>
-                <a:ea typeface="Courier New" pitchFamily="34" charset="-122"/>
-                <a:cs typeface="Courier New" pitchFamily="34" charset="-120"/>
-              </a:rPr>
-              <a:t>@Aggregation.CustomAggregate #valorTotal: 'Edm.Decimal'</a:t>
+                  <a:srgbClr val="DCDCAA"/>
+                </a:solidFill>
+                <a:latin typeface="Courier New" pitchFamily="34" charset="0"/>
+                <a:ea typeface="Courier New" pitchFamily="34" charset="-122"/>
+                <a:cs typeface="Courier New" pitchFamily="34" charset="-120"/>
+              </a:rPr>
+              <a:t>@Aggregation.CustomAggregate</a:t>
+            </a:r>
+            <a:pPr indent="0" marL="0">
+              <a:buNone/>
+            </a:pPr>
+            <a:r>
+              <a:rPr lang="en-US" sz="1200" dirty="0">
+                <a:solidFill>
+                  <a:srgbClr val="CCCCCC"/>
+                </a:solidFill>
+                <a:latin typeface="Courier New" pitchFamily="34" charset="0"/>
+                <a:ea typeface="Courier New" pitchFamily="34" charset="-122"/>
+                <a:cs typeface="Courier New" pitchFamily="34" charset="-120"/>
+              </a:rPr>
+              <a:t> </a:t>
+            </a:r>
+            <a:pPr indent="0" marL="0">
+              <a:buNone/>
+            </a:pPr>
+            <a:r>
+              <a:rPr lang="en-US" sz="1200" dirty="0">
+                <a:solidFill>
+                  <a:srgbClr val="4FC1FF"/>
+                </a:solidFill>
+                <a:latin typeface="Courier New" pitchFamily="34" charset="0"/>
+                <a:ea typeface="Courier New" pitchFamily="34" charset="-122"/>
+                <a:cs typeface="Courier New" pitchFamily="34" charset="-120"/>
+              </a:rPr>
+              <a:t>#valorTotal</a:t>
+            </a:r>
+            <a:pPr indent="0" marL="0">
+              <a:buNone/>
+            </a:pPr>
+            <a:r>
+              <a:rPr lang="en-US" sz="1200" dirty="0">
+                <a:solidFill>
+                  <a:srgbClr val="CCCCCC"/>
+                </a:solidFill>
+                <a:latin typeface="Courier New" pitchFamily="34" charset="0"/>
+                <a:ea typeface="Courier New" pitchFamily="34" charset="-122"/>
+                <a:cs typeface="Courier New" pitchFamily="34" charset="-120"/>
+              </a:rPr>
+              <a:t>: </a:t>
+            </a:r>
+            <a:pPr indent="0" marL="0">
+              <a:buNone/>
+            </a:pPr>
+            <a:r>
+              <a:rPr lang="en-US" sz="1200" dirty="0">
+                <a:solidFill>
+                  <a:srgbClr val="CE9178"/>
+                </a:solidFill>
+                <a:latin typeface="Courier New" pitchFamily="34" charset="0"/>
+                <a:ea typeface="Courier New" pitchFamily="34" charset="-122"/>
+                <a:cs typeface="Courier New" pitchFamily="34" charset="-120"/>
+              </a:rPr>
+              <a:t>'Edm.Decimal'</a:t>
             </a:r>
             <a:endParaRPr lang="en-US" sz="1200" dirty="0"/>
           </a:p>
@@ -5774,7 +6353,7 @@
             <a:r>
               <a:rPr lang="en-US" sz="1200" dirty="0">
                 <a:solidFill>
-                  <a:srgbClr val="89D1FF"/>
+                  <a:srgbClr val="DCDCAA"/>
                 </a:solidFill>
                 <a:latin typeface="Courier New" pitchFamily="34" charset="0"/>
                 <a:ea typeface="Courier New" pitchFamily="34" charset="-122"/>
@@ -5791,13 +6370,209 @@
             <a:r>
               <a:rPr lang="en-US" sz="1200" dirty="0">
                 <a:solidFill>
-                  <a:srgbClr val="EAECEE"/>
-                </a:solidFill>
-                <a:latin typeface="Courier New" pitchFamily="34" charset="0"/>
-                <a:ea typeface="Courier New" pitchFamily="34" charset="-122"/>
-                <a:cs typeface="Courier New" pitchFamily="34" charset="-120"/>
-              </a:rPr>
-              <a:t>entity PedidosAnalise as select from db.Pedidos {</a:t>
+                  <a:srgbClr val="569CD6"/>
+                </a:solidFill>
+                <a:latin typeface="Courier New" pitchFamily="34" charset="0"/>
+                <a:ea typeface="Courier New" pitchFamily="34" charset="-122"/>
+                <a:cs typeface="Courier New" pitchFamily="34" charset="-120"/>
+              </a:rPr>
+              <a:t>entity</a:t>
+            </a:r>
+            <a:pPr indent="0" marL="0">
+              <a:buNone/>
+            </a:pPr>
+            <a:r>
+              <a:rPr lang="en-US" sz="1200" dirty="0">
+                <a:solidFill>
+                  <a:srgbClr val="CCCCCC"/>
+                </a:solidFill>
+                <a:latin typeface="Courier New" pitchFamily="34" charset="0"/>
+                <a:ea typeface="Courier New" pitchFamily="34" charset="-122"/>
+                <a:cs typeface="Courier New" pitchFamily="34" charset="-120"/>
+              </a:rPr>
+              <a:t> </a:t>
+            </a:r>
+            <a:pPr indent="0" marL="0">
+              <a:buNone/>
+            </a:pPr>
+            <a:r>
+              <a:rPr lang="en-US" sz="1200" dirty="0">
+                <a:solidFill>
+                  <a:srgbClr val="4EC9B0"/>
+                </a:solidFill>
+                <a:latin typeface="Courier New" pitchFamily="34" charset="0"/>
+                <a:ea typeface="Courier New" pitchFamily="34" charset="-122"/>
+                <a:cs typeface="Courier New" pitchFamily="34" charset="-120"/>
+              </a:rPr>
+              <a:t>PedidosAnalise</a:t>
+            </a:r>
+            <a:pPr indent="0" marL="0">
+              <a:buNone/>
+            </a:pPr>
+            <a:r>
+              <a:rPr lang="en-US" sz="1200" dirty="0">
+                <a:solidFill>
+                  <a:srgbClr val="CCCCCC"/>
+                </a:solidFill>
+                <a:latin typeface="Courier New" pitchFamily="34" charset="0"/>
+                <a:ea typeface="Courier New" pitchFamily="34" charset="-122"/>
+                <a:cs typeface="Courier New" pitchFamily="34" charset="-120"/>
+              </a:rPr>
+              <a:t> </a:t>
+            </a:r>
+            <a:pPr indent="0" marL="0">
+              <a:buNone/>
+            </a:pPr>
+            <a:r>
+              <a:rPr lang="en-US" sz="1200" dirty="0">
+                <a:solidFill>
+                  <a:srgbClr val="569CD6"/>
+                </a:solidFill>
+                <a:latin typeface="Courier New" pitchFamily="34" charset="0"/>
+                <a:ea typeface="Courier New" pitchFamily="34" charset="-122"/>
+                <a:cs typeface="Courier New" pitchFamily="34" charset="-120"/>
+              </a:rPr>
+              <a:t>as</a:t>
+            </a:r>
+            <a:pPr indent="0" marL="0">
+              <a:buNone/>
+            </a:pPr>
+            <a:r>
+              <a:rPr lang="en-US" sz="1200" dirty="0">
+                <a:solidFill>
+                  <a:srgbClr val="CCCCCC"/>
+                </a:solidFill>
+                <a:latin typeface="Courier New" pitchFamily="34" charset="0"/>
+                <a:ea typeface="Courier New" pitchFamily="34" charset="-122"/>
+                <a:cs typeface="Courier New" pitchFamily="34" charset="-120"/>
+              </a:rPr>
+              <a:t> </a:t>
+            </a:r>
+            <a:pPr indent="0" marL="0">
+              <a:buNone/>
+            </a:pPr>
+            <a:r>
+              <a:rPr lang="en-US" sz="1200" dirty="0">
+                <a:solidFill>
+                  <a:srgbClr val="569CD6"/>
+                </a:solidFill>
+                <a:latin typeface="Courier New" pitchFamily="34" charset="0"/>
+                <a:ea typeface="Courier New" pitchFamily="34" charset="-122"/>
+                <a:cs typeface="Courier New" pitchFamily="34" charset="-120"/>
+              </a:rPr>
+              <a:t>select</a:t>
+            </a:r>
+            <a:pPr indent="0" marL="0">
+              <a:buNone/>
+            </a:pPr>
+            <a:r>
+              <a:rPr lang="en-US" sz="1200" dirty="0">
+                <a:solidFill>
+                  <a:srgbClr val="CCCCCC"/>
+                </a:solidFill>
+                <a:latin typeface="Courier New" pitchFamily="34" charset="0"/>
+                <a:ea typeface="Courier New" pitchFamily="34" charset="-122"/>
+                <a:cs typeface="Courier New" pitchFamily="34" charset="-120"/>
+              </a:rPr>
+              <a:t> </a:t>
+            </a:r>
+            <a:pPr indent="0" marL="0">
+              <a:buNone/>
+            </a:pPr>
+            <a:r>
+              <a:rPr lang="en-US" sz="1200" dirty="0">
+                <a:solidFill>
+                  <a:srgbClr val="C586C0"/>
+                </a:solidFill>
+                <a:latin typeface="Courier New" pitchFamily="34" charset="0"/>
+                <a:ea typeface="Courier New" pitchFamily="34" charset="-122"/>
+                <a:cs typeface="Courier New" pitchFamily="34" charset="-120"/>
+              </a:rPr>
+              <a:t>from</a:t>
+            </a:r>
+            <a:pPr indent="0" marL="0">
+              <a:buNone/>
+            </a:pPr>
+            <a:r>
+              <a:rPr lang="en-US" sz="1200" dirty="0">
+                <a:solidFill>
+                  <a:srgbClr val="CCCCCC"/>
+                </a:solidFill>
+                <a:latin typeface="Courier New" pitchFamily="34" charset="0"/>
+                <a:ea typeface="Courier New" pitchFamily="34" charset="-122"/>
+                <a:cs typeface="Courier New" pitchFamily="34" charset="-120"/>
+              </a:rPr>
+              <a:t> </a:t>
+            </a:r>
+            <a:pPr indent="0" marL="0">
+              <a:buNone/>
+            </a:pPr>
+            <a:r>
+              <a:rPr lang="en-US" sz="1200" dirty="0">
+                <a:solidFill>
+                  <a:srgbClr val="9CDCFE"/>
+                </a:solidFill>
+                <a:latin typeface="Courier New" pitchFamily="34" charset="0"/>
+                <a:ea typeface="Courier New" pitchFamily="34" charset="-122"/>
+                <a:cs typeface="Courier New" pitchFamily="34" charset="-120"/>
+              </a:rPr>
+              <a:t>db</a:t>
+            </a:r>
+            <a:pPr indent="0" marL="0">
+              <a:buNone/>
+            </a:pPr>
+            <a:r>
+              <a:rPr lang="en-US" sz="1200" dirty="0">
+                <a:solidFill>
+                  <a:srgbClr val="CCCCCC"/>
+                </a:solidFill>
+                <a:latin typeface="Courier New" pitchFamily="34" charset="0"/>
+                <a:ea typeface="Courier New" pitchFamily="34" charset="-122"/>
+                <a:cs typeface="Courier New" pitchFamily="34" charset="-120"/>
+              </a:rPr>
+              <a:t>.</a:t>
+            </a:r>
+            <a:pPr indent="0" marL="0">
+              <a:buNone/>
+            </a:pPr>
+            <a:r>
+              <a:rPr lang="en-US" sz="1200" dirty="0">
+                <a:solidFill>
+                  <a:srgbClr val="4EC9B0"/>
+                </a:solidFill>
+                <a:latin typeface="Courier New" pitchFamily="34" charset="0"/>
+                <a:ea typeface="Courier New" pitchFamily="34" charset="-122"/>
+                <a:cs typeface="Courier New" pitchFamily="34" charset="-120"/>
+              </a:rPr>
+              <a:t>Pedidos</a:t>
+            </a:r>
+            <a:pPr indent="0" marL="0">
+              <a:buNone/>
+            </a:pPr>
+            <a:r>
+              <a:rPr lang="en-US" sz="1200" dirty="0">
+                <a:solidFill>
+                  <a:srgbClr val="CCCCCC"/>
+                </a:solidFill>
+                <a:latin typeface="Courier New" pitchFamily="34" charset="0"/>
+                <a:ea typeface="Courier New" pitchFamily="34" charset="-122"/>
+                <a:cs typeface="Courier New" pitchFamily="34" charset="-120"/>
+              </a:rPr>
+              <a:t> </a:t>
+            </a:r>
+            <a:pPr indent="0" marL="0">
+              <a:buNone/>
+            </a:pPr>
+            <a:r>
+              <a:rPr lang="en-US" sz="1200" dirty="0">
+                <a:solidFill>
+                  <a:srgbClr val="FFD700"/>
+                </a:solidFill>
+                <a:latin typeface="Courier New" pitchFamily="34" charset="0"/>
+                <a:ea typeface="Courier New" pitchFamily="34" charset="-122"/>
+                <a:cs typeface="Courier New" pitchFamily="34" charset="-120"/>
+              </a:rPr>
+              <a:t>{</a:t>
             </a:r>
             <a:endParaRPr lang="en-US" sz="1200" dirty="0"/>
           </a:p>
@@ -5808,13 +6583,69 @@
             <a:r>
               <a:rPr lang="en-US" sz="1200" dirty="0">
                 <a:solidFill>
-                  <a:srgbClr val="EAECEE"/>
-                </a:solidFill>
-                <a:latin typeface="Courier New" pitchFamily="34" charset="0"/>
-                <a:ea typeface="Courier New" pitchFamily="34" charset="-122"/>
-                <a:cs typeface="Courier New" pitchFamily="34" charset="-120"/>
-              </a:rPr>
-              <a:t>  key ID,</a:t>
+                  <a:srgbClr val="CCCCCC"/>
+                </a:solidFill>
+                <a:latin typeface="Courier New" pitchFamily="34" charset="0"/>
+                <a:ea typeface="Courier New" pitchFamily="34" charset="-122"/>
+                <a:cs typeface="Courier New" pitchFamily="34" charset="-120"/>
+              </a:rPr>
+              <a:t>  </a:t>
+            </a:r>
+            <a:pPr indent="0" marL="0">
+              <a:buNone/>
+            </a:pPr>
+            <a:r>
+              <a:rPr lang="en-US" sz="1200" dirty="0">
+                <a:solidFill>
+                  <a:srgbClr val="569CD6"/>
+                </a:solidFill>
+                <a:latin typeface="Courier New" pitchFamily="34" charset="0"/>
+                <a:ea typeface="Courier New" pitchFamily="34" charset="-122"/>
+                <a:cs typeface="Courier New" pitchFamily="34" charset="-120"/>
+              </a:rPr>
+              <a:t>key</a:t>
+            </a:r>
+            <a:pPr indent="0" marL="0">
+              <a:buNone/>
+            </a:pPr>
+            <a:r>
+              <a:rPr lang="en-US" sz="1200" dirty="0">
+                <a:solidFill>
+                  <a:srgbClr val="CCCCCC"/>
+                </a:solidFill>
+                <a:latin typeface="Courier New" pitchFamily="34" charset="0"/>
+                <a:ea typeface="Courier New" pitchFamily="34" charset="-122"/>
+                <a:cs typeface="Courier New" pitchFamily="34" charset="-120"/>
+              </a:rPr>
+              <a:t> </a:t>
+            </a:r>
+            <a:pPr indent="0" marL="0">
+              <a:buNone/>
+            </a:pPr>
+            <a:r>
+              <a:rPr lang="en-US" sz="1200" dirty="0">
+                <a:solidFill>
+                  <a:srgbClr val="4FC1FF"/>
+                </a:solidFill>
+                <a:latin typeface="Courier New" pitchFamily="34" charset="0"/>
+                <a:ea typeface="Courier New" pitchFamily="34" charset="-122"/>
+                <a:cs typeface="Courier New" pitchFamily="34" charset="-120"/>
+              </a:rPr>
+              <a:t>ID</a:t>
+            </a:r>
+            <a:pPr indent="0" marL="0">
+              <a:buNone/>
+            </a:pPr>
+            <a:r>
+              <a:rPr lang="en-US" sz="1200" dirty="0">
+                <a:solidFill>
+                  <a:srgbClr val="CCCCCC"/>
+                </a:solidFill>
+                <a:latin typeface="Courier New" pitchFamily="34" charset="0"/>
+                <a:ea typeface="Courier New" pitchFamily="34" charset="-122"/>
+                <a:cs typeface="Courier New" pitchFamily="34" charset="-120"/>
+              </a:rPr>
+              <a:t>,</a:t>
             </a:r>
             <a:endParaRPr lang="en-US" sz="1200" dirty="0"/>
           </a:p>
@@ -5825,13 +6656,195 @@
             <a:r>
               <a:rPr lang="en-US" sz="1200" dirty="0">
                 <a:solidFill>
-                  <a:srgbClr val="EAECEE"/>
-                </a:solidFill>
-                <a:latin typeface="Courier New" pitchFamily="34" charset="0"/>
-                <a:ea typeface="Courier New" pitchFamily="34" charset="-122"/>
-                <a:cs typeface="Courier New" pitchFamily="34" charset="-120"/>
-              </a:rPr>
-              <a:t>  statusPedido.code as statusPedido : String(40),</a:t>
+                  <a:srgbClr val="CCCCCC"/>
+                </a:solidFill>
+                <a:latin typeface="Courier New" pitchFamily="34" charset="0"/>
+                <a:ea typeface="Courier New" pitchFamily="34" charset="-122"/>
+                <a:cs typeface="Courier New" pitchFamily="34" charset="-120"/>
+              </a:rPr>
+              <a:t>  </a:t>
+            </a:r>
+            <a:pPr indent="0" marL="0">
+              <a:buNone/>
+            </a:pPr>
+            <a:r>
+              <a:rPr lang="en-US" sz="1200" dirty="0">
+                <a:solidFill>
+                  <a:srgbClr val="9CDCFE"/>
+                </a:solidFill>
+                <a:latin typeface="Courier New" pitchFamily="34" charset="0"/>
+                <a:ea typeface="Courier New" pitchFamily="34" charset="-122"/>
+                <a:cs typeface="Courier New" pitchFamily="34" charset="-120"/>
+              </a:rPr>
+              <a:t>statusPedido</a:t>
+            </a:r>
+            <a:pPr indent="0" marL="0">
+              <a:buNone/>
+            </a:pPr>
+            <a:r>
+              <a:rPr lang="en-US" sz="1200" dirty="0">
+                <a:solidFill>
+                  <a:srgbClr val="CCCCCC"/>
+                </a:solidFill>
+                <a:latin typeface="Courier New" pitchFamily="34" charset="0"/>
+                <a:ea typeface="Courier New" pitchFamily="34" charset="-122"/>
+                <a:cs typeface="Courier New" pitchFamily="34" charset="-120"/>
+              </a:rPr>
+              <a:t>.</a:t>
+            </a:r>
+            <a:pPr indent="0" marL="0">
+              <a:buNone/>
+            </a:pPr>
+            <a:r>
+              <a:rPr lang="en-US" sz="1200" dirty="0">
+                <a:solidFill>
+                  <a:srgbClr val="9CDCFE"/>
+                </a:solidFill>
+                <a:latin typeface="Courier New" pitchFamily="34" charset="0"/>
+                <a:ea typeface="Courier New" pitchFamily="34" charset="-122"/>
+                <a:cs typeface="Courier New" pitchFamily="34" charset="-120"/>
+              </a:rPr>
+              <a:t>code</a:t>
+            </a:r>
+            <a:pPr indent="0" marL="0">
+              <a:buNone/>
+            </a:pPr>
+            <a:r>
+              <a:rPr lang="en-US" sz="1200" dirty="0">
+                <a:solidFill>
+                  <a:srgbClr val="CCCCCC"/>
+                </a:solidFill>
+                <a:latin typeface="Courier New" pitchFamily="34" charset="0"/>
+                <a:ea typeface="Courier New" pitchFamily="34" charset="-122"/>
+                <a:cs typeface="Courier New" pitchFamily="34" charset="-120"/>
+              </a:rPr>
+              <a:t> </a:t>
+            </a:r>
+            <a:pPr indent="0" marL="0">
+              <a:buNone/>
+            </a:pPr>
+            <a:r>
+              <a:rPr lang="en-US" sz="1200" dirty="0">
+                <a:solidFill>
+                  <a:srgbClr val="569CD6"/>
+                </a:solidFill>
+                <a:latin typeface="Courier New" pitchFamily="34" charset="0"/>
+                <a:ea typeface="Courier New" pitchFamily="34" charset="-122"/>
+                <a:cs typeface="Courier New" pitchFamily="34" charset="-120"/>
+              </a:rPr>
+              <a:t>as</a:t>
+            </a:r>
+            <a:pPr indent="0" marL="0">
+              <a:buNone/>
+            </a:pPr>
+            <a:r>
+              <a:rPr lang="en-US" sz="1200" dirty="0">
+                <a:solidFill>
+                  <a:srgbClr val="CCCCCC"/>
+                </a:solidFill>
+                <a:latin typeface="Courier New" pitchFamily="34" charset="0"/>
+                <a:ea typeface="Courier New" pitchFamily="34" charset="-122"/>
+                <a:cs typeface="Courier New" pitchFamily="34" charset="-120"/>
+              </a:rPr>
+              <a:t> </a:t>
+            </a:r>
+            <a:pPr indent="0" marL="0">
+              <a:buNone/>
+            </a:pPr>
+            <a:r>
+              <a:rPr lang="en-US" sz="1200" dirty="0">
+                <a:solidFill>
+                  <a:srgbClr val="9CDCFE"/>
+                </a:solidFill>
+                <a:latin typeface="Courier New" pitchFamily="34" charset="0"/>
+                <a:ea typeface="Courier New" pitchFamily="34" charset="-122"/>
+                <a:cs typeface="Courier New" pitchFamily="34" charset="-120"/>
+              </a:rPr>
+              <a:t>statusPedido</a:t>
+            </a:r>
+            <a:pPr indent="0" marL="0">
+              <a:buNone/>
+            </a:pPr>
+            <a:r>
+              <a:rPr lang="en-US" sz="1200" dirty="0">
+                <a:solidFill>
+                  <a:srgbClr val="CCCCCC"/>
+                </a:solidFill>
+                <a:latin typeface="Courier New" pitchFamily="34" charset="0"/>
+                <a:ea typeface="Courier New" pitchFamily="34" charset="-122"/>
+                <a:cs typeface="Courier New" pitchFamily="34" charset="-120"/>
+              </a:rPr>
+              <a:t> : </a:t>
+            </a:r>
+            <a:pPr indent="0" marL="0">
+              <a:buNone/>
+            </a:pPr>
+            <a:r>
+              <a:rPr lang="en-US" sz="1200" dirty="0">
+                <a:solidFill>
+                  <a:srgbClr val="4EC9B0"/>
+                </a:solidFill>
+                <a:latin typeface="Courier New" pitchFamily="34" charset="0"/>
+                <a:ea typeface="Courier New" pitchFamily="34" charset="-122"/>
+                <a:cs typeface="Courier New" pitchFamily="34" charset="-120"/>
+              </a:rPr>
+              <a:t>String</a:t>
+            </a:r>
+            <a:pPr indent="0" marL="0">
+              <a:buNone/>
+            </a:pPr>
+            <a:r>
+              <a:rPr lang="en-US" sz="1200" dirty="0">
+                <a:solidFill>
+                  <a:srgbClr val="DA70D6"/>
+                </a:solidFill>
+                <a:latin typeface="Courier New" pitchFamily="34" charset="0"/>
+                <a:ea typeface="Courier New" pitchFamily="34" charset="-122"/>
+                <a:cs typeface="Courier New" pitchFamily="34" charset="-120"/>
+              </a:rPr>
+              <a:t>(</a:t>
+            </a:r>
+            <a:pPr indent="0" marL="0">
+              <a:buNone/>
+            </a:pPr>
+            <a:r>
+              <a:rPr lang="en-US" sz="1200" dirty="0">
+                <a:solidFill>
+                  <a:srgbClr val="B5CEA8"/>
+                </a:solidFill>
+                <a:latin typeface="Courier New" pitchFamily="34" charset="0"/>
+                <a:ea typeface="Courier New" pitchFamily="34" charset="-122"/>
+                <a:cs typeface="Courier New" pitchFamily="34" charset="-120"/>
+              </a:rPr>
+              <a:t>40</a:t>
+            </a:r>
+            <a:pPr indent="0" marL="0">
+              <a:buNone/>
+            </a:pPr>
+            <a:r>
+              <a:rPr lang="en-US" sz="1200" dirty="0">
+                <a:solidFill>
+                  <a:srgbClr val="DA70D6"/>
+                </a:solidFill>
+                <a:latin typeface="Courier New" pitchFamily="34" charset="0"/>
+                <a:ea typeface="Courier New" pitchFamily="34" charset="-122"/>
+                <a:cs typeface="Courier New" pitchFamily="34" charset="-120"/>
+              </a:rPr>
+              <a:t>)</a:t>
+            </a:r>
+            <a:pPr indent="0" marL="0">
+              <a:buNone/>
+            </a:pPr>
+            <a:r>
+              <a:rPr lang="en-US" sz="1200" dirty="0">
+                <a:solidFill>
+                  <a:srgbClr val="CCCCCC"/>
+                </a:solidFill>
+                <a:latin typeface="Courier New" pitchFamily="34" charset="0"/>
+                <a:ea typeface="Courier New" pitchFamily="34" charset="-122"/>
+                <a:cs typeface="Courier New" pitchFamily="34" charset="-120"/>
+              </a:rPr>
+              <a:t>,</a:t>
             </a:r>
             <a:endParaRPr lang="en-US" sz="1200" dirty="0"/>
           </a:p>
@@ -5842,13 +6855,223 @@
             <a:r>
               <a:rPr lang="en-US" sz="1200" dirty="0">
                 <a:solidFill>
-                  <a:srgbClr val="EAECEE"/>
-                </a:solidFill>
-                <a:latin typeface="Courier New" pitchFamily="34" charset="0"/>
-                <a:ea typeface="Courier New" pitchFamily="34" charset="-122"/>
-                <a:cs typeface="Courier New" pitchFamily="34" charset="-120"/>
-              </a:rPr>
-              <a:t>  cliente.enderecoPrincipal.uf as uf : String(2),</a:t>
+                  <a:srgbClr val="CCCCCC"/>
+                </a:solidFill>
+                <a:latin typeface="Courier New" pitchFamily="34" charset="0"/>
+                <a:ea typeface="Courier New" pitchFamily="34" charset="-122"/>
+                <a:cs typeface="Courier New" pitchFamily="34" charset="-120"/>
+              </a:rPr>
+              <a:t>  </a:t>
+            </a:r>
+            <a:pPr indent="0" marL="0">
+              <a:buNone/>
+            </a:pPr>
+            <a:r>
+              <a:rPr lang="en-US" sz="1200" dirty="0">
+                <a:solidFill>
+                  <a:srgbClr val="9CDCFE"/>
+                </a:solidFill>
+                <a:latin typeface="Courier New" pitchFamily="34" charset="0"/>
+                <a:ea typeface="Courier New" pitchFamily="34" charset="-122"/>
+                <a:cs typeface="Courier New" pitchFamily="34" charset="-120"/>
+              </a:rPr>
+              <a:t>cliente</a:t>
+            </a:r>
+            <a:pPr indent="0" marL="0">
+              <a:buNone/>
+            </a:pPr>
+            <a:r>
+              <a:rPr lang="en-US" sz="1200" dirty="0">
+                <a:solidFill>
+                  <a:srgbClr val="CCCCCC"/>
+                </a:solidFill>
+                <a:latin typeface="Courier New" pitchFamily="34" charset="0"/>
+                <a:ea typeface="Courier New" pitchFamily="34" charset="-122"/>
+                <a:cs typeface="Courier New" pitchFamily="34" charset="-120"/>
+              </a:rPr>
+              <a:t>.</a:t>
+            </a:r>
+            <a:pPr indent="0" marL="0">
+              <a:buNone/>
+            </a:pPr>
+            <a:r>
+              <a:rPr lang="en-US" sz="1200" dirty="0">
+                <a:solidFill>
+                  <a:srgbClr val="9CDCFE"/>
+                </a:solidFill>
+                <a:latin typeface="Courier New" pitchFamily="34" charset="0"/>
+                <a:ea typeface="Courier New" pitchFamily="34" charset="-122"/>
+                <a:cs typeface="Courier New" pitchFamily="34" charset="-120"/>
+              </a:rPr>
+              <a:t>enderecoPrincipal</a:t>
+            </a:r>
+            <a:pPr indent="0" marL="0">
+              <a:buNone/>
+            </a:pPr>
+            <a:r>
+              <a:rPr lang="en-US" sz="1200" dirty="0">
+                <a:solidFill>
+                  <a:srgbClr val="CCCCCC"/>
+                </a:solidFill>
+                <a:latin typeface="Courier New" pitchFamily="34" charset="0"/>
+                <a:ea typeface="Courier New" pitchFamily="34" charset="-122"/>
+                <a:cs typeface="Courier New" pitchFamily="34" charset="-120"/>
+              </a:rPr>
+              <a:t>.</a:t>
+            </a:r>
+            <a:pPr indent="0" marL="0">
+              <a:buNone/>
+            </a:pPr>
+            <a:r>
+              <a:rPr lang="en-US" sz="1200" dirty="0">
+                <a:solidFill>
+                  <a:srgbClr val="9CDCFE"/>
+                </a:solidFill>
+                <a:latin typeface="Courier New" pitchFamily="34" charset="0"/>
+                <a:ea typeface="Courier New" pitchFamily="34" charset="-122"/>
+                <a:cs typeface="Courier New" pitchFamily="34" charset="-120"/>
+              </a:rPr>
+              <a:t>uf</a:t>
+            </a:r>
+            <a:pPr indent="0" marL="0">
+              <a:buNone/>
+            </a:pPr>
+            <a:r>
+              <a:rPr lang="en-US" sz="1200" dirty="0">
+                <a:solidFill>
+                  <a:srgbClr val="CCCCCC"/>
+                </a:solidFill>
+                <a:latin typeface="Courier New" pitchFamily="34" charset="0"/>
+                <a:ea typeface="Courier New" pitchFamily="34" charset="-122"/>
+                <a:cs typeface="Courier New" pitchFamily="34" charset="-120"/>
+              </a:rPr>
+              <a:t> </a:t>
+            </a:r>
+            <a:pPr indent="0" marL="0">
+              <a:buNone/>
+            </a:pPr>
+            <a:r>
+              <a:rPr lang="en-US" sz="1200" dirty="0">
+                <a:solidFill>
+                  <a:srgbClr val="569CD6"/>
+                </a:solidFill>
+                <a:latin typeface="Courier New" pitchFamily="34" charset="0"/>
+                <a:ea typeface="Courier New" pitchFamily="34" charset="-122"/>
+                <a:cs typeface="Courier New" pitchFamily="34" charset="-120"/>
+              </a:rPr>
+              <a:t>as</a:t>
+            </a:r>
+            <a:pPr indent="0" marL="0">
+              <a:buNone/>
+            </a:pPr>
+            <a:r>
+              <a:rPr lang="en-US" sz="1200" dirty="0">
+                <a:solidFill>
+                  <a:srgbClr val="CCCCCC"/>
+                </a:solidFill>
+                <a:latin typeface="Courier New" pitchFamily="34" charset="0"/>
+                <a:ea typeface="Courier New" pitchFamily="34" charset="-122"/>
+                <a:cs typeface="Courier New" pitchFamily="34" charset="-120"/>
+              </a:rPr>
+              <a:t> </a:t>
+            </a:r>
+            <a:pPr indent="0" marL="0">
+              <a:buNone/>
+            </a:pPr>
+            <a:r>
+              <a:rPr lang="en-US" sz="1200" dirty="0">
+                <a:solidFill>
+                  <a:srgbClr val="9CDCFE"/>
+                </a:solidFill>
+                <a:latin typeface="Courier New" pitchFamily="34" charset="0"/>
+                <a:ea typeface="Courier New" pitchFamily="34" charset="-122"/>
+                <a:cs typeface="Courier New" pitchFamily="34" charset="-120"/>
+              </a:rPr>
+              <a:t>uf</a:t>
+            </a:r>
+            <a:pPr indent="0" marL="0">
+              <a:buNone/>
+            </a:pPr>
+            <a:r>
+              <a:rPr lang="en-US" sz="1200" dirty="0">
+                <a:solidFill>
+                  <a:srgbClr val="CCCCCC"/>
+                </a:solidFill>
+                <a:latin typeface="Courier New" pitchFamily="34" charset="0"/>
+                <a:ea typeface="Courier New" pitchFamily="34" charset="-122"/>
+                <a:cs typeface="Courier New" pitchFamily="34" charset="-120"/>
+              </a:rPr>
+              <a:t> : </a:t>
+            </a:r>
+            <a:pPr indent="0" marL="0">
+              <a:buNone/>
+            </a:pPr>
+            <a:r>
+              <a:rPr lang="en-US" sz="1200" dirty="0">
+                <a:solidFill>
+                  <a:srgbClr val="4EC9B0"/>
+                </a:solidFill>
+                <a:latin typeface="Courier New" pitchFamily="34" charset="0"/>
+                <a:ea typeface="Courier New" pitchFamily="34" charset="-122"/>
+                <a:cs typeface="Courier New" pitchFamily="34" charset="-120"/>
+              </a:rPr>
+              <a:t>String</a:t>
+            </a:r>
+            <a:pPr indent="0" marL="0">
+              <a:buNone/>
+            </a:pPr>
+            <a:r>
+              <a:rPr lang="en-US" sz="1200" dirty="0">
+                <a:solidFill>
+                  <a:srgbClr val="DA70D6"/>
+                </a:solidFill>
+                <a:latin typeface="Courier New" pitchFamily="34" charset="0"/>
+                <a:ea typeface="Courier New" pitchFamily="34" charset="-122"/>
+                <a:cs typeface="Courier New" pitchFamily="34" charset="-120"/>
+              </a:rPr>
+              <a:t>(</a:t>
+            </a:r>
+            <a:pPr indent="0" marL="0">
+              <a:buNone/>
+            </a:pPr>
+            <a:r>
+              <a:rPr lang="en-US" sz="1200" dirty="0">
+                <a:solidFill>
+                  <a:srgbClr val="B5CEA8"/>
+                </a:solidFill>
+                <a:latin typeface="Courier New" pitchFamily="34" charset="0"/>
+                <a:ea typeface="Courier New" pitchFamily="34" charset="-122"/>
+                <a:cs typeface="Courier New" pitchFamily="34" charset="-120"/>
+              </a:rPr>
+              <a:t>2</a:t>
+            </a:r>
+            <a:pPr indent="0" marL="0">
+              <a:buNone/>
+            </a:pPr>
+            <a:r>
+              <a:rPr lang="en-US" sz="1200" dirty="0">
+                <a:solidFill>
+                  <a:srgbClr val="DA70D6"/>
+                </a:solidFill>
+                <a:latin typeface="Courier New" pitchFamily="34" charset="0"/>
+                <a:ea typeface="Courier New" pitchFamily="34" charset="-122"/>
+                <a:cs typeface="Courier New" pitchFamily="34" charset="-120"/>
+              </a:rPr>
+              <a:t>)</a:t>
+            </a:r>
+            <a:pPr indent="0" marL="0">
+              <a:buNone/>
+            </a:pPr>
+            <a:r>
+              <a:rPr lang="en-US" sz="1200" dirty="0">
+                <a:solidFill>
+                  <a:srgbClr val="CCCCCC"/>
+                </a:solidFill>
+                <a:latin typeface="Courier New" pitchFamily="34" charset="0"/>
+                <a:ea typeface="Courier New" pitchFamily="34" charset="-122"/>
+                <a:cs typeface="Courier New" pitchFamily="34" charset="-120"/>
+              </a:rPr>
+              <a:t>,</a:t>
             </a:r>
             <a:endParaRPr lang="en-US" sz="1200" dirty="0"/>
           </a:p>
@@ -5859,13 +7082,195 @@
             <a:r>
               <a:rPr lang="en-US" sz="1200" dirty="0">
                 <a:solidFill>
-                  <a:srgbClr val="EAECEE"/>
-                </a:solidFill>
-                <a:latin typeface="Courier New" pitchFamily="34" charset="0"/>
-                <a:ea typeface="Courier New" pitchFamily="34" charset="-122"/>
-                <a:cs typeface="Courier New" pitchFamily="34" charset="-120"/>
-              </a:rPr>
-              <a:t>  cast(year(createdAt) * 100 + month(createdAt)</a:t>
+                  <a:srgbClr val="CCCCCC"/>
+                </a:solidFill>
+                <a:latin typeface="Courier New" pitchFamily="34" charset="0"/>
+                <a:ea typeface="Courier New" pitchFamily="34" charset="-122"/>
+                <a:cs typeface="Courier New" pitchFamily="34" charset="-120"/>
+              </a:rPr>
+              <a:t>  </a:t>
+            </a:r>
+            <a:pPr indent="0" marL="0">
+              <a:buNone/>
+            </a:pPr>
+            <a:r>
+              <a:rPr lang="en-US" sz="1200" dirty="0">
+                <a:solidFill>
+                  <a:srgbClr val="569CD6"/>
+                </a:solidFill>
+                <a:latin typeface="Courier New" pitchFamily="34" charset="0"/>
+                <a:ea typeface="Courier New" pitchFamily="34" charset="-122"/>
+                <a:cs typeface="Courier New" pitchFamily="34" charset="-120"/>
+              </a:rPr>
+              <a:t>cast</a:t>
+            </a:r>
+            <a:pPr indent="0" marL="0">
+              <a:buNone/>
+            </a:pPr>
+            <a:r>
+              <a:rPr lang="en-US" sz="1200" dirty="0">
+                <a:solidFill>
+                  <a:srgbClr val="DA70D6"/>
+                </a:solidFill>
+                <a:latin typeface="Courier New" pitchFamily="34" charset="0"/>
+                <a:ea typeface="Courier New" pitchFamily="34" charset="-122"/>
+                <a:cs typeface="Courier New" pitchFamily="34" charset="-120"/>
+              </a:rPr>
+              <a:t>(</a:t>
+            </a:r>
+            <a:pPr indent="0" marL="0">
+              <a:buNone/>
+            </a:pPr>
+            <a:r>
+              <a:rPr lang="en-US" sz="1200" dirty="0">
+                <a:solidFill>
+                  <a:srgbClr val="DCDCAA"/>
+                </a:solidFill>
+                <a:latin typeface="Courier New" pitchFamily="34" charset="0"/>
+                <a:ea typeface="Courier New" pitchFamily="34" charset="-122"/>
+                <a:cs typeface="Courier New" pitchFamily="34" charset="-120"/>
+              </a:rPr>
+              <a:t>year</a:t>
+            </a:r>
+            <a:pPr indent="0" marL="0">
+              <a:buNone/>
+            </a:pPr>
+            <a:r>
+              <a:rPr lang="en-US" sz="1200" dirty="0">
+                <a:solidFill>
+                  <a:srgbClr val="179FFF"/>
+                </a:solidFill>
+                <a:latin typeface="Courier New" pitchFamily="34" charset="0"/>
+                <a:ea typeface="Courier New" pitchFamily="34" charset="-122"/>
+                <a:cs typeface="Courier New" pitchFamily="34" charset="-120"/>
+              </a:rPr>
+              <a:t>(</a:t>
+            </a:r>
+            <a:pPr indent="0" marL="0">
+              <a:buNone/>
+            </a:pPr>
+            <a:r>
+              <a:rPr lang="en-US" sz="1200" dirty="0">
+                <a:solidFill>
+                  <a:srgbClr val="9CDCFE"/>
+                </a:solidFill>
+                <a:latin typeface="Courier New" pitchFamily="34" charset="0"/>
+                <a:ea typeface="Courier New" pitchFamily="34" charset="-122"/>
+                <a:cs typeface="Courier New" pitchFamily="34" charset="-120"/>
+              </a:rPr>
+              <a:t>createdAt</a:t>
+            </a:r>
+            <a:pPr indent="0" marL="0">
+              <a:buNone/>
+            </a:pPr>
+            <a:r>
+              <a:rPr lang="en-US" sz="1200" dirty="0">
+                <a:solidFill>
+                  <a:srgbClr val="179FFF"/>
+                </a:solidFill>
+                <a:latin typeface="Courier New" pitchFamily="34" charset="0"/>
+                <a:ea typeface="Courier New" pitchFamily="34" charset="-122"/>
+                <a:cs typeface="Courier New" pitchFamily="34" charset="-120"/>
+              </a:rPr>
+              <a:t>)</a:t>
+            </a:r>
+            <a:pPr indent="0" marL="0">
+              <a:buNone/>
+            </a:pPr>
+            <a:r>
+              <a:rPr lang="en-US" sz="1200" dirty="0">
+                <a:solidFill>
+                  <a:srgbClr val="CCCCCC"/>
+                </a:solidFill>
+                <a:latin typeface="Courier New" pitchFamily="34" charset="0"/>
+                <a:ea typeface="Courier New" pitchFamily="34" charset="-122"/>
+                <a:cs typeface="Courier New" pitchFamily="34" charset="-120"/>
+              </a:rPr>
+              <a:t> * </a:t>
+            </a:r>
+            <a:pPr indent="0" marL="0">
+              <a:buNone/>
+            </a:pPr>
+            <a:r>
+              <a:rPr lang="en-US" sz="1200" dirty="0">
+                <a:solidFill>
+                  <a:srgbClr val="B5CEA8"/>
+                </a:solidFill>
+                <a:latin typeface="Courier New" pitchFamily="34" charset="0"/>
+                <a:ea typeface="Courier New" pitchFamily="34" charset="-122"/>
+                <a:cs typeface="Courier New" pitchFamily="34" charset="-120"/>
+              </a:rPr>
+              <a:t>100</a:t>
+            </a:r>
+            <a:pPr indent="0" marL="0">
+              <a:buNone/>
+            </a:pPr>
+            <a:r>
+              <a:rPr lang="en-US" sz="1200" dirty="0">
+                <a:solidFill>
+                  <a:srgbClr val="CCCCCC"/>
+                </a:solidFill>
+                <a:latin typeface="Courier New" pitchFamily="34" charset="0"/>
+                <a:ea typeface="Courier New" pitchFamily="34" charset="-122"/>
+                <a:cs typeface="Courier New" pitchFamily="34" charset="-120"/>
+              </a:rPr>
+              <a:t> + </a:t>
+            </a:r>
+            <a:pPr indent="0" marL="0">
+              <a:buNone/>
+            </a:pPr>
+            <a:r>
+              <a:rPr lang="en-US" sz="1200" dirty="0">
+                <a:solidFill>
+                  <a:srgbClr val="DCDCAA"/>
+                </a:solidFill>
+                <a:latin typeface="Courier New" pitchFamily="34" charset="0"/>
+                <a:ea typeface="Courier New" pitchFamily="34" charset="-122"/>
+                <a:cs typeface="Courier New" pitchFamily="34" charset="-120"/>
+              </a:rPr>
+              <a:t>month</a:t>
+            </a:r>
+            <a:pPr indent="0" marL="0">
+              <a:buNone/>
+            </a:pPr>
+            <a:r>
+              <a:rPr lang="en-US" sz="1200" dirty="0">
+                <a:solidFill>
+                  <a:srgbClr val="179FFF"/>
+                </a:solidFill>
+                <a:latin typeface="Courier New" pitchFamily="34" charset="0"/>
+                <a:ea typeface="Courier New" pitchFamily="34" charset="-122"/>
+                <a:cs typeface="Courier New" pitchFamily="34" charset="-120"/>
+              </a:rPr>
+              <a:t>(</a:t>
+            </a:r>
+            <a:pPr indent="0" marL="0">
+              <a:buNone/>
+            </a:pPr>
+            <a:r>
+              <a:rPr lang="en-US" sz="1200" dirty="0">
+                <a:solidFill>
+                  <a:srgbClr val="9CDCFE"/>
+                </a:solidFill>
+                <a:latin typeface="Courier New" pitchFamily="34" charset="0"/>
+                <a:ea typeface="Courier New" pitchFamily="34" charset="-122"/>
+                <a:cs typeface="Courier New" pitchFamily="34" charset="-120"/>
+              </a:rPr>
+              <a:t>createdAt</a:t>
+            </a:r>
+            <a:pPr indent="0" marL="0">
+              <a:buNone/>
+            </a:pPr>
+            <a:r>
+              <a:rPr lang="en-US" sz="1200" dirty="0">
+                <a:solidFill>
+                  <a:srgbClr val="179FFF"/>
+                </a:solidFill>
+                <a:latin typeface="Courier New" pitchFamily="34" charset="0"/>
+                <a:ea typeface="Courier New" pitchFamily="34" charset="-122"/>
+                <a:cs typeface="Courier New" pitchFamily="34" charset="-120"/>
+              </a:rPr>
+              <a:t>)</a:t>
             </a:r>
             <a:endParaRPr lang="en-US" sz="1200" dirty="0"/>
           </a:p>
@@ -5876,13 +7281,251 @@
             <a:r>
               <a:rPr lang="en-US" sz="1200" dirty="0">
                 <a:solidFill>
-                  <a:srgbClr val="EAECEE"/>
-                </a:solidFill>
-                <a:latin typeface="Courier New" pitchFamily="34" charset="0"/>
-                <a:ea typeface="Courier New" pitchFamily="34" charset="-122"/>
-                <a:cs typeface="Courier New" pitchFamily="34" charset="-120"/>
-              </a:rPr>
-              <a:t>       as String(6)) as mesCriacao : String(6),</a:t>
+                  <a:srgbClr val="CCCCCC"/>
+                </a:solidFill>
+                <a:latin typeface="Courier New" pitchFamily="34" charset="0"/>
+                <a:ea typeface="Courier New" pitchFamily="34" charset="-122"/>
+                <a:cs typeface="Courier New" pitchFamily="34" charset="-120"/>
+              </a:rPr>
+              <a:t>       </a:t>
+            </a:r>
+            <a:pPr indent="0" marL="0">
+              <a:buNone/>
+            </a:pPr>
+            <a:r>
+              <a:rPr lang="en-US" sz="1200" dirty="0">
+                <a:solidFill>
+                  <a:srgbClr val="569CD6"/>
+                </a:solidFill>
+                <a:latin typeface="Courier New" pitchFamily="34" charset="0"/>
+                <a:ea typeface="Courier New" pitchFamily="34" charset="-122"/>
+                <a:cs typeface="Courier New" pitchFamily="34" charset="-120"/>
+              </a:rPr>
+              <a:t>as</a:t>
+            </a:r>
+            <a:pPr indent="0" marL="0">
+              <a:buNone/>
+            </a:pPr>
+            <a:r>
+              <a:rPr lang="en-US" sz="1200" dirty="0">
+                <a:solidFill>
+                  <a:srgbClr val="CCCCCC"/>
+                </a:solidFill>
+                <a:latin typeface="Courier New" pitchFamily="34" charset="0"/>
+                <a:ea typeface="Courier New" pitchFamily="34" charset="-122"/>
+                <a:cs typeface="Courier New" pitchFamily="34" charset="-120"/>
+              </a:rPr>
+              <a:t> </a:t>
+            </a:r>
+            <a:pPr indent="0" marL="0">
+              <a:buNone/>
+            </a:pPr>
+            <a:r>
+              <a:rPr lang="en-US" sz="1200" dirty="0">
+                <a:solidFill>
+                  <a:srgbClr val="4EC9B0"/>
+                </a:solidFill>
+                <a:latin typeface="Courier New" pitchFamily="34" charset="0"/>
+                <a:ea typeface="Courier New" pitchFamily="34" charset="-122"/>
+                <a:cs typeface="Courier New" pitchFamily="34" charset="-120"/>
+              </a:rPr>
+              <a:t>String</a:t>
+            </a:r>
+            <a:pPr indent="0" marL="0">
+              <a:buNone/>
+            </a:pPr>
+            <a:r>
+              <a:rPr lang="en-US" sz="1200" dirty="0">
+                <a:solidFill>
+                  <a:srgbClr val="179FFF"/>
+                </a:solidFill>
+                <a:latin typeface="Courier New" pitchFamily="34" charset="0"/>
+                <a:ea typeface="Courier New" pitchFamily="34" charset="-122"/>
+                <a:cs typeface="Courier New" pitchFamily="34" charset="-120"/>
+              </a:rPr>
+              <a:t>(</a:t>
+            </a:r>
+            <a:pPr indent="0" marL="0">
+              <a:buNone/>
+            </a:pPr>
+            <a:r>
+              <a:rPr lang="en-US" sz="1200" dirty="0">
+                <a:solidFill>
+                  <a:srgbClr val="B5CEA8"/>
+                </a:solidFill>
+                <a:latin typeface="Courier New" pitchFamily="34" charset="0"/>
+                <a:ea typeface="Courier New" pitchFamily="34" charset="-122"/>
+                <a:cs typeface="Courier New" pitchFamily="34" charset="-120"/>
+              </a:rPr>
+              <a:t>6</a:t>
+            </a:r>
+            <a:pPr indent="0" marL="0">
+              <a:buNone/>
+            </a:pPr>
+            <a:r>
+              <a:rPr lang="en-US" sz="1200" dirty="0">
+                <a:solidFill>
+                  <a:srgbClr val="179FFF"/>
+                </a:solidFill>
+                <a:latin typeface="Courier New" pitchFamily="34" charset="0"/>
+                <a:ea typeface="Courier New" pitchFamily="34" charset="-122"/>
+                <a:cs typeface="Courier New" pitchFamily="34" charset="-120"/>
+              </a:rPr>
+              <a:t>)</a:t>
+            </a:r>
+            <a:pPr indent="0" marL="0">
+              <a:buNone/>
+            </a:pPr>
+            <a:r>
+              <a:rPr lang="en-US" sz="1200" dirty="0">
+                <a:solidFill>
+                  <a:srgbClr val="DA70D6"/>
+                </a:solidFill>
+                <a:latin typeface="Courier New" pitchFamily="34" charset="0"/>
+                <a:ea typeface="Courier New" pitchFamily="34" charset="-122"/>
+                <a:cs typeface="Courier New" pitchFamily="34" charset="-120"/>
+              </a:rPr>
+              <a:t>)</a:t>
+            </a:r>
+            <a:pPr indent="0" marL="0">
+              <a:buNone/>
+            </a:pPr>
+            <a:r>
+              <a:rPr lang="en-US" sz="1200" dirty="0">
+                <a:solidFill>
+                  <a:srgbClr val="CCCCCC"/>
+                </a:solidFill>
+                <a:latin typeface="Courier New" pitchFamily="34" charset="0"/>
+                <a:ea typeface="Courier New" pitchFamily="34" charset="-122"/>
+                <a:cs typeface="Courier New" pitchFamily="34" charset="-120"/>
+              </a:rPr>
+              <a:t> </a:t>
+            </a:r>
+            <a:pPr indent="0" marL="0">
+              <a:buNone/>
+            </a:pPr>
+            <a:r>
+              <a:rPr lang="en-US" sz="1200" dirty="0">
+                <a:solidFill>
+                  <a:srgbClr val="569CD6"/>
+                </a:solidFill>
+                <a:latin typeface="Courier New" pitchFamily="34" charset="0"/>
+                <a:ea typeface="Courier New" pitchFamily="34" charset="-122"/>
+                <a:cs typeface="Courier New" pitchFamily="34" charset="-120"/>
+              </a:rPr>
+              <a:t>as</a:t>
+            </a:r>
+            <a:pPr indent="0" marL="0">
+              <a:buNone/>
+            </a:pPr>
+            <a:r>
+              <a:rPr lang="en-US" sz="1200" dirty="0">
+                <a:solidFill>
+                  <a:srgbClr val="CCCCCC"/>
+                </a:solidFill>
+                <a:latin typeface="Courier New" pitchFamily="34" charset="0"/>
+                <a:ea typeface="Courier New" pitchFamily="34" charset="-122"/>
+                <a:cs typeface="Courier New" pitchFamily="34" charset="-120"/>
+              </a:rPr>
+              <a:t> </a:t>
+            </a:r>
+            <a:pPr indent="0" marL="0">
+              <a:buNone/>
+            </a:pPr>
+            <a:r>
+              <a:rPr lang="en-US" sz="1200" dirty="0">
+                <a:solidFill>
+                  <a:srgbClr val="9CDCFE"/>
+                </a:solidFill>
+                <a:latin typeface="Courier New" pitchFamily="34" charset="0"/>
+                <a:ea typeface="Courier New" pitchFamily="34" charset="-122"/>
+                <a:cs typeface="Courier New" pitchFamily="34" charset="-120"/>
+              </a:rPr>
+              <a:t>mesCriacao</a:t>
+            </a:r>
+            <a:pPr indent="0" marL="0">
+              <a:buNone/>
+            </a:pPr>
+            <a:r>
+              <a:rPr lang="en-US" sz="1200" dirty="0">
+                <a:solidFill>
+                  <a:srgbClr val="CCCCCC"/>
+                </a:solidFill>
+                <a:latin typeface="Courier New" pitchFamily="34" charset="0"/>
+                <a:ea typeface="Courier New" pitchFamily="34" charset="-122"/>
+                <a:cs typeface="Courier New" pitchFamily="34" charset="-120"/>
+              </a:rPr>
+              <a:t> : </a:t>
+            </a:r>
+            <a:pPr indent="0" marL="0">
+              <a:buNone/>
+            </a:pPr>
+            <a:r>
+              <a:rPr lang="en-US" sz="1200" dirty="0">
+                <a:solidFill>
+                  <a:srgbClr val="4EC9B0"/>
+                </a:solidFill>
+                <a:latin typeface="Courier New" pitchFamily="34" charset="0"/>
+                <a:ea typeface="Courier New" pitchFamily="34" charset="-122"/>
+                <a:cs typeface="Courier New" pitchFamily="34" charset="-120"/>
+              </a:rPr>
+              <a:t>String</a:t>
+            </a:r>
+            <a:pPr indent="0" marL="0">
+              <a:buNone/>
+            </a:pPr>
+            <a:r>
+              <a:rPr lang="en-US" sz="1200" dirty="0">
+                <a:solidFill>
+                  <a:srgbClr val="DA70D6"/>
+                </a:solidFill>
+                <a:latin typeface="Courier New" pitchFamily="34" charset="0"/>
+                <a:ea typeface="Courier New" pitchFamily="34" charset="-122"/>
+                <a:cs typeface="Courier New" pitchFamily="34" charset="-120"/>
+              </a:rPr>
+              <a:t>(</a:t>
+            </a:r>
+            <a:pPr indent="0" marL="0">
+              <a:buNone/>
+            </a:pPr>
+            <a:r>
+              <a:rPr lang="en-US" sz="1200" dirty="0">
+                <a:solidFill>
+                  <a:srgbClr val="B5CEA8"/>
+                </a:solidFill>
+                <a:latin typeface="Courier New" pitchFamily="34" charset="0"/>
+                <a:ea typeface="Courier New" pitchFamily="34" charset="-122"/>
+                <a:cs typeface="Courier New" pitchFamily="34" charset="-120"/>
+              </a:rPr>
+              <a:t>6</a:t>
+            </a:r>
+            <a:pPr indent="0" marL="0">
+              <a:buNone/>
+            </a:pPr>
+            <a:r>
+              <a:rPr lang="en-US" sz="1200" dirty="0">
+                <a:solidFill>
+                  <a:srgbClr val="DA70D6"/>
+                </a:solidFill>
+                <a:latin typeface="Courier New" pitchFamily="34" charset="0"/>
+                <a:ea typeface="Courier New" pitchFamily="34" charset="-122"/>
+                <a:cs typeface="Courier New" pitchFamily="34" charset="-120"/>
+              </a:rPr>
+              <a:t>)</a:t>
+            </a:r>
+            <a:pPr indent="0" marL="0">
+              <a:buNone/>
+            </a:pPr>
+            <a:r>
+              <a:rPr lang="en-US" sz="1200" dirty="0">
+                <a:solidFill>
+                  <a:srgbClr val="CCCCCC"/>
+                </a:solidFill>
+                <a:latin typeface="Courier New" pitchFamily="34" charset="0"/>
+                <a:ea typeface="Courier New" pitchFamily="34" charset="-122"/>
+                <a:cs typeface="Courier New" pitchFamily="34" charset="-120"/>
+              </a:rPr>
+              <a:t>,</a:t>
             </a:r>
             <a:endParaRPr lang="en-US" sz="1200" dirty="0"/>
           </a:p>
@@ -5893,13 +7536,55 @@
             <a:r>
               <a:rPr lang="en-US" sz="1200" dirty="0">
                 <a:solidFill>
-                  <a:srgbClr val="89D1FF"/>
-                </a:solidFill>
-                <a:latin typeface="Courier New" pitchFamily="34" charset="0"/>
-                <a:ea typeface="Courier New" pitchFamily="34" charset="-122"/>
-                <a:cs typeface="Courier New" pitchFamily="34" charset="-120"/>
-              </a:rPr>
-              <a:t>  @Aggregation.default: #SUM</a:t>
+                  <a:srgbClr val="CCCCCC"/>
+                </a:solidFill>
+                <a:latin typeface="Courier New" pitchFamily="34" charset="0"/>
+                <a:ea typeface="Courier New" pitchFamily="34" charset="-122"/>
+                <a:cs typeface="Courier New" pitchFamily="34" charset="-120"/>
+              </a:rPr>
+              <a:t>  </a:t>
+            </a:r>
+            <a:pPr indent="0" marL="0">
+              <a:buNone/>
+            </a:pPr>
+            <a:r>
+              <a:rPr lang="en-US" sz="1200" dirty="0">
+                <a:solidFill>
+                  <a:srgbClr val="DCDCAA"/>
+                </a:solidFill>
+                <a:latin typeface="Courier New" pitchFamily="34" charset="0"/>
+                <a:ea typeface="Courier New" pitchFamily="34" charset="-122"/>
+                <a:cs typeface="Courier New" pitchFamily="34" charset="-120"/>
+              </a:rPr>
+              <a:t>@Aggregation.default</a:t>
+            </a:r>
+            <a:pPr indent="0" marL="0">
+              <a:buNone/>
+            </a:pPr>
+            <a:r>
+              <a:rPr lang="en-US" sz="1200" dirty="0">
+                <a:solidFill>
+                  <a:srgbClr val="CCCCCC"/>
+                </a:solidFill>
+                <a:latin typeface="Courier New" pitchFamily="34" charset="0"/>
+                <a:ea typeface="Courier New" pitchFamily="34" charset="-122"/>
+                <a:cs typeface="Courier New" pitchFamily="34" charset="-120"/>
+              </a:rPr>
+              <a:t>: </a:t>
+            </a:r>
+            <a:pPr indent="0" marL="0">
+              <a:buNone/>
+            </a:pPr>
+            <a:r>
+              <a:rPr lang="en-US" sz="1200" dirty="0">
+                <a:solidFill>
+                  <a:srgbClr val="4FC1FF"/>
+                </a:solidFill>
+                <a:latin typeface="Courier New" pitchFamily="34" charset="0"/>
+                <a:ea typeface="Courier New" pitchFamily="34" charset="-122"/>
+                <a:cs typeface="Courier New" pitchFamily="34" charset="-120"/>
+              </a:rPr>
+              <a:t>#SUM</a:t>
             </a:r>
             <a:endParaRPr lang="en-US" sz="1200" dirty="0"/>
           </a:p>
@@ -5910,13 +7595,41 @@
             <a:r>
               <a:rPr lang="en-US" sz="1200" dirty="0">
                 <a:solidFill>
-                  <a:srgbClr val="EAECEE"/>
-                </a:solidFill>
-                <a:latin typeface="Courier New" pitchFamily="34" charset="0"/>
-                <a:ea typeface="Courier New" pitchFamily="34" charset="-122"/>
-                <a:cs typeface="Courier New" pitchFamily="34" charset="-120"/>
-              </a:rPr>
-              <a:t>  valorTotal,</a:t>
+                  <a:srgbClr val="CCCCCC"/>
+                </a:solidFill>
+                <a:latin typeface="Courier New" pitchFamily="34" charset="0"/>
+                <a:ea typeface="Courier New" pitchFamily="34" charset="-122"/>
+                <a:cs typeface="Courier New" pitchFamily="34" charset="-120"/>
+              </a:rPr>
+              <a:t>  </a:t>
+            </a:r>
+            <a:pPr indent="0" marL="0">
+              <a:buNone/>
+            </a:pPr>
+            <a:r>
+              <a:rPr lang="en-US" sz="1200" dirty="0">
+                <a:solidFill>
+                  <a:srgbClr val="9CDCFE"/>
+                </a:solidFill>
+                <a:latin typeface="Courier New" pitchFamily="34" charset="0"/>
+                <a:ea typeface="Courier New" pitchFamily="34" charset="-122"/>
+                <a:cs typeface="Courier New" pitchFamily="34" charset="-120"/>
+              </a:rPr>
+              <a:t>valorTotal</a:t>
+            </a:r>
+            <a:pPr indent="0" marL="0">
+              <a:buNone/>
+            </a:pPr>
+            <a:r>
+              <a:rPr lang="en-US" sz="1200" dirty="0">
+                <a:solidFill>
+                  <a:srgbClr val="CCCCCC"/>
+                </a:solidFill>
+                <a:latin typeface="Courier New" pitchFamily="34" charset="0"/>
+                <a:ea typeface="Courier New" pitchFamily="34" charset="-122"/>
+                <a:cs typeface="Courier New" pitchFamily="34" charset="-120"/>
+              </a:rPr>
+              <a:t>,</a:t>
             </a:r>
             <a:endParaRPr lang="en-US" sz="1200" dirty="0"/>
           </a:p>
@@ -5927,13 +7640,55 @@
             <a:r>
               <a:rPr lang="en-US" sz="1200" dirty="0">
                 <a:solidFill>
-                  <a:srgbClr val="89D1FF"/>
-                </a:solidFill>
-                <a:latin typeface="Courier New" pitchFamily="34" charset="0"/>
-                <a:ea typeface="Courier New" pitchFamily="34" charset="-122"/>
-                <a:cs typeface="Courier New" pitchFamily="34" charset="-120"/>
-              </a:rPr>
-              <a:t>  @Aggregation.default: #SUM</a:t>
+                  <a:srgbClr val="CCCCCC"/>
+                </a:solidFill>
+                <a:latin typeface="Courier New" pitchFamily="34" charset="0"/>
+                <a:ea typeface="Courier New" pitchFamily="34" charset="-122"/>
+                <a:cs typeface="Courier New" pitchFamily="34" charset="-120"/>
+              </a:rPr>
+              <a:t>  </a:t>
+            </a:r>
+            <a:pPr indent="0" marL="0">
+              <a:buNone/>
+            </a:pPr>
+            <a:r>
+              <a:rPr lang="en-US" sz="1200" dirty="0">
+                <a:solidFill>
+                  <a:srgbClr val="DCDCAA"/>
+                </a:solidFill>
+                <a:latin typeface="Courier New" pitchFamily="34" charset="0"/>
+                <a:ea typeface="Courier New" pitchFamily="34" charset="-122"/>
+                <a:cs typeface="Courier New" pitchFamily="34" charset="-120"/>
+              </a:rPr>
+              <a:t>@Aggregation.default</a:t>
+            </a:r>
+            <a:pPr indent="0" marL="0">
+              <a:buNone/>
+            </a:pPr>
+            <a:r>
+              <a:rPr lang="en-US" sz="1200" dirty="0">
+                <a:solidFill>
+                  <a:srgbClr val="CCCCCC"/>
+                </a:solidFill>
+                <a:latin typeface="Courier New" pitchFamily="34" charset="0"/>
+                <a:ea typeface="Courier New" pitchFamily="34" charset="-122"/>
+                <a:cs typeface="Courier New" pitchFamily="34" charset="-120"/>
+              </a:rPr>
+              <a:t>: </a:t>
+            </a:r>
+            <a:pPr indent="0" marL="0">
+              <a:buNone/>
+            </a:pPr>
+            <a:r>
+              <a:rPr lang="en-US" sz="1200" dirty="0">
+                <a:solidFill>
+                  <a:srgbClr val="4FC1FF"/>
+                </a:solidFill>
+                <a:latin typeface="Courier New" pitchFamily="34" charset="0"/>
+                <a:ea typeface="Courier New" pitchFamily="34" charset="-122"/>
+                <a:cs typeface="Courier New" pitchFamily="34" charset="-120"/>
+              </a:rPr>
+              <a:t>#SUM</a:t>
             </a:r>
             <a:endParaRPr lang="en-US" sz="1200" dirty="0"/>
           </a:p>
@@ -5944,13 +7699,111 @@
             <a:r>
               <a:rPr lang="en-US" sz="1200" dirty="0">
                 <a:solidFill>
-                  <a:srgbClr val="EAECEE"/>
-                </a:solidFill>
-                <a:latin typeface="Courier New" pitchFamily="34" charset="0"/>
-                <a:ea typeface="Courier New" pitchFamily="34" charset="-122"/>
-                <a:cs typeface="Courier New" pitchFamily="34" charset="-120"/>
-              </a:rPr>
-              <a:t>  1 as qtdePedidos : Integer</a:t>
+                  <a:srgbClr val="CCCCCC"/>
+                </a:solidFill>
+                <a:latin typeface="Courier New" pitchFamily="34" charset="0"/>
+                <a:ea typeface="Courier New" pitchFamily="34" charset="-122"/>
+                <a:cs typeface="Courier New" pitchFamily="34" charset="-120"/>
+              </a:rPr>
+              <a:t>  </a:t>
+            </a:r>
+            <a:pPr indent="0" marL="0">
+              <a:buNone/>
+            </a:pPr>
+            <a:r>
+              <a:rPr lang="en-US" sz="1200" dirty="0">
+                <a:solidFill>
+                  <a:srgbClr val="B5CEA8"/>
+                </a:solidFill>
+                <a:latin typeface="Courier New" pitchFamily="34" charset="0"/>
+                <a:ea typeface="Courier New" pitchFamily="34" charset="-122"/>
+                <a:cs typeface="Courier New" pitchFamily="34" charset="-120"/>
+              </a:rPr>
+              <a:t>1</a:t>
+            </a:r>
+            <a:pPr indent="0" marL="0">
+              <a:buNone/>
+            </a:pPr>
+            <a:r>
+              <a:rPr lang="en-US" sz="1200" dirty="0">
+                <a:solidFill>
+                  <a:srgbClr val="CCCCCC"/>
+                </a:solidFill>
+                <a:latin typeface="Courier New" pitchFamily="34" charset="0"/>
+                <a:ea typeface="Courier New" pitchFamily="34" charset="-122"/>
+                <a:cs typeface="Courier New" pitchFamily="34" charset="-120"/>
+              </a:rPr>
+              <a:t> </a:t>
+            </a:r>
+            <a:pPr indent="0" marL="0">
+              <a:buNone/>
+            </a:pPr>
+            <a:r>
+              <a:rPr lang="en-US" sz="1200" dirty="0">
+                <a:solidFill>
+                  <a:srgbClr val="569CD6"/>
+                </a:solidFill>
+                <a:latin typeface="Courier New" pitchFamily="34" charset="0"/>
+                <a:ea typeface="Courier New" pitchFamily="34" charset="-122"/>
+                <a:cs typeface="Courier New" pitchFamily="34" charset="-120"/>
+              </a:rPr>
+              <a:t>as</a:t>
+            </a:r>
+            <a:pPr indent="0" marL="0">
+              <a:buNone/>
+            </a:pPr>
+            <a:r>
+              <a:rPr lang="en-US" sz="1200" dirty="0">
+                <a:solidFill>
+                  <a:srgbClr val="CCCCCC"/>
+                </a:solidFill>
+                <a:latin typeface="Courier New" pitchFamily="34" charset="0"/>
+                <a:ea typeface="Courier New" pitchFamily="34" charset="-122"/>
+                <a:cs typeface="Courier New" pitchFamily="34" charset="-120"/>
+              </a:rPr>
+              <a:t> </a:t>
+            </a:r>
+            <a:pPr indent="0" marL="0">
+              <a:buNone/>
+            </a:pPr>
+            <a:r>
+              <a:rPr lang="en-US" sz="1200" dirty="0">
+                <a:solidFill>
+                  <a:srgbClr val="9CDCFE"/>
+                </a:solidFill>
+                <a:latin typeface="Courier New" pitchFamily="34" charset="0"/>
+                <a:ea typeface="Courier New" pitchFamily="34" charset="-122"/>
+                <a:cs typeface="Courier New" pitchFamily="34" charset="-120"/>
+              </a:rPr>
+              <a:t>qtdePedidos</a:t>
+            </a:r>
+            <a:pPr indent="0" marL="0">
+              <a:buNone/>
+            </a:pPr>
+            <a:r>
+              <a:rPr lang="en-US" sz="1200" dirty="0">
+                <a:solidFill>
+                  <a:srgbClr val="CCCCCC"/>
+                </a:solidFill>
+                <a:latin typeface="Courier New" pitchFamily="34" charset="0"/>
+                <a:ea typeface="Courier New" pitchFamily="34" charset="-122"/>
+                <a:cs typeface="Courier New" pitchFamily="34" charset="-120"/>
+              </a:rPr>
+              <a:t> : </a:t>
+            </a:r>
+            <a:pPr indent="0" marL="0">
+              <a:buNone/>
+            </a:pPr>
+            <a:r>
+              <a:rPr lang="en-US" sz="1200" dirty="0">
+                <a:solidFill>
+                  <a:srgbClr val="4EC9B0"/>
+                </a:solidFill>
+                <a:latin typeface="Courier New" pitchFamily="34" charset="0"/>
+                <a:ea typeface="Courier New" pitchFamily="34" charset="-122"/>
+                <a:cs typeface="Courier New" pitchFamily="34" charset="-120"/>
+              </a:rPr>
+              <a:t>Integer</a:t>
             </a:r>
             <a:endParaRPr lang="en-US" sz="1200" dirty="0"/>
           </a:p>
@@ -5961,13 +7814,27 @@
             <a:r>
               <a:rPr lang="en-US" sz="1200" dirty="0">
                 <a:solidFill>
-                  <a:srgbClr val="EAECEE"/>
-                </a:solidFill>
-                <a:latin typeface="Courier New" pitchFamily="34" charset="0"/>
-                <a:ea typeface="Courier New" pitchFamily="34" charset="-122"/>
-                <a:cs typeface="Courier New" pitchFamily="34" charset="-120"/>
-              </a:rPr>
-              <a:t>};</a:t>
+                  <a:srgbClr val="FFD700"/>
+                </a:solidFill>
+                <a:latin typeface="Courier New" pitchFamily="34" charset="0"/>
+                <a:ea typeface="Courier New" pitchFamily="34" charset="-122"/>
+                <a:cs typeface="Courier New" pitchFamily="34" charset="-120"/>
+              </a:rPr>
+              <a:t>}</a:t>
+            </a:r>
+            <a:pPr indent="0" marL="0">
+              <a:buNone/>
+            </a:pPr>
+            <a:r>
+              <a:rPr lang="en-US" sz="1200" dirty="0">
+                <a:solidFill>
+                  <a:srgbClr val="CCCCCC"/>
+                </a:solidFill>
+                <a:latin typeface="Courier New" pitchFamily="34" charset="0"/>
+                <a:ea typeface="Courier New" pitchFamily="34" charset="-122"/>
+                <a:cs typeface="Courier New" pitchFamily="34" charset="-120"/>
+              </a:rPr>
+              <a:t>;</a:t>
             </a:r>
             <a:endParaRPr lang="en-US" sz="1200" dirty="0"/>
           </a:p>
@@ -5990,9 +7857,14 @@
             </a:avLst>
           </a:prstGeom>
           <a:solidFill>
-            <a:srgbClr val="1D2D3E"/>
+            <a:srgbClr val="1F1F1F"/>
           </a:solidFill>
-          <a:ln/>
+          <a:ln w="9525">
+            <a:solidFill>
+              <a:srgbClr val="2B2B2B"/>
+            </a:solidFill>
+            <a:prstDash val="solid"/>
+          </a:ln>
           <a:effectLst>
             <a:outerShdw sx="100000" sy="100000" kx="0" ky="0" algn="bl" rotWithShape="0" blurRad="101600" dist="25400" dir="5400000">
               <a:srgbClr val="223649">
@@ -6029,13 +7901,27 @@
             <a:r>
               <a:rPr lang="en-US" sz="1300" dirty="0">
                 <a:solidFill>
-                  <a:srgbClr val="EAECEE"/>
-                </a:solidFill>
-                <a:latin typeface="Courier New" pitchFamily="34" charset="0"/>
-                <a:ea typeface="Courier New" pitchFamily="34" charset="-122"/>
-                <a:cs typeface="Courier New" pitchFamily="34" charset="-120"/>
-              </a:rPr>
-              <a:t>GET /odata/v4/analitico/</a:t>
+                  <a:srgbClr val="569CD6"/>
+                </a:solidFill>
+                <a:latin typeface="Courier New" pitchFamily="34" charset="0"/>
+                <a:ea typeface="Courier New" pitchFamily="34" charset="-122"/>
+                <a:cs typeface="Courier New" pitchFamily="34" charset="-120"/>
+              </a:rPr>
+              <a:t>GET</a:t>
+            </a:r>
+            <a:pPr indent="0" marL="0">
+              <a:buNone/>
+            </a:pPr>
+            <a:r>
+              <a:rPr lang="en-US" sz="1300" dirty="0">
+                <a:solidFill>
+                  <a:srgbClr val="CCCCCC"/>
+                </a:solidFill>
+                <a:latin typeface="Courier New" pitchFamily="34" charset="0"/>
+                <a:ea typeface="Courier New" pitchFamily="34" charset="-122"/>
+                <a:cs typeface="Courier New" pitchFamily="34" charset="-120"/>
+              </a:rPr>
+              <a:t> /odata/v4/analitico/</a:t>
             </a:r>
             <a:endParaRPr lang="en-US" sz="1300" dirty="0"/>
           </a:p>
@@ -6046,13 +7932,41 @@
             <a:r>
               <a:rPr lang="en-US" sz="1300" dirty="0">
                 <a:solidFill>
-                  <a:srgbClr val="EAECEE"/>
-                </a:solidFill>
-                <a:latin typeface="Courier New" pitchFamily="34" charset="0"/>
-                <a:ea typeface="Courier New" pitchFamily="34" charset="-122"/>
-                <a:cs typeface="Courier New" pitchFamily="34" charset="-120"/>
-              </a:rPr>
-              <a:t>    PedidosAnalise?$apply=</a:t>
+                  <a:srgbClr val="CCCCCC"/>
+                </a:solidFill>
+                <a:latin typeface="Courier New" pitchFamily="34" charset="0"/>
+                <a:ea typeface="Courier New" pitchFamily="34" charset="-122"/>
+                <a:cs typeface="Courier New" pitchFamily="34" charset="-120"/>
+              </a:rPr>
+              <a:t>    PedidosAnalise?</a:t>
+            </a:r>
+            <a:pPr indent="0" marL="0">
+              <a:buNone/>
+            </a:pPr>
+            <a:r>
+              <a:rPr lang="en-US" sz="1300" dirty="0">
+                <a:solidFill>
+                  <a:srgbClr val="9CDCFE"/>
+                </a:solidFill>
+                <a:latin typeface="Courier New" pitchFamily="34" charset="0"/>
+                <a:ea typeface="Courier New" pitchFamily="34" charset="-122"/>
+                <a:cs typeface="Courier New" pitchFamily="34" charset="-120"/>
+              </a:rPr>
+              <a:t>$apply</a:t>
+            </a:r>
+            <a:pPr indent="0" marL="0">
+              <a:buNone/>
+            </a:pPr>
+            <a:r>
+              <a:rPr lang="en-US" sz="1300" dirty="0">
+                <a:solidFill>
+                  <a:srgbClr val="CCCCCC"/>
+                </a:solidFill>
+                <a:latin typeface="Courier New" pitchFamily="34" charset="0"/>
+                <a:ea typeface="Courier New" pitchFamily="34" charset="-122"/>
+                <a:cs typeface="Courier New" pitchFamily="34" charset="-120"/>
+              </a:rPr>
+              <a:t>=</a:t>
             </a:r>
             <a:endParaRPr lang="en-US" sz="1300" dirty="0"/>
           </a:p>
@@ -6063,7 +7977,7 @@
             <a:r>
               <a:rPr lang="en-US" sz="1300" dirty="0">
                 <a:solidFill>
-                  <a:srgbClr val="EAECEE"/>
+                  <a:srgbClr val="CCCCCC"/>
                 </a:solidFill>
                 <a:latin typeface="Courier New" pitchFamily="34" charset="0"/>
                 <a:ea typeface="Courier New" pitchFamily="34" charset="-122"/>
@@ -6080,7 +7994,7 @@
             <a:r>
               <a:rPr lang="en-US" sz="1300" dirty="0">
                 <a:solidFill>
-                  <a:srgbClr val="EAECEE"/>
+                  <a:srgbClr val="CCCCCC"/>
                 </a:solidFill>
                 <a:latin typeface="Courier New" pitchFamily="34" charset="0"/>
                 <a:ea typeface="Courier New" pitchFamily="34" charset="-122"/>
@@ -6097,7 +8011,7 @@
             <a:r>
               <a:rPr lang="en-US" sz="1300" dirty="0">
                 <a:solidFill>
-                  <a:srgbClr val="EAECEE"/>
+                  <a:srgbClr val="CCCCCC"/>
                 </a:solidFill>
                 <a:latin typeface="Courier New" pitchFamily="34" charset="0"/>
                 <a:ea typeface="Courier New" pitchFamily="34" charset="-122"/>
@@ -6114,7 +8028,7 @@
             <a:r>
               <a:rPr lang="en-US" sz="1300" dirty="0">
                 <a:solidFill>
-                  <a:srgbClr val="EAECEE"/>
+                  <a:srgbClr val="CCCCCC"/>
                 </a:solidFill>
                 <a:latin typeface="Courier New" pitchFamily="34" charset="0"/>
                 <a:ea typeface="Courier New" pitchFamily="34" charset="-122"/>
@@ -7135,9 +9049,14 @@
             </a:avLst>
           </a:prstGeom>
           <a:solidFill>
-            <a:srgbClr val="1D2D3E"/>
+            <a:srgbClr val="1F1F1F"/>
           </a:solidFill>
-          <a:ln/>
+          <a:ln w="9525">
+            <a:solidFill>
+              <a:srgbClr val="2B2B2B"/>
+            </a:solidFill>
+            <a:prstDash val="solid"/>
+          </a:ln>
           <a:effectLst>
             <a:outerShdw sx="100000" sy="100000" kx="0" ky="0" algn="bl" rotWithShape="0" blurRad="101600" dist="25400" dir="5400000">
               <a:srgbClr val="223649">
@@ -7174,7 +9093,7 @@
             <a:r>
               <a:rPr lang="en-US" sz="1300" dirty="0">
                 <a:solidFill>
-                  <a:srgbClr val="EAECEE"/>
+                  <a:srgbClr val="4EC9B0"/>
                 </a:solidFill>
                 <a:latin typeface="Courier New" pitchFamily="34" charset="0"/>
                 <a:ea typeface="Courier New" pitchFamily="34" charset="-122"/>
@@ -7191,13 +9110,41 @@
             <a:r>
               <a:rPr lang="en-US" sz="1300" dirty="0">
                 <a:solidFill>
-                  <a:srgbClr val="EAECEE"/>
-                </a:solidFill>
-                <a:latin typeface="Courier New" pitchFamily="34" charset="0"/>
-                <a:ea typeface="Courier New" pitchFamily="34" charset="-122"/>
-                <a:cs typeface="Courier New" pitchFamily="34" charset="-120"/>
-              </a:rPr>
-              <a:t>  model/Scenarios.js       medidas, dimensões</a:t>
+                  <a:srgbClr val="CCCCCC"/>
+                </a:solidFill>
+                <a:latin typeface="Courier New" pitchFamily="34" charset="0"/>
+                <a:ea typeface="Courier New" pitchFamily="34" charset="-122"/>
+                <a:cs typeface="Courier New" pitchFamily="34" charset="-120"/>
+              </a:rPr>
+              <a:t>  </a:t>
+            </a:r>
+            <a:pPr indent="0" marL="0">
+              <a:buNone/>
+            </a:pPr>
+            <a:r>
+              <a:rPr lang="en-US" sz="1300" dirty="0">
+                <a:solidFill>
+                  <a:srgbClr val="9CDCFE"/>
+                </a:solidFill>
+                <a:latin typeface="Courier New" pitchFamily="34" charset="0"/>
+                <a:ea typeface="Courier New" pitchFamily="34" charset="-122"/>
+                <a:cs typeface="Courier New" pitchFamily="34" charset="-120"/>
+              </a:rPr>
+              <a:t>model/Scenarios.js</a:t>
+            </a:r>
+            <a:pPr indent="0" marL="0">
+              <a:buNone/>
+            </a:pPr>
+            <a:r>
+              <a:rPr lang="en-US" sz="1300" dirty="0">
+                <a:solidFill>
+                  <a:srgbClr val="6A9955"/>
+                </a:solidFill>
+                <a:latin typeface="Courier New" pitchFamily="34" charset="0"/>
+                <a:ea typeface="Courier New" pitchFamily="34" charset="-122"/>
+                <a:cs typeface="Courier New" pitchFamily="34" charset="-120"/>
+              </a:rPr>
+              <a:t>       medidas, dimensões</a:t>
             </a:r>
             <a:endParaRPr lang="en-US" sz="1300" dirty="0"/>
           </a:p>
@@ -7208,13 +9155,41 @@
             <a:r>
               <a:rPr lang="en-US" sz="1300" dirty="0">
                 <a:solidFill>
-                  <a:srgbClr val="EAECEE"/>
-                </a:solidFill>
-                <a:latin typeface="Courier New" pitchFamily="34" charset="0"/>
-                <a:ea typeface="Courier New" pitchFamily="34" charset="-122"/>
-                <a:cs typeface="Courier New" pitchFamily="34" charset="-120"/>
-              </a:rPr>
-              <a:t>  model/AnalyticsQuery.js  regra do $apply</a:t>
+                  <a:srgbClr val="CCCCCC"/>
+                </a:solidFill>
+                <a:latin typeface="Courier New" pitchFamily="34" charset="0"/>
+                <a:ea typeface="Courier New" pitchFamily="34" charset="-122"/>
+                <a:cs typeface="Courier New" pitchFamily="34" charset="-120"/>
+              </a:rPr>
+              <a:t>  </a:t>
+            </a:r>
+            <a:pPr indent="0" marL="0">
+              <a:buNone/>
+            </a:pPr>
+            <a:r>
+              <a:rPr lang="en-US" sz="1300" dirty="0">
+                <a:solidFill>
+                  <a:srgbClr val="9CDCFE"/>
+                </a:solidFill>
+                <a:latin typeface="Courier New" pitchFamily="34" charset="0"/>
+                <a:ea typeface="Courier New" pitchFamily="34" charset="-122"/>
+                <a:cs typeface="Courier New" pitchFamily="34" charset="-120"/>
+              </a:rPr>
+              <a:t>model/AnalyticsQuery.js</a:t>
+            </a:r>
+            <a:pPr indent="0" marL="0">
+              <a:buNone/>
+            </a:pPr>
+            <a:r>
+              <a:rPr lang="en-US" sz="1300" dirty="0">
+                <a:solidFill>
+                  <a:srgbClr val="6A9955"/>
+                </a:solidFill>
+                <a:latin typeface="Courier New" pitchFamily="34" charset="0"/>
+                <a:ea typeface="Courier New" pitchFamily="34" charset="-122"/>
+                <a:cs typeface="Courier New" pitchFamily="34" charset="-120"/>
+              </a:rPr>
+              <a:t>  regra do $apply</a:t>
             </a:r>
             <a:endParaRPr lang="en-US" sz="1300" dirty="0"/>
           </a:p>
@@ -7225,13 +9200,27 @@
             <a:r>
               <a:rPr lang="en-US" sz="1300" dirty="0">
                 <a:solidFill>
-                  <a:srgbClr val="EAECEE"/>
-                </a:solidFill>
-                <a:latin typeface="Courier New" pitchFamily="34" charset="0"/>
-                <a:ea typeface="Courier New" pitchFamily="34" charset="-122"/>
-                <a:cs typeface="Courier New" pitchFamily="34" charset="-120"/>
-              </a:rPr>
-              <a:t>  service/AnalyticsService.js</a:t>
+                  <a:srgbClr val="CCCCCC"/>
+                </a:solidFill>
+                <a:latin typeface="Courier New" pitchFamily="34" charset="0"/>
+                <a:ea typeface="Courier New" pitchFamily="34" charset="-122"/>
+                <a:cs typeface="Courier New" pitchFamily="34" charset="-120"/>
+              </a:rPr>
+              <a:t>  </a:t>
+            </a:r>
+            <a:pPr indent="0" marL="0">
+              <a:buNone/>
+            </a:pPr>
+            <a:r>
+              <a:rPr lang="en-US" sz="1300" dirty="0">
+                <a:solidFill>
+                  <a:srgbClr val="9CDCFE"/>
+                </a:solidFill>
+                <a:latin typeface="Courier New" pitchFamily="34" charset="0"/>
+                <a:ea typeface="Courier New" pitchFamily="34" charset="-122"/>
+                <a:cs typeface="Courier New" pitchFamily="34" charset="-120"/>
+              </a:rPr>
+              <a:t>service/AnalyticsService.js</a:t>
             </a:r>
             <a:endParaRPr lang="en-US" sz="1300" dirty="0"/>
           </a:p>
@@ -7242,13 +9231,27 @@
             <a:r>
               <a:rPr lang="en-US" sz="1300" dirty="0">
                 <a:solidFill>
-                  <a:srgbClr val="EAECEE"/>
-                </a:solidFill>
-                <a:latin typeface="Courier New" pitchFamily="34" charset="0"/>
-                <a:ea typeface="Courier New" pitchFamily="34" charset="-122"/>
-                <a:cs typeface="Courier New" pitchFamily="34" charset="-120"/>
-              </a:rPr>
-              <a:t>  control/AnalysisChart.js</a:t>
+                  <a:srgbClr val="CCCCCC"/>
+                </a:solidFill>
+                <a:latin typeface="Courier New" pitchFamily="34" charset="0"/>
+                <a:ea typeface="Courier New" pitchFamily="34" charset="-122"/>
+                <a:cs typeface="Courier New" pitchFamily="34" charset="-120"/>
+              </a:rPr>
+              <a:t>  </a:t>
+            </a:r>
+            <a:pPr indent="0" marL="0">
+              <a:buNone/>
+            </a:pPr>
+            <a:r>
+              <a:rPr lang="en-US" sz="1300" dirty="0">
+                <a:solidFill>
+                  <a:srgbClr val="9CDCFE"/>
+                </a:solidFill>
+                <a:latin typeface="Courier New" pitchFamily="34" charset="0"/>
+                <a:ea typeface="Courier New" pitchFamily="34" charset="-122"/>
+                <a:cs typeface="Courier New" pitchFamily="34" charset="-120"/>
+              </a:rPr>
+              <a:t>control/AnalysisChart.js</a:t>
             </a:r>
             <a:endParaRPr lang="en-US" sz="1300" dirty="0"/>
           </a:p>
@@ -7259,13 +9262,27 @@
             <a:r>
               <a:rPr lang="en-US" sz="1300" dirty="0">
                 <a:solidFill>
-                  <a:srgbClr val="EAECEE"/>
-                </a:solidFill>
-                <a:latin typeface="Courier New" pitchFamily="34" charset="0"/>
-                <a:ea typeface="Courier New" pitchFamily="34" charset="-122"/>
-                <a:cs typeface="Courier New" pitchFamily="34" charset="-120"/>
-              </a:rPr>
-              <a:t>  control/FilterBar.js</a:t>
+                  <a:srgbClr val="CCCCCC"/>
+                </a:solidFill>
+                <a:latin typeface="Courier New" pitchFamily="34" charset="0"/>
+                <a:ea typeface="Courier New" pitchFamily="34" charset="-122"/>
+                <a:cs typeface="Courier New" pitchFamily="34" charset="-120"/>
+              </a:rPr>
+              <a:t>  </a:t>
+            </a:r>
+            <a:pPr indent="0" marL="0">
+              <a:buNone/>
+            </a:pPr>
+            <a:r>
+              <a:rPr lang="en-US" sz="1300" dirty="0">
+                <a:solidFill>
+                  <a:srgbClr val="9CDCFE"/>
+                </a:solidFill>
+                <a:latin typeface="Courier New" pitchFamily="34" charset="0"/>
+                <a:ea typeface="Courier New" pitchFamily="34" charset="-122"/>
+                <a:cs typeface="Courier New" pitchFamily="34" charset="-120"/>
+              </a:rPr>
+              <a:t>control/FilterBar.js</a:t>
             </a:r>
             <a:endParaRPr lang="en-US" sz="1300" dirty="0"/>
           </a:p>
@@ -7276,7 +9293,7 @@
             <a:r>
               <a:rPr lang="en-US" sz="1300" dirty="0">
                 <a:solidFill>
-                  <a:srgbClr val="EAECEE"/>
+                  <a:srgbClr val="CCCCCC"/>
                 </a:solidFill>
                 <a:latin typeface="Courier New" pitchFamily="34" charset="0"/>
                 <a:ea typeface="Courier New" pitchFamily="34" charset="-122"/>

--- a/docs/apresentacoes/05-analises.pptx
+++ b/docs/apresentacoes/05-analises.pptx
@@ -10,10 +10,16 @@
     <p:sldId id="258" r:id="rId4"/>
     <p:sldId id="259" r:id="rId5"/>
     <p:sldId id="260" r:id="rId6"/>
+    <p:sldId id="272" r:id="rId23"/>
+    <p:sldId id="262" r:id="rId8"/>
+    <p:sldId id="273" r:id="rId24"/>
+    <p:sldId id="263" r:id="rId9"/>
+    <p:sldId id="274" r:id="rId25"/>
+    <p:sldId id="275" r:id="rId26"/>
     <p:sldId id="261" r:id="rId7"/>
-    <p:sldId id="262" r:id="rId8"/>
-    <p:sldId id="263" r:id="rId9"/>
+    <p:sldId id="276" r:id="rId27"/>
     <p:sldId id="264" r:id="rId10"/>
+    <p:sldId id="277" r:id="rId28"/>
     <p:sldId id="265" r:id="rId11"/>
     <p:sldId id="266" r:id="rId12"/>
     <p:sldId id="267" r:id="rId13"/>
@@ -1224,6 +1230,216 @@
 </p:notes>
 </file>
 
+<file path=ppt/notesSlides/notesSlide17.xml><?xml version="1.0" encoding="utf-8"?>
+<p:notes xmlns:a="http://schemas.openxmlformats.org/drawingml/2006/main" xmlns:p="http://schemas.openxmlformats.org/presentationml/2006/main" xmlns:r="http://schemas.openxmlformats.org/officeDocument/2006/relationships">
+  <p:cSld>
+    <p:spTree>
+      <p:nvGrpSpPr>
+        <p:cNvPr id="1" name=""/>
+        <p:cNvGrpSpPr/>
+        <p:nvPr/>
+      </p:nvGrpSpPr>
+      <p:grpSpPr>
+        <a:xfrm>
+          <a:off x="0" y="0"/>
+          <a:ext cx="0" cy="0"/>
+          <a:chOff x="0" y="0"/>
+          <a:chExt cx="0" cy="0"/>
+        </a:xfrm>
+      </p:grpSpPr>
+      <p:sp>
+        <p:nvSpPr>
+          <p:cNvPr id="2" name="Slide Image Placeholder 1"/>
+          <p:cNvSpPr>
+            <a:spLocks noGrp="1"/>
+          </p:cNvSpPr>
+          <p:nvPr>
+            <p:ph type="sldImg" idx="2"/>
+          </p:nvPr>
+        </p:nvSpPr>
+        <p:spPr/>
+      </p:sp>
+      <p:sp>
+        <p:nvSpPr>
+          <p:cNvPr id="3" name="Notes Placeholder 2"/>
+          <p:cNvSpPr>
+            <a:spLocks noGrp="1"/>
+          </p:cNvSpPr>
+          <p:nvPr>
+            <p:ph type="body" idx="3" sz="quarter"/>
+          </p:nvPr>
+        </p:nvSpPr>
+        <p:spPr/>
+        <p:txBody>
+          <a:bodyPr/>
+          <a:lstStyle/>
+          <a:p>
+            <a:r>
+              <a:t>Seção do BO Clientes na etapa 5.</a:t>
+            </a:r>
+          </a:p>
+        </p:txBody>
+      </p:sp>
+      <p:sp>
+        <p:nvSpPr>
+          <p:cNvPr id="4" name="Slide Number Placeholder 3"/>
+          <p:cNvSpPr>
+            <a:spLocks noGrp="1"/>
+          </p:cNvSpPr>
+          <p:nvPr>
+            <p:ph type="sldNum" idx="5" sz="quarter"/>
+          </p:nvPr>
+        </p:nvSpPr>
+        <p:spPr/>
+      </p:sp>
+    </p:spTree>
+  </p:cSld>
+  <p:clrMapOvr>
+    <a:masterClrMapping/>
+  </p:clrMapOvr>
+</p:notes>
+</file>
+
+<file path=ppt/notesSlides/notesSlide18.xml><?xml version="1.0" encoding="utf-8"?>
+<p:notes xmlns:a="http://schemas.openxmlformats.org/drawingml/2006/main" xmlns:p="http://schemas.openxmlformats.org/presentationml/2006/main" xmlns:r="http://schemas.openxmlformats.org/officeDocument/2006/relationships">
+  <p:cSld>
+    <p:spTree>
+      <p:nvGrpSpPr>
+        <p:cNvPr id="1" name=""/>
+        <p:cNvGrpSpPr/>
+        <p:nvPr/>
+      </p:nvGrpSpPr>
+      <p:grpSpPr>
+        <a:xfrm>
+          <a:off x="0" y="0"/>
+          <a:ext cx="0" cy="0"/>
+          <a:chOff x="0" y="0"/>
+          <a:chExt cx="0" cy="0"/>
+        </a:xfrm>
+      </p:grpSpPr>
+      <p:sp>
+        <p:nvSpPr>
+          <p:cNvPr id="2" name="Slide Image Placeholder 1"/>
+          <p:cNvSpPr>
+            <a:spLocks noGrp="1"/>
+          </p:cNvSpPr>
+          <p:nvPr>
+            <p:ph type="sldImg" idx="2"/>
+          </p:nvPr>
+        </p:nvSpPr>
+        <p:spPr/>
+      </p:sp>
+      <p:sp>
+        <p:nvSpPr>
+          <p:cNvPr id="3" name="Notes Placeholder 2"/>
+          <p:cNvSpPr>
+            <a:spLocks noGrp="1"/>
+          </p:cNvSpPr>
+          <p:nvPr>
+            <p:ph type="body" idx="3" sz="quarter"/>
+          </p:nvPr>
+        </p:nvSpPr>
+        <p:spPr/>
+        <p:txBody>
+          <a:bodyPr/>
+          <a:lstStyle/>
+          <a:p>
+            <a:r>
+              <a:t>Seção do BO Estoque na etapa 5.</a:t>
+            </a:r>
+          </a:p>
+        </p:txBody>
+      </p:sp>
+      <p:sp>
+        <p:nvSpPr>
+          <p:cNvPr id="4" name="Slide Number Placeholder 3"/>
+          <p:cNvSpPr>
+            <a:spLocks noGrp="1"/>
+          </p:cNvSpPr>
+          <p:nvPr>
+            <p:ph type="sldNum" idx="5" sz="quarter"/>
+          </p:nvPr>
+        </p:nvSpPr>
+        <p:spPr/>
+      </p:sp>
+    </p:spTree>
+  </p:cSld>
+  <p:clrMapOvr>
+    <a:masterClrMapping/>
+  </p:clrMapOvr>
+</p:notes>
+</file>
+
+<file path=ppt/notesSlides/notesSlide19.xml><?xml version="1.0" encoding="utf-8"?>
+<p:notes xmlns:a="http://schemas.openxmlformats.org/drawingml/2006/main" xmlns:p="http://schemas.openxmlformats.org/presentationml/2006/main" xmlns:r="http://schemas.openxmlformats.org/officeDocument/2006/relationships">
+  <p:cSld>
+    <p:spTree>
+      <p:nvGrpSpPr>
+        <p:cNvPr id="1" name=""/>
+        <p:cNvGrpSpPr/>
+        <p:nvPr/>
+      </p:nvGrpSpPr>
+      <p:grpSpPr>
+        <a:xfrm>
+          <a:off x="0" y="0"/>
+          <a:ext cx="0" cy="0"/>
+          <a:chOff x="0" y="0"/>
+          <a:chExt cx="0" cy="0"/>
+        </a:xfrm>
+      </p:grpSpPr>
+      <p:sp>
+        <p:nvSpPr>
+          <p:cNvPr id="2" name="Slide Image Placeholder 1"/>
+          <p:cNvSpPr>
+            <a:spLocks noGrp="1"/>
+          </p:cNvSpPr>
+          <p:nvPr>
+            <p:ph type="sldImg" idx="2"/>
+          </p:nvPr>
+        </p:nvSpPr>
+        <p:spPr/>
+      </p:sp>
+      <p:sp>
+        <p:nvSpPr>
+          <p:cNvPr id="3" name="Notes Placeholder 2"/>
+          <p:cNvSpPr>
+            <a:spLocks noGrp="1"/>
+          </p:cNvSpPr>
+          <p:nvPr>
+            <p:ph type="body" idx="3" sz="quarter"/>
+          </p:nvPr>
+        </p:nvSpPr>
+        <p:spPr/>
+        <p:txBody>
+          <a:bodyPr/>
+          <a:lstStyle/>
+          <a:p>
+            <a:r>
+              <a:t>ItensAnalise transforma o cadastro em medidas; a app Análise de Itens do Estoque mostra cinco cenários.</a:t>
+            </a:r>
+          </a:p>
+        </p:txBody>
+      </p:sp>
+      <p:sp>
+        <p:nvSpPr>
+          <p:cNvPr id="4" name="Slide Number Placeholder 3"/>
+          <p:cNvSpPr>
+            <a:spLocks noGrp="1"/>
+          </p:cNvSpPr>
+          <p:nvPr>
+            <p:ph type="sldNum" idx="5" sz="quarter"/>
+          </p:nvPr>
+        </p:nvSpPr>
+        <p:spPr/>
+      </p:sp>
+    </p:spTree>
+  </p:cSld>
+  <p:clrMapOvr>
+    <a:masterClrMapping/>
+  </p:clrMapOvr>
+</p:notes>
+</file>
+
 <file path=ppt/notesSlides/notesSlide2.xml><?xml version="1.0" encoding="utf-8"?>
 <p:notes xmlns:a="http://schemas.openxmlformats.org/drawingml/2006/main" xmlns:r="http://schemas.openxmlformats.org/officeDocument/2006/relationships" xmlns:p="http://schemas.openxmlformats.org/presentationml/2006/main">
   <p:cSld>
@@ -1305,6 +1521,216 @@
         <p14:creationId xmlns:p14="http://schemas.microsoft.com/office/powerpoint/2010/main" val="1024086991"/>
       </p:ext>
     </p:extLst>
+  </p:cSld>
+  <p:clrMapOvr>
+    <a:masterClrMapping/>
+  </p:clrMapOvr>
+</p:notes>
+</file>
+
+<file path=ppt/notesSlides/notesSlide20.xml><?xml version="1.0" encoding="utf-8"?>
+<p:notes xmlns:a="http://schemas.openxmlformats.org/drawingml/2006/main" xmlns:p="http://schemas.openxmlformats.org/presentationml/2006/main" xmlns:r="http://schemas.openxmlformats.org/officeDocument/2006/relationships">
+  <p:cSld>
+    <p:spTree>
+      <p:nvGrpSpPr>
+        <p:cNvPr id="1" name=""/>
+        <p:cNvGrpSpPr/>
+        <p:nvPr/>
+      </p:nvGrpSpPr>
+      <p:grpSpPr>
+        <a:xfrm>
+          <a:off x="0" y="0"/>
+          <a:ext cx="0" cy="0"/>
+          <a:chOff x="0" y="0"/>
+          <a:chExt cx="0" cy="0"/>
+        </a:xfrm>
+      </p:grpSpPr>
+      <p:sp>
+        <p:nvSpPr>
+          <p:cNvPr id="2" name="Slide Image Placeholder 1"/>
+          <p:cNvSpPr>
+            <a:spLocks noGrp="1"/>
+          </p:cNvSpPr>
+          <p:nvPr>
+            <p:ph type="sldImg" idx="2"/>
+          </p:nvPr>
+        </p:nvSpPr>
+        <p:spPr/>
+      </p:sp>
+      <p:sp>
+        <p:nvSpPr>
+          <p:cNvPr id="3" name="Notes Placeholder 2"/>
+          <p:cNvSpPr>
+            <a:spLocks noGrp="1"/>
+          </p:cNvSpPr>
+          <p:nvPr>
+            <p:ph type="body" idx="3" sz="quarter"/>
+          </p:nvPr>
+        </p:nvSpPr>
+        <p:spPr/>
+        <p:txBody>
+          <a:bodyPr/>
+          <a:lstStyle/>
+          <a:p>
+            <a:r>
+              <a:t>Seção do BO Pedidos na etapa 5.</a:t>
+            </a:r>
+          </a:p>
+        </p:txBody>
+      </p:sp>
+      <p:sp>
+        <p:nvSpPr>
+          <p:cNvPr id="4" name="Slide Number Placeholder 3"/>
+          <p:cNvSpPr>
+            <a:spLocks noGrp="1"/>
+          </p:cNvSpPr>
+          <p:nvPr>
+            <p:ph type="sldNum" idx="5" sz="quarter"/>
+          </p:nvPr>
+        </p:nvSpPr>
+        <p:spPr/>
+      </p:sp>
+    </p:spTree>
+  </p:cSld>
+  <p:clrMapOvr>
+    <a:masterClrMapping/>
+  </p:clrMapOvr>
+</p:notes>
+</file>
+
+<file path=ppt/notesSlides/notesSlide21.xml><?xml version="1.0" encoding="utf-8"?>
+<p:notes xmlns:a="http://schemas.openxmlformats.org/drawingml/2006/main" xmlns:p="http://schemas.openxmlformats.org/presentationml/2006/main" xmlns:r="http://schemas.openxmlformats.org/officeDocument/2006/relationships">
+  <p:cSld>
+    <p:spTree>
+      <p:nvGrpSpPr>
+        <p:cNvPr id="1" name=""/>
+        <p:cNvGrpSpPr/>
+        <p:nvPr/>
+      </p:nvGrpSpPr>
+      <p:grpSpPr>
+        <a:xfrm>
+          <a:off x="0" y="0"/>
+          <a:ext cx="0" cy="0"/>
+          <a:chOff x="0" y="0"/>
+          <a:chExt cx="0" cy="0"/>
+        </a:xfrm>
+      </p:grpSpPr>
+      <p:sp>
+        <p:nvSpPr>
+          <p:cNvPr id="2" name="Slide Image Placeholder 1"/>
+          <p:cNvSpPr>
+            <a:spLocks noGrp="1"/>
+          </p:cNvSpPr>
+          <p:nvPr>
+            <p:ph type="sldImg" idx="2"/>
+          </p:nvPr>
+        </p:nvSpPr>
+        <p:spPr/>
+      </p:sp>
+      <p:sp>
+        <p:nvSpPr>
+          <p:cNvPr id="3" name="Notes Placeholder 2"/>
+          <p:cNvSpPr>
+            <a:spLocks noGrp="1"/>
+          </p:cNvSpPr>
+          <p:nvPr>
+            <p:ph type="body" idx="3" sz="quarter"/>
+          </p:nvPr>
+        </p:nvSpPr>
+        <p:spPr/>
+        <p:txBody>
+          <a:bodyPr/>
+          <a:lstStyle/>
+          <a:p>
+            <a:r>
+              <a:t>Seção do BO Reembolsos na etapa 5.</a:t>
+            </a:r>
+          </a:p>
+        </p:txBody>
+      </p:sp>
+      <p:sp>
+        <p:nvSpPr>
+          <p:cNvPr id="4" name="Slide Number Placeholder 3"/>
+          <p:cNvSpPr>
+            <a:spLocks noGrp="1"/>
+          </p:cNvSpPr>
+          <p:nvPr>
+            <p:ph type="sldNum" idx="5" sz="quarter"/>
+          </p:nvPr>
+        </p:nvSpPr>
+        <p:spPr/>
+      </p:sp>
+    </p:spTree>
+  </p:cSld>
+  <p:clrMapOvr>
+    <a:masterClrMapping/>
+  </p:clrMapOvr>
+</p:notes>
+</file>
+
+<file path=ppt/notesSlides/notesSlide22.xml><?xml version="1.0" encoding="utf-8"?>
+<p:notes xmlns:a="http://schemas.openxmlformats.org/drawingml/2006/main" xmlns:p="http://schemas.openxmlformats.org/presentationml/2006/main" xmlns:r="http://schemas.openxmlformats.org/officeDocument/2006/relationships">
+  <p:cSld>
+    <p:spTree>
+      <p:nvGrpSpPr>
+        <p:cNvPr id="1" name=""/>
+        <p:cNvGrpSpPr/>
+        <p:nvPr/>
+      </p:nvGrpSpPr>
+      <p:grpSpPr>
+        <a:xfrm>
+          <a:off x="0" y="0"/>
+          <a:ext cx="0" cy="0"/>
+          <a:chOff x="0" y="0"/>
+          <a:chExt cx="0" cy="0"/>
+        </a:xfrm>
+      </p:grpSpPr>
+      <p:sp>
+        <p:nvSpPr>
+          <p:cNvPr id="2" name="Slide Image Placeholder 1"/>
+          <p:cNvSpPr>
+            <a:spLocks noGrp="1"/>
+          </p:cNvSpPr>
+          <p:nvPr>
+            <p:ph type="sldImg" idx="2"/>
+          </p:nvPr>
+        </p:nvSpPr>
+        <p:spPr/>
+      </p:sp>
+      <p:sp>
+        <p:nvSpPr>
+          <p:cNvPr id="3" name="Notes Placeholder 2"/>
+          <p:cNvSpPr>
+            <a:spLocks noGrp="1"/>
+          </p:cNvSpPr>
+          <p:nvPr>
+            <p:ph type="body" idx="3" sz="quarter"/>
+          </p:nvPr>
+        </p:nvSpPr>
+        <p:spPr/>
+        <p:txBody>
+          <a:bodyPr/>
+          <a:lstStyle/>
+          <a:p>
+            <a:r>
+              <a:t>A view analítica agrupa por status, motivo, UF e mês; a app mostra cinco cenários.</a:t>
+            </a:r>
+          </a:p>
+        </p:txBody>
+      </p:sp>
+      <p:sp>
+        <p:nvSpPr>
+          <p:cNvPr id="4" name="Slide Number Placeholder 3"/>
+          <p:cNvSpPr>
+            <a:spLocks noGrp="1"/>
+          </p:cNvSpPr>
+          <p:nvPr>
+            <p:ph type="sldNum" idx="5" sz="quarter"/>
+          </p:nvPr>
+        </p:nvSpPr>
+        <p:spPr/>
+      </p:sp>
+    </p:spTree>
   </p:cSld>
   <p:clrMapOvr>
     <a:masterClrMapping/>
@@ -14361,6 +14787,1388 @@
 </p:sld>
 </file>
 
+<file path=ppt/slides/slide17.xml><?xml version="1.0" encoding="utf-8"?>
+<p:sld xmlns:a="http://schemas.openxmlformats.org/drawingml/2006/main" xmlns:p="http://schemas.openxmlformats.org/presentationml/2006/main" xmlns:r="http://schemas.openxmlformats.org/officeDocument/2006/relationships">
+  <p:cSld name="Slide 1">
+    <p:spTree>
+      <p:nvGrpSpPr>
+        <p:cNvPr id="1" name=""/>
+        <p:cNvGrpSpPr/>
+        <p:nvPr/>
+      </p:nvGrpSpPr>
+      <p:grpSpPr>
+        <a:xfrm>
+          <a:off x="0" y="0"/>
+          <a:ext cx="0" cy="0"/>
+          <a:chOff x="0" y="0"/>
+          <a:chExt cx="0" cy="0"/>
+        </a:xfrm>
+      </p:grpSpPr>
+      <p:sp>
+        <p:nvSpPr>
+          <p:cNvPr id="2" name="Text 0"/>
+          <p:cNvSpPr/>
+          <p:nvPr>
+            <p:ph idx="100" type="body" hasCustomPrompt="1"/>
+          </p:nvPr>
+        </p:nvSpPr>
+        <p:spPr>
+          <a:xfrm>
+            <a:off x="731520" y="1417320"/>
+            <a:ext cx="5486400" cy="411480"/>
+          </a:xfrm>
+          <a:prstGeom prst="rect">
+            <a:avLst/>
+          </a:prstGeom>
+          <a:noFill/>
+          <a:ln/>
+        </p:spPr>
+        <p:txBody>
+          <a:bodyPr wrap="square" lIns="0" tIns="0" rIns="0" bIns="0" rtlCol="0" anchor="ctr"/>
+          <a:lstStyle/>
+          <a:p>
+            <a:pPr algn="l" indent="0" marL="0">
+              <a:buNone/>
+            </a:pPr>
+            <a:r>
+              <a:rPr lang="en-US" sz="1400" b="1" spc="200" kern="0" dirty="0">
+                <a:solidFill>
+                  <a:srgbClr val="89D1FF"/>
+                </a:solidFill>
+              </a:rPr>
+              <a:t>ETAPA 5 · CLIENTES</a:t>
+            </a:r>
+            <a:endParaRPr lang="en-US" sz="1400" dirty="0"/>
+          </a:p>
+        </p:txBody>
+      </p:sp>
+      <p:sp>
+        <p:nvSpPr>
+          <p:cNvPr id="3" name="Text 0"/>
+          <p:cNvSpPr/>
+          <p:nvPr>
+            <p:ph idx="101" type="title" hasCustomPrompt="1"/>
+          </p:nvPr>
+        </p:nvSpPr>
+        <p:spPr>
+          <a:xfrm>
+            <a:off x="731520" y="1965960"/>
+            <a:ext cx="6766560" cy="1737360"/>
+          </a:xfrm>
+          <a:prstGeom prst="rect">
+            <a:avLst/>
+          </a:prstGeom>
+          <a:noFill/>
+          <a:ln/>
+        </p:spPr>
+        <p:txBody>
+          <a:bodyPr wrap="square" lIns="0" tIns="0" rIns="0" bIns="0" rtlCol="0" anchor="t"/>
+          <a:lstStyle/>
+          <a:p>
+            <a:pPr algn="l" indent="0" marL="0">
+              <a:buNone/>
+            </a:pPr>
+            <a:r>
+              <a:rPr lang="en-US" sz="4400" b="1" dirty="0">
+                <a:solidFill>
+                  <a:schemeClr val="bg1"/>
+                </a:solidFill>
+              </a:rPr>
+              <a:t>BO Clientes</a:t>
+            </a:r>
+            <a:endParaRPr lang="en-US" sz="4400" dirty="0"/>
+          </a:p>
+        </p:txBody>
+      </p:sp>
+      <p:sp>
+        <p:nvSpPr>
+          <p:cNvPr id="4" name="Text 0"/>
+          <p:cNvSpPr/>
+          <p:nvPr>
+            <p:ph idx="102" type="body" hasCustomPrompt="1"/>
+          </p:nvPr>
+        </p:nvSpPr>
+        <p:spPr>
+          <a:xfrm>
+            <a:off x="731520" y="3840480"/>
+            <a:ext cx="6400800" cy="1097280"/>
+          </a:xfrm>
+          <a:prstGeom prst="rect">
+            <a:avLst/>
+          </a:prstGeom>
+          <a:noFill/>
+          <a:ln/>
+        </p:spPr>
+        <p:txBody>
+          <a:bodyPr wrap="square" lIns="0" tIns="0" rIns="0" bIns="0" rtlCol="0" anchor="t"/>
+          <a:lstStyle/>
+          <a:p>
+            <a:pPr algn="l" indent="0" marL="0">
+              <a:buNone/>
+            </a:pPr>
+            <a:r>
+              <a:rPr lang="en-US" sz="1800" dirty="0">
+                <a:solidFill>
+                  <a:srgbClr val="D1EFFF"/>
+                </a:solidFill>
+              </a:rPr>
+              <a:t>ClientesAnalise e a Análise de Clientes: clientes e score médio por gênero, UF e faixa de score.</a:t>
+            </a:r>
+            <a:endParaRPr lang="en-US" sz="1800" dirty="0"/>
+          </a:p>
+        </p:txBody>
+      </p:sp>
+      <p:sp>
+        <p:nvSpPr>
+          <p:cNvPr id="5" name="Avatar da etapa"/>
+          <p:cNvSpPr/>
+          <p:nvPr/>
+        </p:nvSpPr>
+        <p:spPr>
+          <a:xfrm>
+            <a:off x="8183880" y="1417320"/>
+            <a:ext cx="3291840" cy="3291840"/>
+          </a:xfrm>
+          <a:prstGeom prst="roundRect">
+            <a:avLst>
+              <a:gd name="adj" fmla="val 22222"/>
+            </a:avLst>
+          </a:prstGeom>
+          <a:solidFill>
+            <a:srgbClr val="1B3A7A"/>
+          </a:solidFill>
+          <a:ln/>
+        </p:spPr>
+      </p:sp>
+      <p:sp>
+        <p:nvSpPr>
+          <p:cNvPr id="6" name="Avatar interno"/>
+          <p:cNvSpPr/>
+          <p:nvPr/>
+        </p:nvSpPr>
+        <p:spPr>
+          <a:xfrm>
+            <a:off x="8732520" y="1965960"/>
+            <a:ext cx="2194560" cy="2194560"/>
+          </a:xfrm>
+          <a:prstGeom prst="roundRect">
+            <a:avLst>
+              <a:gd name="adj" fmla="val 22917"/>
+            </a:avLst>
+          </a:prstGeom>
+          <a:solidFill>
+            <a:schemeClr val="accent1"/>
+          </a:solidFill>
+          <a:ln/>
+        </p:spPr>
+      </p:sp>
+      <p:pic>
+        <p:nvPicPr>
+          <p:cNvPr id="7" name="Image 0" descr="Clientes">    </p:cNvPr>
+          <p:cNvPicPr>
+            <a:picLocks noChangeAspect="1"/>
+          </p:cNvPicPr>
+          <p:nvPr/>
+        </p:nvPicPr>
+        <p:blipFill>
+          <a:blip r:embed="rId2"/>
+          <a:stretch>
+            <a:fillRect/>
+          </a:stretch>
+        </p:blipFill>
+        <p:spPr>
+          <a:xfrm>
+            <a:off x="9281160" y="2514600"/>
+            <a:ext cx="1097280" cy="1097280"/>
+          </a:xfrm>
+          <a:prstGeom prst="rect">
+            <a:avLst/>
+          </a:prstGeom>
+        </p:spPr>
+      </p:pic>
+      <p:sp>
+        <p:nvSpPr>
+          <p:cNvPr id="8" name="Etapa 1"/>
+          <p:cNvSpPr/>
+          <p:nvPr/>
+        </p:nvSpPr>
+        <p:spPr>
+          <a:xfrm>
+            <a:off x="8183880" y="5074920"/>
+            <a:ext cx="548640" cy="109728"/>
+          </a:xfrm>
+          <a:prstGeom prst="roundRect">
+            <a:avLst>
+              <a:gd name="adj" fmla="val 50000"/>
+            </a:avLst>
+          </a:prstGeom>
+          <a:solidFill>
+            <a:srgbClr val="1B3A7A"/>
+          </a:solidFill>
+          <a:ln/>
+        </p:spPr>
+      </p:sp>
+      <p:sp>
+        <p:nvSpPr>
+          <p:cNvPr id="9" name="Etapa 2"/>
+          <p:cNvSpPr/>
+          <p:nvPr/>
+        </p:nvSpPr>
+        <p:spPr>
+          <a:xfrm>
+            <a:off x="8842248" y="5074920"/>
+            <a:ext cx="548640" cy="109728"/>
+          </a:xfrm>
+          <a:prstGeom prst="roundRect">
+            <a:avLst>
+              <a:gd name="adj" fmla="val 50000"/>
+            </a:avLst>
+          </a:prstGeom>
+          <a:solidFill>
+            <a:srgbClr val="89D1FF"/>
+          </a:solidFill>
+          <a:ln/>
+        </p:spPr>
+      </p:sp>
+      <p:sp>
+        <p:nvSpPr>
+          <p:cNvPr id="10" name="Etapa 3"/>
+          <p:cNvSpPr/>
+          <p:nvPr/>
+        </p:nvSpPr>
+        <p:spPr>
+          <a:xfrm>
+            <a:off x="9500616" y="5074920"/>
+            <a:ext cx="548640" cy="109728"/>
+          </a:xfrm>
+          <a:prstGeom prst="roundRect">
+            <a:avLst>
+              <a:gd name="adj" fmla="val 50000"/>
+            </a:avLst>
+          </a:prstGeom>
+          <a:solidFill>
+            <a:srgbClr val="1B3A7A"/>
+          </a:solidFill>
+          <a:ln/>
+        </p:spPr>
+      </p:sp>
+      <p:sp>
+        <p:nvSpPr>
+          <p:cNvPr id="11" name="Etapa 4"/>
+          <p:cNvSpPr/>
+          <p:nvPr/>
+        </p:nvSpPr>
+        <p:spPr>
+          <a:xfrm>
+            <a:off x="10158984" y="5074920"/>
+            <a:ext cx="548640" cy="109728"/>
+          </a:xfrm>
+          <a:prstGeom prst="roundRect">
+            <a:avLst>
+              <a:gd name="adj" fmla="val 50000"/>
+            </a:avLst>
+          </a:prstGeom>
+          <a:solidFill>
+            <a:srgbClr val="1B3A7A"/>
+          </a:solidFill>
+          <a:ln/>
+        </p:spPr>
+      </p:sp>
+      <p:sp>
+        <p:nvSpPr>
+          <p:cNvPr id="12" name="Etapa 5"/>
+          <p:cNvSpPr/>
+          <p:nvPr/>
+        </p:nvSpPr>
+        <p:spPr>
+          <a:xfrm>
+            <a:off x="10817352" y="5074920"/>
+            <a:ext cx="548640" cy="109728"/>
+          </a:xfrm>
+          <a:prstGeom prst="roundRect">
+            <a:avLst>
+              <a:gd name="adj" fmla="val 50000"/>
+            </a:avLst>
+          </a:prstGeom>
+          <a:solidFill>
+            <a:srgbClr val="1B3A7A"/>
+          </a:solidFill>
+          <a:ln/>
+        </p:spPr>
+      </p:sp>
+      <p:sp>
+        <p:nvSpPr>
+          <p:cNvPr id="13" name="Text 10"/>
+          <p:cNvSpPr txBox="1"/>
+          <p:nvPr/>
+        </p:nvSpPr>
+        <p:spPr>
+          <a:xfrm>
+            <a:off x="8183880" y="5303520"/>
+            <a:ext cx="3291840" cy="274320"/>
+          </a:xfrm>
+          <a:prstGeom prst="rect">
+            <a:avLst/>
+          </a:prstGeom>
+          <a:noFill/>
+          <a:ln/>
+        </p:spPr>
+        <p:txBody>
+          <a:bodyPr wrap="square" lIns="0" tIns="0" rIns="0" bIns="0" rtlCol="0" anchor="ctr"/>
+          <a:lstStyle/>
+          <a:p>
+            <a:pPr indent="0" marL="0">
+              <a:buNone/>
+            </a:pPr>
+            <a:r>
+              <a:rPr lang="en-US" sz="1200" dirty="0">
+                <a:solidFill>
+                  <a:srgbClr val="89D1FF"/>
+                </a:solidFill>
+              </a:rPr>
+              <a:t>BO 2 de 5</a:t>
+            </a:r>
+            <a:endParaRPr lang="en-US" sz="1200" dirty="0"/>
+          </a:p>
+        </p:txBody>
+      </p:sp>
+    </p:spTree>
+  </p:cSld>
+  <p:clrMapOvr>
+    <a:masterClrMapping/>
+  </p:clrMapOvr>
+</p:sld>
+</file>
+
+<file path=ppt/slides/slide18.xml><?xml version="1.0" encoding="utf-8"?>
+<p:sld xmlns:a="http://schemas.openxmlformats.org/drawingml/2006/main" xmlns:p="http://schemas.openxmlformats.org/presentationml/2006/main" xmlns:r="http://schemas.openxmlformats.org/officeDocument/2006/relationships">
+  <p:cSld name="Slide 1">
+    <p:spTree>
+      <p:nvGrpSpPr>
+        <p:cNvPr id="1" name=""/>
+        <p:cNvGrpSpPr/>
+        <p:nvPr/>
+      </p:nvGrpSpPr>
+      <p:grpSpPr>
+        <a:xfrm>
+          <a:off x="0" y="0"/>
+          <a:ext cx="0" cy="0"/>
+          <a:chOff x="0" y="0"/>
+          <a:chExt cx="0" cy="0"/>
+        </a:xfrm>
+      </p:grpSpPr>
+      <p:sp>
+        <p:nvSpPr>
+          <p:cNvPr id="2" name="Text 0"/>
+          <p:cNvSpPr/>
+          <p:nvPr>
+            <p:ph idx="100" type="body" hasCustomPrompt="1"/>
+          </p:nvPr>
+        </p:nvSpPr>
+        <p:spPr>
+          <a:xfrm>
+            <a:off x="731520" y="1417320"/>
+            <a:ext cx="5486400" cy="411480"/>
+          </a:xfrm>
+          <a:prstGeom prst="rect">
+            <a:avLst/>
+          </a:prstGeom>
+          <a:noFill/>
+          <a:ln/>
+        </p:spPr>
+        <p:txBody>
+          <a:bodyPr wrap="square" lIns="0" tIns="0" rIns="0" bIns="0" rtlCol="0" anchor="ctr"/>
+          <a:lstStyle/>
+          <a:p>
+            <a:pPr algn="l" indent="0" marL="0">
+              <a:buNone/>
+            </a:pPr>
+            <a:r>
+              <a:rPr lang="en-US" sz="1400" b="1" spc="200" kern="0" dirty="0">
+                <a:solidFill>
+                  <a:srgbClr val="89D1FF"/>
+                </a:solidFill>
+              </a:rPr>
+              <a:t>ETAPA 5 · ESTOQUE</a:t>
+            </a:r>
+            <a:endParaRPr lang="en-US" sz="1400" dirty="0"/>
+          </a:p>
+        </p:txBody>
+      </p:sp>
+      <p:sp>
+        <p:nvSpPr>
+          <p:cNvPr id="3" name="Text 0"/>
+          <p:cNvSpPr/>
+          <p:nvPr>
+            <p:ph idx="101" type="title" hasCustomPrompt="1"/>
+          </p:nvPr>
+        </p:nvSpPr>
+        <p:spPr>
+          <a:xfrm>
+            <a:off x="731520" y="1965960"/>
+            <a:ext cx="6766560" cy="1737360"/>
+          </a:xfrm>
+          <a:prstGeom prst="rect">
+            <a:avLst/>
+          </a:prstGeom>
+          <a:noFill/>
+          <a:ln/>
+        </p:spPr>
+        <p:txBody>
+          <a:bodyPr wrap="square" lIns="0" tIns="0" rIns="0" bIns="0" rtlCol="0" anchor="t"/>
+          <a:lstStyle/>
+          <a:p>
+            <a:pPr algn="l" indent="0" marL="0">
+              <a:buNone/>
+            </a:pPr>
+            <a:r>
+              <a:rPr lang="en-US" sz="4400" b="1" dirty="0">
+                <a:solidFill>
+                  <a:schemeClr val="bg1"/>
+                </a:solidFill>
+              </a:rPr>
+              <a:t>BO Estoque</a:t>
+            </a:r>
+            <a:endParaRPr lang="en-US" sz="4400" dirty="0"/>
+          </a:p>
+        </p:txBody>
+      </p:sp>
+      <p:sp>
+        <p:nvSpPr>
+          <p:cNvPr id="4" name="Text 0"/>
+          <p:cNvSpPr/>
+          <p:nvPr>
+            <p:ph idx="102" type="body" hasCustomPrompt="1"/>
+          </p:nvPr>
+        </p:nvSpPr>
+        <p:spPr>
+          <a:xfrm>
+            <a:off x="731520" y="3840480"/>
+            <a:ext cx="6400800" cy="1097280"/>
+          </a:xfrm>
+          <a:prstGeom prst="rect">
+            <a:avLst/>
+          </a:prstGeom>
+          <a:noFill/>
+          <a:ln/>
+        </p:spPr>
+        <p:txBody>
+          <a:bodyPr wrap="square" lIns="0" tIns="0" rIns="0" bIns="0" rtlCol="0" anchor="t"/>
+          <a:lstStyle/>
+          <a:p>
+            <a:pPr algn="l" indent="0" marL="0">
+              <a:buNone/>
+            </a:pPr>
+            <a:r>
+              <a:rPr lang="en-US" sz="1800" dirty="0">
+                <a:solidFill>
+                  <a:srgbClr val="D1EFFF"/>
+                </a:solidFill>
+              </a:rPr>
+              <a:t>ItensAnalise e a Análise de Itens do Estoque: saldo, reserva, disponível e valor do estoque, com o top 10 dos mais reservados.</a:t>
+            </a:r>
+            <a:endParaRPr lang="en-US" sz="1800" dirty="0"/>
+          </a:p>
+        </p:txBody>
+      </p:sp>
+      <p:sp>
+        <p:nvSpPr>
+          <p:cNvPr id="5" name="Avatar da etapa"/>
+          <p:cNvSpPr/>
+          <p:nvPr/>
+        </p:nvSpPr>
+        <p:spPr>
+          <a:xfrm>
+            <a:off x="8183880" y="1417320"/>
+            <a:ext cx="3291840" cy="3291840"/>
+          </a:xfrm>
+          <a:prstGeom prst="roundRect">
+            <a:avLst>
+              <a:gd name="adj" fmla="val 22222"/>
+            </a:avLst>
+          </a:prstGeom>
+          <a:solidFill>
+            <a:srgbClr val="1B3A7A"/>
+          </a:solidFill>
+          <a:ln/>
+        </p:spPr>
+      </p:sp>
+      <p:sp>
+        <p:nvSpPr>
+          <p:cNvPr id="6" name="Avatar interno"/>
+          <p:cNvSpPr/>
+          <p:nvPr/>
+        </p:nvSpPr>
+        <p:spPr>
+          <a:xfrm>
+            <a:off x="8732520" y="1965960"/>
+            <a:ext cx="2194560" cy="2194560"/>
+          </a:xfrm>
+          <a:prstGeom prst="roundRect">
+            <a:avLst>
+              <a:gd name="adj" fmla="val 22917"/>
+            </a:avLst>
+          </a:prstGeom>
+          <a:solidFill>
+            <a:schemeClr val="accent1"/>
+          </a:solidFill>
+          <a:ln/>
+        </p:spPr>
+      </p:sp>
+      <p:pic>
+        <p:nvPicPr>
+          <p:cNvPr id="7" name="Image 0" descr="Estoque">    </p:cNvPr>
+          <p:cNvPicPr>
+            <a:picLocks noChangeAspect="1"/>
+          </p:cNvPicPr>
+          <p:nvPr/>
+        </p:nvPicPr>
+        <p:blipFill>
+          <a:blip r:embed="rId2"/>
+          <a:stretch>
+            <a:fillRect/>
+          </a:stretch>
+        </p:blipFill>
+        <p:spPr>
+          <a:xfrm>
+            <a:off x="9281160" y="2514600"/>
+            <a:ext cx="1097280" cy="1097280"/>
+          </a:xfrm>
+          <a:prstGeom prst="rect">
+            <a:avLst/>
+          </a:prstGeom>
+        </p:spPr>
+      </p:pic>
+      <p:sp>
+        <p:nvSpPr>
+          <p:cNvPr id="8" name="Etapa 1"/>
+          <p:cNvSpPr/>
+          <p:nvPr/>
+        </p:nvSpPr>
+        <p:spPr>
+          <a:xfrm>
+            <a:off x="8183880" y="5074920"/>
+            <a:ext cx="548640" cy="109728"/>
+          </a:xfrm>
+          <a:prstGeom prst="roundRect">
+            <a:avLst>
+              <a:gd name="adj" fmla="val 50000"/>
+            </a:avLst>
+          </a:prstGeom>
+          <a:solidFill>
+            <a:srgbClr val="1B3A7A"/>
+          </a:solidFill>
+          <a:ln/>
+        </p:spPr>
+      </p:sp>
+      <p:sp>
+        <p:nvSpPr>
+          <p:cNvPr id="9" name="Etapa 2"/>
+          <p:cNvSpPr/>
+          <p:nvPr/>
+        </p:nvSpPr>
+        <p:spPr>
+          <a:xfrm>
+            <a:off x="8842248" y="5074920"/>
+            <a:ext cx="548640" cy="109728"/>
+          </a:xfrm>
+          <a:prstGeom prst="roundRect">
+            <a:avLst>
+              <a:gd name="adj" fmla="val 50000"/>
+            </a:avLst>
+          </a:prstGeom>
+          <a:solidFill>
+            <a:srgbClr val="1B3A7A"/>
+          </a:solidFill>
+          <a:ln/>
+        </p:spPr>
+      </p:sp>
+      <p:sp>
+        <p:nvSpPr>
+          <p:cNvPr id="10" name="Etapa 3"/>
+          <p:cNvSpPr/>
+          <p:nvPr/>
+        </p:nvSpPr>
+        <p:spPr>
+          <a:xfrm>
+            <a:off x="9500616" y="5074920"/>
+            <a:ext cx="548640" cy="109728"/>
+          </a:xfrm>
+          <a:prstGeom prst="roundRect">
+            <a:avLst>
+              <a:gd name="adj" fmla="val 50000"/>
+            </a:avLst>
+          </a:prstGeom>
+          <a:solidFill>
+            <a:srgbClr val="89D1FF"/>
+          </a:solidFill>
+          <a:ln/>
+        </p:spPr>
+      </p:sp>
+      <p:sp>
+        <p:nvSpPr>
+          <p:cNvPr id="11" name="Etapa 4"/>
+          <p:cNvSpPr/>
+          <p:nvPr/>
+        </p:nvSpPr>
+        <p:spPr>
+          <a:xfrm>
+            <a:off x="10158984" y="5074920"/>
+            <a:ext cx="548640" cy="109728"/>
+          </a:xfrm>
+          <a:prstGeom prst="roundRect">
+            <a:avLst>
+              <a:gd name="adj" fmla="val 50000"/>
+            </a:avLst>
+          </a:prstGeom>
+          <a:solidFill>
+            <a:srgbClr val="1B3A7A"/>
+          </a:solidFill>
+          <a:ln/>
+        </p:spPr>
+      </p:sp>
+      <p:sp>
+        <p:nvSpPr>
+          <p:cNvPr id="12" name="Etapa 5"/>
+          <p:cNvSpPr/>
+          <p:nvPr/>
+        </p:nvSpPr>
+        <p:spPr>
+          <a:xfrm>
+            <a:off x="10817352" y="5074920"/>
+            <a:ext cx="548640" cy="109728"/>
+          </a:xfrm>
+          <a:prstGeom prst="roundRect">
+            <a:avLst>
+              <a:gd name="adj" fmla="val 50000"/>
+            </a:avLst>
+          </a:prstGeom>
+          <a:solidFill>
+            <a:srgbClr val="1B3A7A"/>
+          </a:solidFill>
+          <a:ln/>
+        </p:spPr>
+      </p:sp>
+      <p:sp>
+        <p:nvSpPr>
+          <p:cNvPr id="13" name="Text 10"/>
+          <p:cNvSpPr txBox="1"/>
+          <p:nvPr/>
+        </p:nvSpPr>
+        <p:spPr>
+          <a:xfrm>
+            <a:off x="8183880" y="5303520"/>
+            <a:ext cx="3291840" cy="274320"/>
+          </a:xfrm>
+          <a:prstGeom prst="rect">
+            <a:avLst/>
+          </a:prstGeom>
+          <a:noFill/>
+          <a:ln/>
+        </p:spPr>
+        <p:txBody>
+          <a:bodyPr wrap="square" lIns="0" tIns="0" rIns="0" bIns="0" rtlCol="0" anchor="ctr"/>
+          <a:lstStyle/>
+          <a:p>
+            <a:pPr indent="0" marL="0">
+              <a:buNone/>
+            </a:pPr>
+            <a:r>
+              <a:rPr lang="en-US" sz="1200" dirty="0">
+                <a:solidFill>
+                  <a:srgbClr val="89D1FF"/>
+                </a:solidFill>
+              </a:rPr>
+              <a:t>BO 3 de 5</a:t>
+            </a:r>
+            <a:endParaRPr lang="en-US" sz="1200" dirty="0"/>
+          </a:p>
+        </p:txBody>
+      </p:sp>
+    </p:spTree>
+  </p:cSld>
+  <p:clrMapOvr>
+    <a:masterClrMapping/>
+  </p:clrMapOvr>
+</p:sld>
+</file>
+
+<file path=ppt/slides/slide19.xml><?xml version="1.0" encoding="utf-8"?>
+<p:sld xmlns:a="http://schemas.openxmlformats.org/drawingml/2006/main" xmlns:p="http://schemas.openxmlformats.org/presentationml/2006/main" xmlns:r="http://schemas.openxmlformats.org/officeDocument/2006/relationships">
+  <p:cSld name="Slide 14">
+    <p:spTree>
+      <p:nvGrpSpPr>
+        <p:cNvPr id="1" name=""/>
+        <p:cNvGrpSpPr/>
+        <p:nvPr/>
+      </p:nvGrpSpPr>
+      <p:grpSpPr>
+        <a:xfrm>
+          <a:off x="0" y="0"/>
+          <a:ext cx="0" cy="0"/>
+          <a:chOff x="0" y="0"/>
+          <a:chExt cx="0" cy="0"/>
+        </a:xfrm>
+      </p:grpSpPr>
+      <p:sp>
+        <p:nvSpPr>
+          <p:cNvPr id="2" name="Text 0"/>
+          <p:cNvSpPr/>
+          <p:nvPr>
+            <p:ph idx="100" type="body" hasCustomPrompt="1"/>
+          </p:nvPr>
+        </p:nvSpPr>
+        <p:spPr>
+          <a:xfrm>
+            <a:off x="548640" y="292608"/>
+            <a:ext cx="9144000" cy="292608"/>
+          </a:xfrm>
+          <a:prstGeom prst="rect">
+            <a:avLst/>
+          </a:prstGeom>
+          <a:noFill/>
+          <a:ln/>
+        </p:spPr>
+        <p:txBody>
+          <a:bodyPr wrap="square" lIns="0" tIns="0" rIns="0" bIns="0" rtlCol="0" anchor="ctr"/>
+          <a:lstStyle/>
+          <a:p>
+            <a:pPr algn="l" indent="0" marL="0">
+              <a:buNone/>
+            </a:pPr>
+            <a:r>
+              <a:rPr lang="en-US" sz="1200" b="1" spc="150" kern="0" dirty="0">
+                <a:solidFill>
+                  <a:schemeClr val="accent1"/>
+                </a:solidFill>
+              </a:rPr>
+              <a:t>ESTOQUE · ANÁLISE</a:t>
+            </a:r>
+            <a:endParaRPr lang="en-US" sz="1200" dirty="0"/>
+          </a:p>
+        </p:txBody>
+      </p:sp>
+      <p:sp>
+        <p:nvSpPr>
+          <p:cNvPr id="3" name="Text 0"/>
+          <p:cNvSpPr/>
+          <p:nvPr>
+            <p:ph idx="101" type="title" hasCustomPrompt="1"/>
+          </p:nvPr>
+        </p:nvSpPr>
+        <p:spPr>
+          <a:xfrm>
+            <a:off x="548640" y="603504"/>
+            <a:ext cx="11064240" cy="685800"/>
+          </a:xfrm>
+          <a:prstGeom prst="rect">
+            <a:avLst/>
+          </a:prstGeom>
+          <a:noFill/>
+          <a:ln/>
+        </p:spPr>
+        <p:txBody>
+          <a:bodyPr wrap="square" lIns="0" tIns="0" rIns="0" bIns="0" rtlCol="0" anchor="ctr"/>
+          <a:lstStyle/>
+          <a:p>
+            <a:pPr algn="l" indent="0" marL="0">
+              <a:buNone/>
+            </a:pPr>
+            <a:r>
+              <a:rPr lang="en-US" sz="3200" b="1" dirty="0">
+                <a:solidFill>
+                  <a:schemeClr val="tx1"/>
+                </a:solidFill>
+              </a:rPr>
+              <a:t>O estoque na camada analítica</a:t>
+            </a:r>
+            <a:endParaRPr lang="en-US" sz="3200" dirty="0"/>
+          </a:p>
+        </p:txBody>
+      </p:sp>
+      <p:sp>
+        <p:nvSpPr>
+          <p:cNvPr id="5" name="Cartão"/>
+          <p:cNvSpPr/>
+          <p:nvPr/>
+        </p:nvSpPr>
+        <p:spPr>
+          <a:xfrm>
+            <a:off x="548640" y="1915160"/>
+            <a:ext cx="6400800" cy="3896360"/>
+          </a:xfrm>
+          <a:prstGeom prst="roundRect">
+            <a:avLst>
+              <a:gd name="adj" fmla="val 2816"/>
+            </a:avLst>
+          </a:prstGeom>
+          <a:solidFill>
+            <a:schemeClr val="bg1"/>
+          </a:solidFill>
+          <a:ln w="9525">
+            <a:solidFill>
+              <a:srgbClr val="E5E5E5"/>
+            </a:solidFill>
+            <a:prstDash val="solid"/>
+          </a:ln>
+          <a:effectLst>
+            <a:outerShdw sx="100000" sy="100000" kx="0" ky="0" algn="bl" rotWithShape="0" blurRad="101600" dist="25400" dir="5400000">
+              <a:srgbClr val="223649">
+                <a:alpha val="14000"/>
+              </a:srgbClr>
+            </a:outerShdw>
+          </a:effectLst>
+        </p:spPr>
+      </p:sp>
+      <p:pic>
+        <p:nvPicPr>
+          <p:cNvPr id="6" name="Image 0" descr="Análise de Itens do Estoque">    </p:cNvPr>
+          <p:cNvPicPr>
+            <a:picLocks noChangeAspect="1"/>
+          </p:cNvPicPr>
+          <p:nvPr/>
+        </p:nvPicPr>
+        <p:blipFill>
+          <a:blip r:embed="rId2"/>
+          <a:stretch>
+            <a:fillRect/>
+          </a:stretch>
+        </p:blipFill>
+        <p:spPr>
+          <a:xfrm>
+            <a:off x="640080" y="2006600"/>
+            <a:ext cx="6217920" cy="3713480"/>
+          </a:xfrm>
+          <a:prstGeom prst="rect">
+            <a:avLst/>
+          </a:prstGeom>
+        </p:spPr>
+      </p:pic>
+      <p:sp>
+        <p:nvSpPr>
+          <p:cNvPr id="7" name="Avatar LuSigma"/>
+          <p:cNvSpPr/>
+          <p:nvPr/>
+        </p:nvSpPr>
+        <p:spPr>
+          <a:xfrm>
+            <a:off x="7269480" y="1645920"/>
+            <a:ext cx="457200" cy="457200"/>
+          </a:xfrm>
+          <a:prstGeom prst="roundRect">
+            <a:avLst>
+              <a:gd name="adj" fmla="val 22000"/>
+            </a:avLst>
+          </a:prstGeom>
+          <a:solidFill>
+            <a:srgbClr val="EBF8FF"/>
+          </a:solidFill>
+          <a:ln/>
+        </p:spPr>
+      </p:sp>
+      <p:pic>
+        <p:nvPicPr>
+          <p:cNvPr id="8" name="Image 1" descr="LuSigma">    </p:cNvPr>
+          <p:cNvPicPr>
+            <a:picLocks noChangeAspect="1"/>
+          </p:cNvPicPr>
+          <p:nvPr/>
+        </p:nvPicPr>
+        <p:blipFill>
+          <a:blip r:embed="rId3"/>
+          <a:stretch>
+            <a:fillRect/>
+          </a:stretch>
+        </p:blipFill>
+        <p:spPr>
+          <a:xfrm>
+            <a:off x="7379208" y="1755648"/>
+            <a:ext cx="237744" cy="237744"/>
+          </a:xfrm>
+          <a:prstGeom prst="rect">
+            <a:avLst/>
+          </a:prstGeom>
+        </p:spPr>
+      </p:pic>
+      <p:sp>
+        <p:nvSpPr>
+          <p:cNvPr id="9" name="Text 4"/>
+          <p:cNvSpPr txBox="1"/>
+          <p:nvPr/>
+        </p:nvSpPr>
+        <p:spPr>
+          <a:xfrm>
+            <a:off x="7955280" y="1609344"/>
+            <a:ext cx="3703320" cy="310896"/>
+          </a:xfrm>
+          <a:prstGeom prst="rect">
+            <a:avLst/>
+          </a:prstGeom>
+          <a:noFill/>
+          <a:ln/>
+        </p:spPr>
+        <p:txBody>
+          <a:bodyPr wrap="square" lIns="0" tIns="0" rIns="0" bIns="0" rtlCol="0" anchor="ctr"/>
+          <a:lstStyle/>
+          <a:p>
+            <a:pPr indent="0" marL="0">
+              <a:buNone/>
+            </a:pPr>
+            <a:r>
+              <a:rPr lang="en-US" sz="1500" b="1" dirty="0">
+                <a:solidFill>
+                  <a:schemeClr val="tx1"/>
+                </a:solidFill>
+              </a:rPr>
+              <a:t>Medidas</a:t>
+            </a:r>
+            <a:endParaRPr lang="en-US" sz="1500" dirty="0"/>
+          </a:p>
+        </p:txBody>
+      </p:sp>
+      <p:sp>
+        <p:nvSpPr>
+          <p:cNvPr id="10" name="Text 5"/>
+          <p:cNvSpPr txBox="1"/>
+          <p:nvPr/>
+        </p:nvSpPr>
+        <p:spPr>
+          <a:xfrm>
+            <a:off x="7955280" y="1929384"/>
+            <a:ext cx="3703320" cy="749808"/>
+          </a:xfrm>
+          <a:prstGeom prst="rect">
+            <a:avLst/>
+          </a:prstGeom>
+          <a:noFill/>
+          <a:ln/>
+        </p:spPr>
+        <p:txBody>
+          <a:bodyPr wrap="square" lIns="0" tIns="0" rIns="0" bIns="0" rtlCol="0" anchor="t"/>
+          <a:lstStyle/>
+          <a:p>
+            <a:pPr indent="0" marL="0">
+              <a:buNone/>
+            </a:pPr>
+            <a:r>
+              <a:rPr lang="en-US" sz="1400" dirty="0">
+                <a:solidFill>
+                  <a:srgbClr val="556B82"/>
+                </a:solidFill>
+              </a:rPr>
+              <a:t>qtdeEstoque, qtdeReservada, qtdeDisponivel, valorEstoque e qtdeItens.</a:t>
+            </a:r>
+            <a:endParaRPr lang="en-US" sz="1400" dirty="0"/>
+          </a:p>
+        </p:txBody>
+      </p:sp>
+      <p:sp>
+        <p:nvSpPr>
+          <p:cNvPr id="11" name="Avatar LuCalculator"/>
+          <p:cNvSpPr/>
+          <p:nvPr/>
+        </p:nvSpPr>
+        <p:spPr>
+          <a:xfrm>
+            <a:off x="7269480" y="2743200"/>
+            <a:ext cx="457200" cy="457200"/>
+          </a:xfrm>
+          <a:prstGeom prst="roundRect">
+            <a:avLst>
+              <a:gd name="adj" fmla="val 22000"/>
+            </a:avLst>
+          </a:prstGeom>
+          <a:solidFill>
+            <a:srgbClr val="DAFDF5"/>
+          </a:solidFill>
+          <a:ln/>
+        </p:spPr>
+      </p:sp>
+      <p:pic>
+        <p:nvPicPr>
+          <p:cNvPr id="12" name="Image 2" descr="LuCalculator">    </p:cNvPr>
+          <p:cNvPicPr>
+            <a:picLocks noChangeAspect="1"/>
+          </p:cNvPicPr>
+          <p:nvPr/>
+        </p:nvPicPr>
+        <p:blipFill>
+          <a:blip r:embed="rId4"/>
+          <a:stretch>
+            <a:fillRect/>
+          </a:stretch>
+        </p:blipFill>
+        <p:spPr>
+          <a:xfrm>
+            <a:off x="7379208" y="2852928"/>
+            <a:ext cx="237744" cy="237744"/>
+          </a:xfrm>
+          <a:prstGeom prst="rect">
+            <a:avLst/>
+          </a:prstGeom>
+        </p:spPr>
+      </p:pic>
+      <p:sp>
+        <p:nvSpPr>
+          <p:cNvPr id="13" name="Text 7"/>
+          <p:cNvSpPr txBox="1"/>
+          <p:nvPr/>
+        </p:nvSpPr>
+        <p:spPr>
+          <a:xfrm>
+            <a:off x="7955280" y="2706624"/>
+            <a:ext cx="3703320" cy="310896"/>
+          </a:xfrm>
+          <a:prstGeom prst="rect">
+            <a:avLst/>
+          </a:prstGeom>
+          <a:noFill/>
+          <a:ln/>
+        </p:spPr>
+        <p:txBody>
+          <a:bodyPr wrap="square" lIns="0" tIns="0" rIns="0" bIns="0" rtlCol="0" anchor="ctr"/>
+          <a:lstStyle/>
+          <a:p>
+            <a:pPr indent="0" marL="0">
+              <a:buNone/>
+            </a:pPr>
+            <a:r>
+              <a:rPr lang="en-US" sz="1500" b="1" dirty="0">
+                <a:solidFill>
+                  <a:schemeClr val="tx1"/>
+                </a:solidFill>
+              </a:rPr>
+              <a:t>valorEstoque</a:t>
+            </a:r>
+            <a:endParaRPr lang="en-US" sz="1500" dirty="0"/>
+          </a:p>
+        </p:txBody>
+      </p:sp>
+      <p:sp>
+        <p:nvSpPr>
+          <p:cNvPr id="14" name="Text 8"/>
+          <p:cNvSpPr txBox="1"/>
+          <p:nvPr/>
+        </p:nvSpPr>
+        <p:spPr>
+          <a:xfrm>
+            <a:off x="7955280" y="3026664"/>
+            <a:ext cx="3703320" cy="749808"/>
+          </a:xfrm>
+          <a:prstGeom prst="rect">
+            <a:avLst/>
+          </a:prstGeom>
+          <a:noFill/>
+          <a:ln/>
+        </p:spPr>
+        <p:txBody>
+          <a:bodyPr wrap="square" lIns="0" tIns="0" rIns="0" bIns="0" rtlCol="0" anchor="t"/>
+          <a:lstStyle/>
+          <a:p>
+            <a:pPr indent="0" marL="0">
+              <a:buNone/>
+            </a:pPr>
+            <a:r>
+              <a:rPr lang="en-US" sz="1400" dirty="0">
+                <a:solidFill>
+                  <a:srgbClr val="556B82"/>
+                </a:solidFill>
+              </a:rPr>
+              <a:t>precoUnitario × qtdeEstoque, calculado na view.</a:t>
+            </a:r>
+            <a:endParaRPr lang="en-US" sz="1400" dirty="0"/>
+          </a:p>
+        </p:txBody>
+      </p:sp>
+      <p:sp>
+        <p:nvSpPr>
+          <p:cNvPr id="15" name="Avatar LuChartColumn"/>
+          <p:cNvSpPr/>
+          <p:nvPr/>
+        </p:nvSpPr>
+        <p:spPr>
+          <a:xfrm>
+            <a:off x="7269480" y="3840480"/>
+            <a:ext cx="457200" cy="457200"/>
+          </a:xfrm>
+          <a:prstGeom prst="roundRect">
+            <a:avLst>
+              <a:gd name="adj" fmla="val 22000"/>
+            </a:avLst>
+          </a:prstGeom>
+          <a:solidFill>
+            <a:srgbClr val="F1ECFF"/>
+          </a:solidFill>
+          <a:ln/>
+        </p:spPr>
+      </p:sp>
+      <p:pic>
+        <p:nvPicPr>
+          <p:cNvPr id="16" name="Image 3" descr="LuChartColumn">    </p:cNvPr>
+          <p:cNvPicPr>
+            <a:picLocks noChangeAspect="1"/>
+          </p:cNvPicPr>
+          <p:nvPr/>
+        </p:nvPicPr>
+        <p:blipFill>
+          <a:blip r:embed="rId5"/>
+          <a:stretch>
+            <a:fillRect/>
+          </a:stretch>
+        </p:blipFill>
+        <p:spPr>
+          <a:xfrm>
+            <a:off x="7379208" y="3950208"/>
+            <a:ext cx="237744" cy="237744"/>
+          </a:xfrm>
+          <a:prstGeom prst="rect">
+            <a:avLst/>
+          </a:prstGeom>
+        </p:spPr>
+      </p:pic>
+      <p:sp>
+        <p:nvSpPr>
+          <p:cNvPr id="17" name="Text 10"/>
+          <p:cNvSpPr txBox="1"/>
+          <p:nvPr/>
+        </p:nvSpPr>
+        <p:spPr>
+          <a:xfrm>
+            <a:off x="7955280" y="3803904"/>
+            <a:ext cx="3703320" cy="310896"/>
+          </a:xfrm>
+          <a:prstGeom prst="rect">
+            <a:avLst/>
+          </a:prstGeom>
+          <a:noFill/>
+          <a:ln/>
+        </p:spPr>
+        <p:txBody>
+          <a:bodyPr wrap="square" lIns="0" tIns="0" rIns="0" bIns="0" rtlCol="0" anchor="ctr"/>
+          <a:lstStyle/>
+          <a:p>
+            <a:pPr indent="0" marL="0">
+              <a:buNone/>
+            </a:pPr>
+            <a:r>
+              <a:rPr lang="en-US" sz="1500" b="1" dirty="0">
+                <a:solidFill>
+                  <a:schemeClr val="tx1"/>
+                </a:solidFill>
+              </a:rPr>
+              <a:t>Top 10 reservados</a:t>
+            </a:r>
+            <a:endParaRPr lang="en-US" sz="1500" dirty="0"/>
+          </a:p>
+        </p:txBody>
+      </p:sp>
+      <p:sp>
+        <p:nvSpPr>
+          <p:cNvPr id="18" name="Text 11"/>
+          <p:cNvSpPr txBox="1"/>
+          <p:nvPr/>
+        </p:nvSpPr>
+        <p:spPr>
+          <a:xfrm>
+            <a:off x="7955280" y="4123944"/>
+            <a:ext cx="3703320" cy="749808"/>
+          </a:xfrm>
+          <a:prstGeom prst="rect">
+            <a:avLst/>
+          </a:prstGeom>
+          <a:noFill/>
+          <a:ln/>
+        </p:spPr>
+        <p:txBody>
+          <a:bodyPr wrap="square" lIns="0" tIns="0" rIns="0" bIns="0" rtlCol="0" anchor="t"/>
+          <a:lstStyle/>
+          <a:p>
+            <a:pPr indent="0" marL="0">
+              <a:buNone/>
+            </a:pPr>
+            <a:r>
+              <a:rPr lang="en-US" sz="1400" dirty="0">
+                <a:solidFill>
+                  <a:srgbClr val="556B82"/>
+                </a:solidFill>
+              </a:rPr>
+              <a:t>EstMaisReservados limita a consulta a 10 itens.</a:t>
+            </a:r>
+            <a:endParaRPr lang="en-US" sz="1400" dirty="0"/>
+          </a:p>
+        </p:txBody>
+      </p:sp>
+      <p:sp>
+        <p:nvSpPr>
+          <p:cNvPr id="19" name="Avatar LuArrowRight"/>
+          <p:cNvSpPr/>
+          <p:nvPr/>
+        </p:nvSpPr>
+        <p:spPr>
+          <a:xfrm>
+            <a:off x="7269480" y="4937760"/>
+            <a:ext cx="457200" cy="457200"/>
+          </a:xfrm>
+          <a:prstGeom prst="roundRect">
+            <a:avLst>
+              <a:gd name="adj" fmla="val 22000"/>
+            </a:avLst>
+          </a:prstGeom>
+          <a:solidFill>
+            <a:srgbClr val="FFF3B8"/>
+          </a:solidFill>
+          <a:ln/>
+        </p:spPr>
+      </p:sp>
+      <p:pic>
+        <p:nvPicPr>
+          <p:cNvPr id="20" name="Image 4" descr="LuArrowRight">    </p:cNvPr>
+          <p:cNvPicPr>
+            <a:picLocks noChangeAspect="1"/>
+          </p:cNvPicPr>
+          <p:nvPr/>
+        </p:nvPicPr>
+        <p:blipFill>
+          <a:blip r:embed="rId6"/>
+          <a:stretch>
+            <a:fillRect/>
+          </a:stretch>
+        </p:blipFill>
+        <p:spPr>
+          <a:xfrm>
+            <a:off x="7379208" y="5047488"/>
+            <a:ext cx="237744" cy="237744"/>
+          </a:xfrm>
+          <a:prstGeom prst="rect">
+            <a:avLst/>
+          </a:prstGeom>
+        </p:spPr>
+      </p:pic>
+      <p:sp>
+        <p:nvSpPr>
+          <p:cNvPr id="21" name="Text 13"/>
+          <p:cNvSpPr txBox="1"/>
+          <p:nvPr/>
+        </p:nvSpPr>
+        <p:spPr>
+          <a:xfrm>
+            <a:off x="7955280" y="4901184"/>
+            <a:ext cx="3703320" cy="310896"/>
+          </a:xfrm>
+          <a:prstGeom prst="rect">
+            <a:avLst/>
+          </a:prstGeom>
+          <a:noFill/>
+          <a:ln/>
+        </p:spPr>
+        <p:txBody>
+          <a:bodyPr wrap="square" lIns="0" tIns="0" rIns="0" bIns="0" rtlCol="0" anchor="ctr"/>
+          <a:lstStyle/>
+          <a:p>
+            <a:pPr indent="0" marL="0">
+              <a:buNone/>
+            </a:pPr>
+            <a:r>
+              <a:rPr lang="en-US" sz="1500" b="1" dirty="0">
+                <a:solidFill>
+                  <a:schemeClr val="tx1"/>
+                </a:solidFill>
+              </a:rPr>
+              <a:t>Abrir gestão</a:t>
+            </a:r>
+            <a:endParaRPr lang="en-US" sz="1500" dirty="0"/>
+          </a:p>
+        </p:txBody>
+      </p:sp>
+      <p:sp>
+        <p:nvSpPr>
+          <p:cNvPr id="22" name="Text 14"/>
+          <p:cNvSpPr txBox="1"/>
+          <p:nvPr/>
+        </p:nvSpPr>
+        <p:spPr>
+          <a:xfrm>
+            <a:off x="7955280" y="5221224"/>
+            <a:ext cx="3703320" cy="749808"/>
+          </a:xfrm>
+          <a:prstGeom prst="rect">
+            <a:avLst/>
+          </a:prstGeom>
+          <a:noFill/>
+          <a:ln/>
+        </p:spPr>
+        <p:txBody>
+          <a:bodyPr wrap="square" lIns="0" tIns="0" rIns="0" bIns="0" rtlCol="0" anchor="t"/>
+          <a:lstStyle/>
+          <a:p>
+            <a:pPr indent="0" marL="0">
+              <a:buNone/>
+            </a:pPr>
+            <a:r>
+              <a:rPr lang="en-US" sz="1400" dirty="0">
+                <a:solidFill>
+                  <a:srgbClr val="556B82"/>
+                </a:solidFill>
+              </a:rPr>
+              <a:t>Leva à app Gestão de Estoque.</a:t>
+            </a:r>
+            <a:endParaRPr lang="en-US" sz="1400" dirty="0"/>
+          </a:p>
+        </p:txBody>
+      </p:sp>
+      <p:sp>
+        <p:nvSpPr>
+          <p:cNvPr id="25" name="Slide Number Placeholder 0"/>
+          <p:cNvSpPr>
+            <a:spLocks noGrp="1"/>
+          </p:cNvSpPr>
+          <p:nvPr>
+            <p:ph type="sldNum" sz="quarter" idx="4294967295"/>
+          </p:nvPr>
+        </p:nvSpPr>
+        <p:spPr>
+          <a:xfrm>
+            <a:off x="11155680" y="6419088"/>
+            <a:ext cx="484632" cy="274320"/>
+          </a:xfrm>
+          <a:prstGeom prst="rect">
+            <a:avLst/>
+          </a:prstGeom>
+          <a:extLst>
+            <a:ext uri="{C572A759-6A51-4108-AA02-DFA0A04FC94B}">
+              <ma14:wrappingTextBoxFlag xmlns:ma14="http://schemas.microsoft.com/office/mac/drawingml/2011/main" val="0"/>
+            </a:ext>
+          </a:extLst>
+        </p:spPr>
+        <p:txBody>
+          <a:bodyPr/>
+          <a:lstStyle>
+            <a:lvl1pPr>
+              <a:defRPr sz="1000">
+                <a:solidFill>
+                  <a:srgbClr val="556B82"/>
+                </a:solidFill>
+              </a:defRPr>
+            </a:lvl1pPr>
+          </a:lstStyle>
+          <a:p>
+            <a:pPr algn="r"/>
+            <a:fld id="{F7021451-1387-4CA6-816F-3879F97B5CBC}" type="slidenum">
+              <a:rPr b="0" lang="en-US"/>
+              <a:t>14</a:t>
+            </a:fld>
+            <a:endParaRPr lang="en-US"/>
+          </a:p>
+        </p:txBody>
+      </p:sp>
+    </p:spTree>
+  </p:cSld>
+  <p:clrMapOvr>
+    <a:masterClrMapping/>
+  </p:clrMapOvr>
+</p:sld>
+</file>
+
 <file path=ppt/slides/slide2.xml><?xml version="1.0" encoding="utf-8"?>
 <p:sld xmlns:a="http://schemas.openxmlformats.org/drawingml/2006/main" xmlns:r="http://schemas.openxmlformats.org/officeDocument/2006/relationships" xmlns:p="http://schemas.openxmlformats.org/presentationml/2006/main">
   <p:cSld name="Slide 2">
@@ -15742,6 +17550,3143 @@
             <a:fld id="{F7021451-1387-4CA6-816F-3879F97B5CBC}" type="slidenum">
               <a:rPr b="0" lang="en-US"/>
               <a:t>2</a:t>
+            </a:fld>
+            <a:endParaRPr lang="en-US"/>
+          </a:p>
+        </p:txBody>
+      </p:sp>
+    </p:spTree>
+  </p:cSld>
+  <p:clrMapOvr>
+    <a:masterClrMapping/>
+  </p:clrMapOvr>
+</p:sld>
+</file>
+
+<file path=ppt/slides/slide20.xml><?xml version="1.0" encoding="utf-8"?>
+<p:sld xmlns:a="http://schemas.openxmlformats.org/drawingml/2006/main" xmlns:p="http://schemas.openxmlformats.org/presentationml/2006/main" xmlns:r="http://schemas.openxmlformats.org/officeDocument/2006/relationships">
+  <p:cSld name="Slide 1">
+    <p:spTree>
+      <p:nvGrpSpPr>
+        <p:cNvPr id="1" name=""/>
+        <p:cNvGrpSpPr/>
+        <p:nvPr/>
+      </p:nvGrpSpPr>
+      <p:grpSpPr>
+        <a:xfrm>
+          <a:off x="0" y="0"/>
+          <a:ext cx="0" cy="0"/>
+          <a:chOff x="0" y="0"/>
+          <a:chExt cx="0" cy="0"/>
+        </a:xfrm>
+      </p:grpSpPr>
+      <p:sp>
+        <p:nvSpPr>
+          <p:cNvPr id="2" name="Text 0"/>
+          <p:cNvSpPr/>
+          <p:nvPr>
+            <p:ph idx="100" type="body" hasCustomPrompt="1"/>
+          </p:nvPr>
+        </p:nvSpPr>
+        <p:spPr>
+          <a:xfrm>
+            <a:off x="731520" y="1417320"/>
+            <a:ext cx="5486400" cy="411480"/>
+          </a:xfrm>
+          <a:prstGeom prst="rect">
+            <a:avLst/>
+          </a:prstGeom>
+          <a:noFill/>
+          <a:ln/>
+        </p:spPr>
+        <p:txBody>
+          <a:bodyPr wrap="square" lIns="0" tIns="0" rIns="0" bIns="0" rtlCol="0" anchor="ctr"/>
+          <a:lstStyle/>
+          <a:p>
+            <a:pPr algn="l" indent="0" marL="0">
+              <a:buNone/>
+            </a:pPr>
+            <a:r>
+              <a:rPr lang="en-US" sz="1400" b="1" spc="200" kern="0" dirty="0">
+                <a:solidFill>
+                  <a:srgbClr val="89D1FF"/>
+                </a:solidFill>
+              </a:rPr>
+              <a:t>ETAPA 5 · PEDIDOS</a:t>
+            </a:r>
+            <a:endParaRPr lang="en-US" sz="1400" dirty="0"/>
+          </a:p>
+        </p:txBody>
+      </p:sp>
+      <p:sp>
+        <p:nvSpPr>
+          <p:cNvPr id="3" name="Text 0"/>
+          <p:cNvSpPr/>
+          <p:nvPr>
+            <p:ph idx="101" type="title" hasCustomPrompt="1"/>
+          </p:nvPr>
+        </p:nvSpPr>
+        <p:spPr>
+          <a:xfrm>
+            <a:off x="731520" y="1965960"/>
+            <a:ext cx="6766560" cy="1737360"/>
+          </a:xfrm>
+          <a:prstGeom prst="rect">
+            <a:avLst/>
+          </a:prstGeom>
+          <a:noFill/>
+          <a:ln/>
+        </p:spPr>
+        <p:txBody>
+          <a:bodyPr wrap="square" lIns="0" tIns="0" rIns="0" bIns="0" rtlCol="0" anchor="t"/>
+          <a:lstStyle/>
+          <a:p>
+            <a:pPr algn="l" indent="0" marL="0">
+              <a:buNone/>
+            </a:pPr>
+            <a:r>
+              <a:rPr lang="en-US" sz="4400" b="1" dirty="0">
+                <a:solidFill>
+                  <a:schemeClr val="bg1"/>
+                </a:solidFill>
+              </a:rPr>
+              <a:t>BO Pedidos</a:t>
+            </a:r>
+            <a:endParaRPr lang="en-US" sz="4400" dirty="0"/>
+          </a:p>
+        </p:txBody>
+      </p:sp>
+      <p:sp>
+        <p:nvSpPr>
+          <p:cNvPr id="4" name="Text 0"/>
+          <p:cNvSpPr/>
+          <p:nvPr>
+            <p:ph idx="102" type="body" hasCustomPrompt="1"/>
+          </p:nvPr>
+        </p:nvSpPr>
+        <p:spPr>
+          <a:xfrm>
+            <a:off x="731520" y="3840480"/>
+            <a:ext cx="6400800" cy="1097280"/>
+          </a:xfrm>
+          <a:prstGeom prst="rect">
+            <a:avLst/>
+          </a:prstGeom>
+          <a:noFill/>
+          <a:ln/>
+        </p:spPr>
+        <p:txBody>
+          <a:bodyPr wrap="square" lIns="0" tIns="0" rIns="0" bIns="0" rtlCol="0" anchor="t"/>
+          <a:lstStyle/>
+          <a:p>
+            <a:pPr algn="l" indent="0" marL="0">
+              <a:buNone/>
+            </a:pPr>
+            <a:r>
+              <a:rPr lang="en-US" sz="1800" dirty="0">
+                <a:solidFill>
+                  <a:srgbClr val="D1EFFF"/>
+                </a:solidFill>
+              </a:rPr>
+              <a:t>PedidosAnalise e a Análise de Pedidos de Compras: valor total, pedidos e ticket médio por status, pagamento, UF e mês.</a:t>
+            </a:r>
+            <a:endParaRPr lang="en-US" sz="1800" dirty="0"/>
+          </a:p>
+        </p:txBody>
+      </p:sp>
+      <p:sp>
+        <p:nvSpPr>
+          <p:cNvPr id="5" name="Avatar da etapa"/>
+          <p:cNvSpPr/>
+          <p:nvPr/>
+        </p:nvSpPr>
+        <p:spPr>
+          <a:xfrm>
+            <a:off x="8183880" y="1417320"/>
+            <a:ext cx="3291840" cy="3291840"/>
+          </a:xfrm>
+          <a:prstGeom prst="roundRect">
+            <a:avLst>
+              <a:gd name="adj" fmla="val 22222"/>
+            </a:avLst>
+          </a:prstGeom>
+          <a:solidFill>
+            <a:srgbClr val="1B3A7A"/>
+          </a:solidFill>
+          <a:ln/>
+        </p:spPr>
+      </p:sp>
+      <p:sp>
+        <p:nvSpPr>
+          <p:cNvPr id="6" name="Avatar interno"/>
+          <p:cNvSpPr/>
+          <p:nvPr/>
+        </p:nvSpPr>
+        <p:spPr>
+          <a:xfrm>
+            <a:off x="8732520" y="1965960"/>
+            <a:ext cx="2194560" cy="2194560"/>
+          </a:xfrm>
+          <a:prstGeom prst="roundRect">
+            <a:avLst>
+              <a:gd name="adj" fmla="val 22917"/>
+            </a:avLst>
+          </a:prstGeom>
+          <a:solidFill>
+            <a:schemeClr val="accent1"/>
+          </a:solidFill>
+          <a:ln/>
+        </p:spPr>
+      </p:sp>
+      <p:pic>
+        <p:nvPicPr>
+          <p:cNvPr id="7" name="Image 0" descr="Pedidos">    </p:cNvPr>
+          <p:cNvPicPr>
+            <a:picLocks noChangeAspect="1"/>
+          </p:cNvPicPr>
+          <p:nvPr/>
+        </p:nvPicPr>
+        <p:blipFill>
+          <a:blip r:embed="rId2"/>
+          <a:stretch>
+            <a:fillRect/>
+          </a:stretch>
+        </p:blipFill>
+        <p:spPr>
+          <a:xfrm>
+            <a:off x="9281160" y="2514600"/>
+            <a:ext cx="1097280" cy="1097280"/>
+          </a:xfrm>
+          <a:prstGeom prst="rect">
+            <a:avLst/>
+          </a:prstGeom>
+        </p:spPr>
+      </p:pic>
+      <p:sp>
+        <p:nvSpPr>
+          <p:cNvPr id="8" name="Etapa 1"/>
+          <p:cNvSpPr/>
+          <p:nvPr/>
+        </p:nvSpPr>
+        <p:spPr>
+          <a:xfrm>
+            <a:off x="8183880" y="5074920"/>
+            <a:ext cx="548640" cy="109728"/>
+          </a:xfrm>
+          <a:prstGeom prst="roundRect">
+            <a:avLst>
+              <a:gd name="adj" fmla="val 50000"/>
+            </a:avLst>
+          </a:prstGeom>
+          <a:solidFill>
+            <a:srgbClr val="1B3A7A"/>
+          </a:solidFill>
+          <a:ln/>
+        </p:spPr>
+      </p:sp>
+      <p:sp>
+        <p:nvSpPr>
+          <p:cNvPr id="9" name="Etapa 2"/>
+          <p:cNvSpPr/>
+          <p:nvPr/>
+        </p:nvSpPr>
+        <p:spPr>
+          <a:xfrm>
+            <a:off x="8842248" y="5074920"/>
+            <a:ext cx="548640" cy="109728"/>
+          </a:xfrm>
+          <a:prstGeom prst="roundRect">
+            <a:avLst>
+              <a:gd name="adj" fmla="val 50000"/>
+            </a:avLst>
+          </a:prstGeom>
+          <a:solidFill>
+            <a:srgbClr val="1B3A7A"/>
+          </a:solidFill>
+          <a:ln/>
+        </p:spPr>
+      </p:sp>
+      <p:sp>
+        <p:nvSpPr>
+          <p:cNvPr id="10" name="Etapa 3"/>
+          <p:cNvSpPr/>
+          <p:nvPr/>
+        </p:nvSpPr>
+        <p:spPr>
+          <a:xfrm>
+            <a:off x="9500616" y="5074920"/>
+            <a:ext cx="548640" cy="109728"/>
+          </a:xfrm>
+          <a:prstGeom prst="roundRect">
+            <a:avLst>
+              <a:gd name="adj" fmla="val 50000"/>
+            </a:avLst>
+          </a:prstGeom>
+          <a:solidFill>
+            <a:srgbClr val="1B3A7A"/>
+          </a:solidFill>
+          <a:ln/>
+        </p:spPr>
+      </p:sp>
+      <p:sp>
+        <p:nvSpPr>
+          <p:cNvPr id="11" name="Etapa 4"/>
+          <p:cNvSpPr/>
+          <p:nvPr/>
+        </p:nvSpPr>
+        <p:spPr>
+          <a:xfrm>
+            <a:off x="10158984" y="5074920"/>
+            <a:ext cx="548640" cy="109728"/>
+          </a:xfrm>
+          <a:prstGeom prst="roundRect">
+            <a:avLst>
+              <a:gd name="adj" fmla="val 50000"/>
+            </a:avLst>
+          </a:prstGeom>
+          <a:solidFill>
+            <a:srgbClr val="89D1FF"/>
+          </a:solidFill>
+          <a:ln/>
+        </p:spPr>
+      </p:sp>
+      <p:sp>
+        <p:nvSpPr>
+          <p:cNvPr id="12" name="Etapa 5"/>
+          <p:cNvSpPr/>
+          <p:nvPr/>
+        </p:nvSpPr>
+        <p:spPr>
+          <a:xfrm>
+            <a:off x="10817352" y="5074920"/>
+            <a:ext cx="548640" cy="109728"/>
+          </a:xfrm>
+          <a:prstGeom prst="roundRect">
+            <a:avLst>
+              <a:gd name="adj" fmla="val 50000"/>
+            </a:avLst>
+          </a:prstGeom>
+          <a:solidFill>
+            <a:srgbClr val="1B3A7A"/>
+          </a:solidFill>
+          <a:ln/>
+        </p:spPr>
+      </p:sp>
+      <p:sp>
+        <p:nvSpPr>
+          <p:cNvPr id="13" name="Text 10"/>
+          <p:cNvSpPr txBox="1"/>
+          <p:nvPr/>
+        </p:nvSpPr>
+        <p:spPr>
+          <a:xfrm>
+            <a:off x="8183880" y="5303520"/>
+            <a:ext cx="3291840" cy="274320"/>
+          </a:xfrm>
+          <a:prstGeom prst="rect">
+            <a:avLst/>
+          </a:prstGeom>
+          <a:noFill/>
+          <a:ln/>
+        </p:spPr>
+        <p:txBody>
+          <a:bodyPr wrap="square" lIns="0" tIns="0" rIns="0" bIns="0" rtlCol="0" anchor="ctr"/>
+          <a:lstStyle/>
+          <a:p>
+            <a:pPr indent="0" marL="0">
+              <a:buNone/>
+            </a:pPr>
+            <a:r>
+              <a:rPr lang="en-US" sz="1200" dirty="0">
+                <a:solidFill>
+                  <a:srgbClr val="89D1FF"/>
+                </a:solidFill>
+              </a:rPr>
+              <a:t>BO 4 de 5</a:t>
+            </a:r>
+            <a:endParaRPr lang="en-US" sz="1200" dirty="0"/>
+          </a:p>
+        </p:txBody>
+      </p:sp>
+    </p:spTree>
+  </p:cSld>
+  <p:clrMapOvr>
+    <a:masterClrMapping/>
+  </p:clrMapOvr>
+</p:sld>
+</file>
+
+<file path=ppt/slides/slide21.xml><?xml version="1.0" encoding="utf-8"?>
+<p:sld xmlns:a="http://schemas.openxmlformats.org/drawingml/2006/main" xmlns:p="http://schemas.openxmlformats.org/presentationml/2006/main" xmlns:r="http://schemas.openxmlformats.org/officeDocument/2006/relationships">
+  <p:cSld name="Slide 1">
+    <p:spTree>
+      <p:nvGrpSpPr>
+        <p:cNvPr id="1" name=""/>
+        <p:cNvGrpSpPr/>
+        <p:nvPr/>
+      </p:nvGrpSpPr>
+      <p:grpSpPr>
+        <a:xfrm>
+          <a:off x="0" y="0"/>
+          <a:ext cx="0" cy="0"/>
+          <a:chOff x="0" y="0"/>
+          <a:chExt cx="0" cy="0"/>
+        </a:xfrm>
+      </p:grpSpPr>
+      <p:sp>
+        <p:nvSpPr>
+          <p:cNvPr id="2" name="Text 0"/>
+          <p:cNvSpPr/>
+          <p:nvPr>
+            <p:ph idx="100" type="body" hasCustomPrompt="1"/>
+          </p:nvPr>
+        </p:nvSpPr>
+        <p:spPr>
+          <a:xfrm>
+            <a:off x="731520" y="1417320"/>
+            <a:ext cx="5486400" cy="411480"/>
+          </a:xfrm>
+          <a:prstGeom prst="rect">
+            <a:avLst/>
+          </a:prstGeom>
+          <a:noFill/>
+          <a:ln/>
+        </p:spPr>
+        <p:txBody>
+          <a:bodyPr wrap="square" lIns="0" tIns="0" rIns="0" bIns="0" rtlCol="0" anchor="ctr"/>
+          <a:lstStyle/>
+          <a:p>
+            <a:pPr algn="l" indent="0" marL="0">
+              <a:buNone/>
+            </a:pPr>
+            <a:r>
+              <a:rPr lang="en-US" sz="1400" b="1" spc="200" kern="0" dirty="0">
+                <a:solidFill>
+                  <a:srgbClr val="89D1FF"/>
+                </a:solidFill>
+              </a:rPr>
+              <a:t>ETAPA 5 · REEMBOLSOS</a:t>
+            </a:r>
+            <a:endParaRPr lang="en-US" sz="1400" dirty="0"/>
+          </a:p>
+        </p:txBody>
+      </p:sp>
+      <p:sp>
+        <p:nvSpPr>
+          <p:cNvPr id="3" name="Text 0"/>
+          <p:cNvSpPr/>
+          <p:nvPr>
+            <p:ph idx="101" type="title" hasCustomPrompt="1"/>
+          </p:nvPr>
+        </p:nvSpPr>
+        <p:spPr>
+          <a:xfrm>
+            <a:off x="731520" y="1965960"/>
+            <a:ext cx="6766560" cy="1737360"/>
+          </a:xfrm>
+          <a:prstGeom prst="rect">
+            <a:avLst/>
+          </a:prstGeom>
+          <a:noFill/>
+          <a:ln/>
+        </p:spPr>
+        <p:txBody>
+          <a:bodyPr wrap="square" lIns="0" tIns="0" rIns="0" bIns="0" rtlCol="0" anchor="t"/>
+          <a:lstStyle/>
+          <a:p>
+            <a:pPr algn="l" indent="0" marL="0">
+              <a:buNone/>
+            </a:pPr>
+            <a:r>
+              <a:rPr lang="en-US" sz="4400" b="1" dirty="0">
+                <a:solidFill>
+                  <a:schemeClr val="bg1"/>
+                </a:solidFill>
+              </a:rPr>
+              <a:t>BO Reembolsos</a:t>
+            </a:r>
+            <a:endParaRPr lang="en-US" sz="4400" dirty="0"/>
+          </a:p>
+        </p:txBody>
+      </p:sp>
+      <p:sp>
+        <p:nvSpPr>
+          <p:cNvPr id="4" name="Text 0"/>
+          <p:cNvSpPr/>
+          <p:nvPr>
+            <p:ph idx="102" type="body" hasCustomPrompt="1"/>
+          </p:nvPr>
+        </p:nvSpPr>
+        <p:spPr>
+          <a:xfrm>
+            <a:off x="731520" y="3840480"/>
+            <a:ext cx="6400800" cy="1097280"/>
+          </a:xfrm>
+          <a:prstGeom prst="rect">
+            <a:avLst/>
+          </a:prstGeom>
+          <a:noFill/>
+          <a:ln/>
+        </p:spPr>
+        <p:txBody>
+          <a:bodyPr wrap="square" lIns="0" tIns="0" rIns="0" bIns="0" rtlCol="0" anchor="t"/>
+          <a:lstStyle/>
+          <a:p>
+            <a:pPr algn="l" indent="0" marL="0">
+              <a:buNone/>
+            </a:pPr>
+            <a:r>
+              <a:rPr lang="en-US" sz="1800" dirty="0">
+                <a:solidFill>
+                  <a:srgbClr val="D1EFFF"/>
+                </a:solidFill>
+              </a:rPr>
+              <a:t>ReembolsosAnalise e a Análise de Pedidos de Reembolsos: solicitações e valor por status, UF e mês.</a:t>
+            </a:r>
+            <a:endParaRPr lang="en-US" sz="1800" dirty="0"/>
+          </a:p>
+        </p:txBody>
+      </p:sp>
+      <p:sp>
+        <p:nvSpPr>
+          <p:cNvPr id="5" name="Avatar da etapa"/>
+          <p:cNvSpPr/>
+          <p:nvPr/>
+        </p:nvSpPr>
+        <p:spPr>
+          <a:xfrm>
+            <a:off x="8183880" y="1417320"/>
+            <a:ext cx="3291840" cy="3291840"/>
+          </a:xfrm>
+          <a:prstGeom prst="roundRect">
+            <a:avLst>
+              <a:gd name="adj" fmla="val 22222"/>
+            </a:avLst>
+          </a:prstGeom>
+          <a:solidFill>
+            <a:srgbClr val="1B3A7A"/>
+          </a:solidFill>
+          <a:ln/>
+        </p:spPr>
+      </p:sp>
+      <p:sp>
+        <p:nvSpPr>
+          <p:cNvPr id="6" name="Avatar interno"/>
+          <p:cNvSpPr/>
+          <p:nvPr/>
+        </p:nvSpPr>
+        <p:spPr>
+          <a:xfrm>
+            <a:off x="8732520" y="1965960"/>
+            <a:ext cx="2194560" cy="2194560"/>
+          </a:xfrm>
+          <a:prstGeom prst="roundRect">
+            <a:avLst>
+              <a:gd name="adj" fmla="val 22917"/>
+            </a:avLst>
+          </a:prstGeom>
+          <a:solidFill>
+            <a:schemeClr val="accent1"/>
+          </a:solidFill>
+          <a:ln/>
+        </p:spPr>
+      </p:sp>
+      <p:pic>
+        <p:nvPicPr>
+          <p:cNvPr id="7" name="Image 0" descr="Reembolsos">    </p:cNvPr>
+          <p:cNvPicPr>
+            <a:picLocks noChangeAspect="1"/>
+          </p:cNvPicPr>
+          <p:nvPr/>
+        </p:nvPicPr>
+        <p:blipFill>
+          <a:blip r:embed="rId2"/>
+          <a:stretch>
+            <a:fillRect/>
+          </a:stretch>
+        </p:blipFill>
+        <p:spPr>
+          <a:xfrm>
+            <a:off x="9281160" y="2514600"/>
+            <a:ext cx="1097280" cy="1097280"/>
+          </a:xfrm>
+          <a:prstGeom prst="rect">
+            <a:avLst/>
+          </a:prstGeom>
+        </p:spPr>
+      </p:pic>
+      <p:sp>
+        <p:nvSpPr>
+          <p:cNvPr id="8" name="Etapa 1"/>
+          <p:cNvSpPr/>
+          <p:nvPr/>
+        </p:nvSpPr>
+        <p:spPr>
+          <a:xfrm>
+            <a:off x="8183880" y="5074920"/>
+            <a:ext cx="548640" cy="109728"/>
+          </a:xfrm>
+          <a:prstGeom prst="roundRect">
+            <a:avLst>
+              <a:gd name="adj" fmla="val 50000"/>
+            </a:avLst>
+          </a:prstGeom>
+          <a:solidFill>
+            <a:srgbClr val="1B3A7A"/>
+          </a:solidFill>
+          <a:ln/>
+        </p:spPr>
+      </p:sp>
+      <p:sp>
+        <p:nvSpPr>
+          <p:cNvPr id="9" name="Etapa 2"/>
+          <p:cNvSpPr/>
+          <p:nvPr/>
+        </p:nvSpPr>
+        <p:spPr>
+          <a:xfrm>
+            <a:off x="8842248" y="5074920"/>
+            <a:ext cx="548640" cy="109728"/>
+          </a:xfrm>
+          <a:prstGeom prst="roundRect">
+            <a:avLst>
+              <a:gd name="adj" fmla="val 50000"/>
+            </a:avLst>
+          </a:prstGeom>
+          <a:solidFill>
+            <a:srgbClr val="1B3A7A"/>
+          </a:solidFill>
+          <a:ln/>
+        </p:spPr>
+      </p:sp>
+      <p:sp>
+        <p:nvSpPr>
+          <p:cNvPr id="10" name="Etapa 3"/>
+          <p:cNvSpPr/>
+          <p:nvPr/>
+        </p:nvSpPr>
+        <p:spPr>
+          <a:xfrm>
+            <a:off x="9500616" y="5074920"/>
+            <a:ext cx="548640" cy="109728"/>
+          </a:xfrm>
+          <a:prstGeom prst="roundRect">
+            <a:avLst>
+              <a:gd name="adj" fmla="val 50000"/>
+            </a:avLst>
+          </a:prstGeom>
+          <a:solidFill>
+            <a:srgbClr val="1B3A7A"/>
+          </a:solidFill>
+          <a:ln/>
+        </p:spPr>
+      </p:sp>
+      <p:sp>
+        <p:nvSpPr>
+          <p:cNvPr id="11" name="Etapa 4"/>
+          <p:cNvSpPr/>
+          <p:nvPr/>
+        </p:nvSpPr>
+        <p:spPr>
+          <a:xfrm>
+            <a:off x="10158984" y="5074920"/>
+            <a:ext cx="548640" cy="109728"/>
+          </a:xfrm>
+          <a:prstGeom prst="roundRect">
+            <a:avLst>
+              <a:gd name="adj" fmla="val 50000"/>
+            </a:avLst>
+          </a:prstGeom>
+          <a:solidFill>
+            <a:srgbClr val="1B3A7A"/>
+          </a:solidFill>
+          <a:ln/>
+        </p:spPr>
+      </p:sp>
+      <p:sp>
+        <p:nvSpPr>
+          <p:cNvPr id="12" name="Etapa 5"/>
+          <p:cNvSpPr/>
+          <p:nvPr/>
+        </p:nvSpPr>
+        <p:spPr>
+          <a:xfrm>
+            <a:off x="10817352" y="5074920"/>
+            <a:ext cx="548640" cy="109728"/>
+          </a:xfrm>
+          <a:prstGeom prst="roundRect">
+            <a:avLst>
+              <a:gd name="adj" fmla="val 50000"/>
+            </a:avLst>
+          </a:prstGeom>
+          <a:solidFill>
+            <a:srgbClr val="89D1FF"/>
+          </a:solidFill>
+          <a:ln/>
+        </p:spPr>
+      </p:sp>
+      <p:sp>
+        <p:nvSpPr>
+          <p:cNvPr id="13" name="Text 10"/>
+          <p:cNvSpPr txBox="1"/>
+          <p:nvPr/>
+        </p:nvSpPr>
+        <p:spPr>
+          <a:xfrm>
+            <a:off x="8183880" y="5303520"/>
+            <a:ext cx="3291840" cy="274320"/>
+          </a:xfrm>
+          <a:prstGeom prst="rect">
+            <a:avLst/>
+          </a:prstGeom>
+          <a:noFill/>
+          <a:ln/>
+        </p:spPr>
+        <p:txBody>
+          <a:bodyPr wrap="square" lIns="0" tIns="0" rIns="0" bIns="0" rtlCol="0" anchor="ctr"/>
+          <a:lstStyle/>
+          <a:p>
+            <a:pPr indent="0" marL="0">
+              <a:buNone/>
+            </a:pPr>
+            <a:r>
+              <a:rPr lang="en-US" sz="1200" dirty="0">
+                <a:solidFill>
+                  <a:srgbClr val="89D1FF"/>
+                </a:solidFill>
+              </a:rPr>
+              <a:t>BO 5 de 5</a:t>
+            </a:r>
+            <a:endParaRPr lang="en-US" sz="1200" dirty="0"/>
+          </a:p>
+        </p:txBody>
+      </p:sp>
+    </p:spTree>
+  </p:cSld>
+  <p:clrMapOvr>
+    <a:masterClrMapping/>
+  </p:clrMapOvr>
+</p:sld>
+</file>
+
+<file path=ppt/slides/slide22.xml><?xml version="1.0" encoding="utf-8"?>
+<p:sld xmlns:a="http://schemas.openxmlformats.org/drawingml/2006/main" xmlns:p="http://schemas.openxmlformats.org/presentationml/2006/main" xmlns:r="http://schemas.openxmlformats.org/officeDocument/2006/relationships">
+  <p:cSld name="Slide 13">
+    <p:spTree>
+      <p:nvGrpSpPr>
+        <p:cNvPr id="1" name=""/>
+        <p:cNvGrpSpPr/>
+        <p:nvPr/>
+      </p:nvGrpSpPr>
+      <p:grpSpPr>
+        <a:xfrm>
+          <a:off x="0" y="0"/>
+          <a:ext cx="0" cy="0"/>
+          <a:chOff x="0" y="0"/>
+          <a:chExt cx="0" cy="0"/>
+        </a:xfrm>
+      </p:grpSpPr>
+      <p:sp>
+        <p:nvSpPr>
+          <p:cNvPr id="2" name="Text 0"/>
+          <p:cNvSpPr/>
+          <p:nvPr>
+            <p:ph idx="100" type="body" hasCustomPrompt="1"/>
+          </p:nvPr>
+        </p:nvSpPr>
+        <p:spPr>
+          <a:xfrm>
+            <a:off x="548640" y="292608"/>
+            <a:ext cx="9144000" cy="292608"/>
+          </a:xfrm>
+          <a:prstGeom prst="rect">
+            <a:avLst/>
+          </a:prstGeom>
+          <a:noFill/>
+          <a:ln/>
+        </p:spPr>
+        <p:txBody>
+          <a:bodyPr wrap="square" lIns="0" tIns="0" rIns="0" bIns="0" rtlCol="0" anchor="ctr"/>
+          <a:lstStyle/>
+          <a:p>
+            <a:pPr algn="l" indent="0" marL="0">
+              <a:buNone/>
+            </a:pPr>
+            <a:r>
+              <a:rPr lang="en-US" sz="1200" b="1" spc="150" kern="0" dirty="0">
+                <a:solidFill>
+                  <a:schemeClr val="accent1"/>
+                </a:solidFill>
+              </a:rPr>
+              <a:t>REEMBOLSOS · ANÁLISE</a:t>
+            </a:r>
+            <a:endParaRPr lang="en-US" sz="1200" dirty="0"/>
+          </a:p>
+        </p:txBody>
+      </p:sp>
+      <p:sp>
+        <p:nvSpPr>
+          <p:cNvPr id="3" name="Text 0"/>
+          <p:cNvSpPr/>
+          <p:nvPr>
+            <p:ph idx="101" type="title" hasCustomPrompt="1"/>
+          </p:nvPr>
+        </p:nvSpPr>
+        <p:spPr>
+          <a:xfrm>
+            <a:off x="548640" y="603504"/>
+            <a:ext cx="11064240" cy="685800"/>
+          </a:xfrm>
+          <a:prstGeom prst="rect">
+            <a:avLst/>
+          </a:prstGeom>
+          <a:noFill/>
+          <a:ln/>
+        </p:spPr>
+        <p:txBody>
+          <a:bodyPr wrap="square" lIns="0" tIns="0" rIns="0" bIns="0" rtlCol="0" anchor="ctr"/>
+          <a:lstStyle/>
+          <a:p>
+            <a:pPr algn="l" indent="0" marL="0">
+              <a:buNone/>
+            </a:pPr>
+            <a:r>
+              <a:rPr lang="en-US" sz="3200" b="1" dirty="0">
+                <a:solidFill>
+                  <a:schemeClr val="tx1"/>
+                </a:solidFill>
+              </a:rPr>
+              <a:t>ReembolsosAnalise e a app de análise</a:t>
+            </a:r>
+            <a:endParaRPr lang="en-US" sz="3200" dirty="0"/>
+          </a:p>
+        </p:txBody>
+      </p:sp>
+      <p:sp>
+        <p:nvSpPr>
+          <p:cNvPr id="5" name="Bloco de código"/>
+          <p:cNvSpPr/>
+          <p:nvPr/>
+        </p:nvSpPr>
+        <p:spPr>
+          <a:xfrm>
+            <a:off x="548640" y="1554480"/>
+            <a:ext cx="6035040" cy="3002280"/>
+          </a:xfrm>
+          <a:prstGeom prst="roundRect">
+            <a:avLst>
+              <a:gd name="adj" fmla="val 3655"/>
+            </a:avLst>
+          </a:prstGeom>
+          <a:solidFill>
+            <a:srgbClr val="1F1F1F"/>
+          </a:solidFill>
+          <a:ln w="9525">
+            <a:solidFill>
+              <a:srgbClr val="2B2B2B"/>
+            </a:solidFill>
+            <a:prstDash val="solid"/>
+          </a:ln>
+          <a:effectLst>
+            <a:outerShdw sx="100000" sy="100000" kx="0" ky="0" algn="bl" rotWithShape="0" blurRad="101600" dist="25400" dir="5400000">
+              <a:srgbClr val="223649">
+                <a:alpha val="18000"/>
+              </a:srgbClr>
+            </a:outerShdw>
+          </a:effectLst>
+        </p:spPr>
+      </p:sp>
+      <p:sp>
+        <p:nvSpPr>
+          <p:cNvPr id="6" name="Código"/>
+          <p:cNvSpPr txBox="1"/>
+          <p:nvPr/>
+        </p:nvSpPr>
+        <p:spPr>
+          <a:xfrm>
+            <a:off x="777240" y="1737360"/>
+            <a:ext cx="5577840" cy="2636520"/>
+          </a:xfrm>
+          <a:prstGeom prst="rect">
+            <a:avLst/>
+          </a:prstGeom>
+          <a:noFill/>
+          <a:ln/>
+        </p:spPr>
+        <p:txBody>
+          <a:bodyPr wrap="square" lIns="0" tIns="0" rIns="0" bIns="0" rtlCol="0" anchor="t"/>
+          <a:lstStyle/>
+          <a:p>
+            <a:pPr indent="0" marL="0">
+              <a:buNone/>
+            </a:pPr>
+            <a:r>
+              <a:rPr lang="en-US" sz="1000" dirty="0">
+                <a:solidFill>
+                  <a:srgbClr val="DCDCAA"/>
+                </a:solidFill>
+                <a:latin typeface="Courier New" pitchFamily="34" charset="0"/>
+                <a:ea typeface="Courier New" pitchFamily="34" charset="-122"/>
+                <a:cs typeface="Courier New" pitchFamily="34" charset="-120"/>
+              </a:rPr>
+              <a:t>@Aggregation.CustomAggregate</a:t>
+            </a:r>
+            <a:pPr indent="0" marL="0">
+              <a:buNone/>
+            </a:pPr>
+            <a:r>
+              <a:rPr lang="en-US" sz="1000" dirty="0">
+                <a:solidFill>
+                  <a:srgbClr val="CCCCCC"/>
+                </a:solidFill>
+                <a:latin typeface="Courier New" pitchFamily="34" charset="0"/>
+                <a:ea typeface="Courier New" pitchFamily="34" charset="-122"/>
+                <a:cs typeface="Courier New" pitchFamily="34" charset="-120"/>
+              </a:rPr>
+              <a:t> </a:t>
+            </a:r>
+            <a:pPr indent="0" marL="0">
+              <a:buNone/>
+            </a:pPr>
+            <a:r>
+              <a:rPr lang="en-US" sz="1000" dirty="0">
+                <a:solidFill>
+                  <a:srgbClr val="4FC1FF"/>
+                </a:solidFill>
+                <a:latin typeface="Courier New" pitchFamily="34" charset="0"/>
+                <a:ea typeface="Courier New" pitchFamily="34" charset="-122"/>
+                <a:cs typeface="Courier New" pitchFamily="34" charset="-120"/>
+              </a:rPr>
+              <a:t>#valorReembolso</a:t>
+            </a:r>
+            <a:pPr indent="0" marL="0">
+              <a:buNone/>
+            </a:pPr>
+            <a:r>
+              <a:rPr lang="en-US" sz="1000" dirty="0">
+                <a:solidFill>
+                  <a:srgbClr val="CCCCCC"/>
+                </a:solidFill>
+                <a:latin typeface="Courier New" pitchFamily="34" charset="0"/>
+                <a:ea typeface="Courier New" pitchFamily="34" charset="-122"/>
+                <a:cs typeface="Courier New" pitchFamily="34" charset="-120"/>
+              </a:rPr>
+              <a:t>: </a:t>
+            </a:r>
+            <a:pPr indent="0" marL="0">
+              <a:buNone/>
+            </a:pPr>
+            <a:r>
+              <a:rPr lang="en-US" sz="1000" dirty="0">
+                <a:solidFill>
+                  <a:srgbClr val="CE9178"/>
+                </a:solidFill>
+                <a:latin typeface="Courier New" pitchFamily="34" charset="0"/>
+                <a:ea typeface="Courier New" pitchFamily="34" charset="-122"/>
+                <a:cs typeface="Courier New" pitchFamily="34" charset="-120"/>
+              </a:rPr>
+              <a:t>'Edm.Decimal'</a:t>
+            </a:r>
+            <a:endParaRPr lang="en-US" sz="1000" dirty="0"/>
+          </a:p>
+          <a:p>
+            <a:pPr indent="0" marL="0">
+              <a:buNone/>
+            </a:pPr>
+            <a:r>
+              <a:rPr lang="en-US" sz="1000" dirty="0">
+                <a:solidFill>
+                  <a:srgbClr val="DCDCAA"/>
+                </a:solidFill>
+                <a:latin typeface="Courier New" pitchFamily="34" charset="0"/>
+                <a:ea typeface="Courier New" pitchFamily="34" charset="-122"/>
+                <a:cs typeface="Courier New" pitchFamily="34" charset="-120"/>
+              </a:rPr>
+              <a:t>@Aggregation.CustomAggregate</a:t>
+            </a:r>
+            <a:pPr indent="0" marL="0">
+              <a:buNone/>
+            </a:pPr>
+            <a:r>
+              <a:rPr lang="en-US" sz="1000" dirty="0">
+                <a:solidFill>
+                  <a:srgbClr val="CCCCCC"/>
+                </a:solidFill>
+                <a:latin typeface="Courier New" pitchFamily="34" charset="0"/>
+                <a:ea typeface="Courier New" pitchFamily="34" charset="-122"/>
+                <a:cs typeface="Courier New" pitchFamily="34" charset="-120"/>
+              </a:rPr>
+              <a:t> </a:t>
+            </a:r>
+            <a:pPr indent="0" marL="0">
+              <a:buNone/>
+            </a:pPr>
+            <a:r>
+              <a:rPr lang="en-US" sz="1000" dirty="0">
+                <a:solidFill>
+                  <a:srgbClr val="4FC1FF"/>
+                </a:solidFill>
+                <a:latin typeface="Courier New" pitchFamily="34" charset="0"/>
+                <a:ea typeface="Courier New" pitchFamily="34" charset="-122"/>
+                <a:cs typeface="Courier New" pitchFamily="34" charset="-120"/>
+              </a:rPr>
+              <a:t>#qtdeReembolsos</a:t>
+            </a:r>
+            <a:pPr indent="0" marL="0">
+              <a:buNone/>
+            </a:pPr>
+            <a:r>
+              <a:rPr lang="en-US" sz="1000" dirty="0">
+                <a:solidFill>
+                  <a:srgbClr val="CCCCCC"/>
+                </a:solidFill>
+                <a:latin typeface="Courier New" pitchFamily="34" charset="0"/>
+                <a:ea typeface="Courier New" pitchFamily="34" charset="-122"/>
+                <a:cs typeface="Courier New" pitchFamily="34" charset="-120"/>
+              </a:rPr>
+              <a:t>: </a:t>
+            </a:r>
+            <a:pPr indent="0" marL="0">
+              <a:buNone/>
+            </a:pPr>
+            <a:r>
+              <a:rPr lang="en-US" sz="1000" dirty="0">
+                <a:solidFill>
+                  <a:srgbClr val="CE9178"/>
+                </a:solidFill>
+                <a:latin typeface="Courier New" pitchFamily="34" charset="0"/>
+                <a:ea typeface="Courier New" pitchFamily="34" charset="-122"/>
+                <a:cs typeface="Courier New" pitchFamily="34" charset="-120"/>
+              </a:rPr>
+              <a:t>'Edm.Int32'</a:t>
+            </a:r>
+            <a:endParaRPr lang="en-US" sz="1000" dirty="0"/>
+          </a:p>
+          <a:p>
+            <a:pPr indent="0" marL="0">
+              <a:buNone/>
+            </a:pPr>
+            <a:r>
+              <a:rPr lang="en-US" sz="1000" dirty="0">
+                <a:solidFill>
+                  <a:srgbClr val="DCDCAA"/>
+                </a:solidFill>
+                <a:latin typeface="Courier New" pitchFamily="34" charset="0"/>
+                <a:ea typeface="Courier New" pitchFamily="34" charset="-122"/>
+                <a:cs typeface="Courier New" pitchFamily="34" charset="-120"/>
+              </a:rPr>
+              <a:t>@readonly</a:t>
+            </a:r>
+            <a:endParaRPr lang="en-US" sz="1000" dirty="0"/>
+          </a:p>
+          <a:p>
+            <a:pPr indent="0" marL="0">
+              <a:buNone/>
+            </a:pPr>
+            <a:r>
+              <a:rPr lang="en-US" sz="1000" dirty="0">
+                <a:solidFill>
+                  <a:srgbClr val="569CD6"/>
+                </a:solidFill>
+                <a:latin typeface="Courier New" pitchFamily="34" charset="0"/>
+                <a:ea typeface="Courier New" pitchFamily="34" charset="-122"/>
+                <a:cs typeface="Courier New" pitchFamily="34" charset="-120"/>
+              </a:rPr>
+              <a:t>entity</a:t>
+            </a:r>
+            <a:pPr indent="0" marL="0">
+              <a:buNone/>
+            </a:pPr>
+            <a:r>
+              <a:rPr lang="en-US" sz="1000" dirty="0">
+                <a:solidFill>
+                  <a:srgbClr val="CCCCCC"/>
+                </a:solidFill>
+                <a:latin typeface="Courier New" pitchFamily="34" charset="0"/>
+                <a:ea typeface="Courier New" pitchFamily="34" charset="-122"/>
+                <a:cs typeface="Courier New" pitchFamily="34" charset="-120"/>
+              </a:rPr>
+              <a:t> </a:t>
+            </a:r>
+            <a:pPr indent="0" marL="0">
+              <a:buNone/>
+            </a:pPr>
+            <a:r>
+              <a:rPr lang="en-US" sz="1000" dirty="0">
+                <a:solidFill>
+                  <a:srgbClr val="4EC9B0"/>
+                </a:solidFill>
+                <a:latin typeface="Courier New" pitchFamily="34" charset="0"/>
+                <a:ea typeface="Courier New" pitchFamily="34" charset="-122"/>
+                <a:cs typeface="Courier New" pitchFamily="34" charset="-120"/>
+              </a:rPr>
+              <a:t>ReembolsosAnalise</a:t>
+            </a:r>
+            <a:pPr indent="0" marL="0">
+              <a:buNone/>
+            </a:pPr>
+            <a:r>
+              <a:rPr lang="en-US" sz="1000" dirty="0">
+                <a:solidFill>
+                  <a:srgbClr val="CCCCCC"/>
+                </a:solidFill>
+                <a:latin typeface="Courier New" pitchFamily="34" charset="0"/>
+                <a:ea typeface="Courier New" pitchFamily="34" charset="-122"/>
+                <a:cs typeface="Courier New" pitchFamily="34" charset="-120"/>
+              </a:rPr>
+              <a:t> </a:t>
+            </a:r>
+            <a:pPr indent="0" marL="0">
+              <a:buNone/>
+            </a:pPr>
+            <a:r>
+              <a:rPr lang="en-US" sz="1000" dirty="0">
+                <a:solidFill>
+                  <a:srgbClr val="569CD6"/>
+                </a:solidFill>
+                <a:latin typeface="Courier New" pitchFamily="34" charset="0"/>
+                <a:ea typeface="Courier New" pitchFamily="34" charset="-122"/>
+                <a:cs typeface="Courier New" pitchFamily="34" charset="-120"/>
+              </a:rPr>
+              <a:t>as</a:t>
+            </a:r>
+            <a:pPr indent="0" marL="0">
+              <a:buNone/>
+            </a:pPr>
+            <a:r>
+              <a:rPr lang="en-US" sz="1000" dirty="0">
+                <a:solidFill>
+                  <a:srgbClr val="CCCCCC"/>
+                </a:solidFill>
+                <a:latin typeface="Courier New" pitchFamily="34" charset="0"/>
+                <a:ea typeface="Courier New" pitchFamily="34" charset="-122"/>
+                <a:cs typeface="Courier New" pitchFamily="34" charset="-120"/>
+              </a:rPr>
+              <a:t> </a:t>
+            </a:r>
+            <a:pPr indent="0" marL="0">
+              <a:buNone/>
+            </a:pPr>
+            <a:r>
+              <a:rPr lang="en-US" sz="1000" dirty="0">
+                <a:solidFill>
+                  <a:srgbClr val="569CD6"/>
+                </a:solidFill>
+                <a:latin typeface="Courier New" pitchFamily="34" charset="0"/>
+                <a:ea typeface="Courier New" pitchFamily="34" charset="-122"/>
+                <a:cs typeface="Courier New" pitchFamily="34" charset="-120"/>
+              </a:rPr>
+              <a:t>select</a:t>
+            </a:r>
+            <a:pPr indent="0" marL="0">
+              <a:buNone/>
+            </a:pPr>
+            <a:r>
+              <a:rPr lang="en-US" sz="1000" dirty="0">
+                <a:solidFill>
+                  <a:srgbClr val="CCCCCC"/>
+                </a:solidFill>
+                <a:latin typeface="Courier New" pitchFamily="34" charset="0"/>
+                <a:ea typeface="Courier New" pitchFamily="34" charset="-122"/>
+                <a:cs typeface="Courier New" pitchFamily="34" charset="-120"/>
+              </a:rPr>
+              <a:t> </a:t>
+            </a:r>
+            <a:pPr indent="0" marL="0">
+              <a:buNone/>
+            </a:pPr>
+            <a:r>
+              <a:rPr lang="en-US" sz="1000" dirty="0">
+                <a:solidFill>
+                  <a:srgbClr val="C586C0"/>
+                </a:solidFill>
+                <a:latin typeface="Courier New" pitchFamily="34" charset="0"/>
+                <a:ea typeface="Courier New" pitchFamily="34" charset="-122"/>
+                <a:cs typeface="Courier New" pitchFamily="34" charset="-120"/>
+              </a:rPr>
+              <a:t>from</a:t>
+            </a:r>
+            <a:pPr indent="0" marL="0">
+              <a:buNone/>
+            </a:pPr>
+            <a:r>
+              <a:rPr lang="en-US" sz="1000" dirty="0">
+                <a:solidFill>
+                  <a:srgbClr val="CCCCCC"/>
+                </a:solidFill>
+                <a:latin typeface="Courier New" pitchFamily="34" charset="0"/>
+                <a:ea typeface="Courier New" pitchFamily="34" charset="-122"/>
+                <a:cs typeface="Courier New" pitchFamily="34" charset="-120"/>
+              </a:rPr>
+              <a:t> </a:t>
+            </a:r>
+            <a:pPr indent="0" marL="0">
+              <a:buNone/>
+            </a:pPr>
+            <a:r>
+              <a:rPr lang="en-US" sz="1000" dirty="0">
+                <a:solidFill>
+                  <a:srgbClr val="9CDCFE"/>
+                </a:solidFill>
+                <a:latin typeface="Courier New" pitchFamily="34" charset="0"/>
+                <a:ea typeface="Courier New" pitchFamily="34" charset="-122"/>
+                <a:cs typeface="Courier New" pitchFamily="34" charset="-120"/>
+              </a:rPr>
+              <a:t>db</a:t>
+            </a:r>
+            <a:pPr indent="0" marL="0">
+              <a:buNone/>
+            </a:pPr>
+            <a:r>
+              <a:rPr lang="en-US" sz="1000" dirty="0">
+                <a:solidFill>
+                  <a:srgbClr val="CCCCCC"/>
+                </a:solidFill>
+                <a:latin typeface="Courier New" pitchFamily="34" charset="0"/>
+                <a:ea typeface="Courier New" pitchFamily="34" charset="-122"/>
+                <a:cs typeface="Courier New" pitchFamily="34" charset="-120"/>
+              </a:rPr>
+              <a:t>.</a:t>
+            </a:r>
+            <a:pPr indent="0" marL="0">
+              <a:buNone/>
+            </a:pPr>
+            <a:r>
+              <a:rPr lang="en-US" sz="1000" dirty="0">
+                <a:solidFill>
+                  <a:srgbClr val="4EC9B0"/>
+                </a:solidFill>
+                <a:latin typeface="Courier New" pitchFamily="34" charset="0"/>
+                <a:ea typeface="Courier New" pitchFamily="34" charset="-122"/>
+                <a:cs typeface="Courier New" pitchFamily="34" charset="-120"/>
+              </a:rPr>
+              <a:t>Reembolsos</a:t>
+            </a:r>
+            <a:pPr indent="0" marL="0">
+              <a:buNone/>
+            </a:pPr>
+            <a:r>
+              <a:rPr lang="en-US" sz="1000" dirty="0">
+                <a:solidFill>
+                  <a:srgbClr val="CCCCCC"/>
+                </a:solidFill>
+                <a:latin typeface="Courier New" pitchFamily="34" charset="0"/>
+                <a:ea typeface="Courier New" pitchFamily="34" charset="-122"/>
+                <a:cs typeface="Courier New" pitchFamily="34" charset="-120"/>
+              </a:rPr>
+              <a:t> </a:t>
+            </a:r>
+            <a:pPr indent="0" marL="0">
+              <a:buNone/>
+            </a:pPr>
+            <a:r>
+              <a:rPr lang="en-US" sz="1000" dirty="0">
+                <a:solidFill>
+                  <a:srgbClr val="FFD700"/>
+                </a:solidFill>
+                <a:latin typeface="Courier New" pitchFamily="34" charset="0"/>
+                <a:ea typeface="Courier New" pitchFamily="34" charset="-122"/>
+                <a:cs typeface="Courier New" pitchFamily="34" charset="-120"/>
+              </a:rPr>
+              <a:t>{</a:t>
+            </a:r>
+            <a:endParaRPr lang="en-US" sz="1000" dirty="0"/>
+          </a:p>
+          <a:p>
+            <a:pPr indent="0" marL="0">
+              <a:buNone/>
+            </a:pPr>
+            <a:r>
+              <a:rPr lang="en-US" sz="1000" dirty="0">
+                <a:solidFill>
+                  <a:srgbClr val="CCCCCC"/>
+                </a:solidFill>
+                <a:latin typeface="Courier New" pitchFamily="34" charset="0"/>
+                <a:ea typeface="Courier New" pitchFamily="34" charset="-122"/>
+                <a:cs typeface="Courier New" pitchFamily="34" charset="-120"/>
+              </a:rPr>
+              <a:t>  </a:t>
+            </a:r>
+            <a:pPr indent="0" marL="0">
+              <a:buNone/>
+            </a:pPr>
+            <a:r>
+              <a:rPr lang="en-US" sz="1000" dirty="0">
+                <a:solidFill>
+                  <a:srgbClr val="569CD6"/>
+                </a:solidFill>
+                <a:latin typeface="Courier New" pitchFamily="34" charset="0"/>
+                <a:ea typeface="Courier New" pitchFamily="34" charset="-122"/>
+                <a:cs typeface="Courier New" pitchFamily="34" charset="-120"/>
+              </a:rPr>
+              <a:t>key</a:t>
+            </a:r>
+            <a:pPr indent="0" marL="0">
+              <a:buNone/>
+            </a:pPr>
+            <a:r>
+              <a:rPr lang="en-US" sz="1000" dirty="0">
+                <a:solidFill>
+                  <a:srgbClr val="CCCCCC"/>
+                </a:solidFill>
+                <a:latin typeface="Courier New" pitchFamily="34" charset="0"/>
+                <a:ea typeface="Courier New" pitchFamily="34" charset="-122"/>
+                <a:cs typeface="Courier New" pitchFamily="34" charset="-120"/>
+              </a:rPr>
+              <a:t> </a:t>
+            </a:r>
+            <a:pPr indent="0" marL="0">
+              <a:buNone/>
+            </a:pPr>
+            <a:r>
+              <a:rPr lang="en-US" sz="1000" dirty="0">
+                <a:solidFill>
+                  <a:srgbClr val="4FC1FF"/>
+                </a:solidFill>
+                <a:latin typeface="Courier New" pitchFamily="34" charset="0"/>
+                <a:ea typeface="Courier New" pitchFamily="34" charset="-122"/>
+                <a:cs typeface="Courier New" pitchFamily="34" charset="-120"/>
+              </a:rPr>
+              <a:t>ID</a:t>
+            </a:r>
+            <a:pPr indent="0" marL="0">
+              <a:buNone/>
+            </a:pPr>
+            <a:r>
+              <a:rPr lang="en-US" sz="1000" dirty="0">
+                <a:solidFill>
+                  <a:srgbClr val="CCCCCC"/>
+                </a:solidFill>
+                <a:latin typeface="Courier New" pitchFamily="34" charset="0"/>
+                <a:ea typeface="Courier New" pitchFamily="34" charset="-122"/>
+                <a:cs typeface="Courier New" pitchFamily="34" charset="-120"/>
+              </a:rPr>
+              <a:t>,</a:t>
+            </a:r>
+            <a:endParaRPr lang="en-US" sz="1000" dirty="0"/>
+          </a:p>
+          <a:p>
+            <a:pPr indent="0" marL="0">
+              <a:buNone/>
+            </a:pPr>
+            <a:r>
+              <a:rPr lang="en-US" sz="1000" dirty="0">
+                <a:solidFill>
+                  <a:srgbClr val="CCCCCC"/>
+                </a:solidFill>
+                <a:latin typeface="Courier New" pitchFamily="34" charset="0"/>
+                <a:ea typeface="Courier New" pitchFamily="34" charset="-122"/>
+                <a:cs typeface="Courier New" pitchFamily="34" charset="-120"/>
+              </a:rPr>
+              <a:t>  </a:t>
+            </a:r>
+            <a:pPr indent="0" marL="0">
+              <a:buNone/>
+            </a:pPr>
+            <a:r>
+              <a:rPr lang="en-US" sz="1000" dirty="0">
+                <a:solidFill>
+                  <a:srgbClr val="9CDCFE"/>
+                </a:solidFill>
+                <a:latin typeface="Courier New" pitchFamily="34" charset="0"/>
+                <a:ea typeface="Courier New" pitchFamily="34" charset="-122"/>
+                <a:cs typeface="Courier New" pitchFamily="34" charset="-120"/>
+              </a:rPr>
+              <a:t>numeroPedido</a:t>
+            </a:r>
+            <a:pPr indent="0" marL="0">
+              <a:buNone/>
+            </a:pPr>
+            <a:r>
+              <a:rPr lang="en-US" sz="1000" dirty="0">
+                <a:solidFill>
+                  <a:srgbClr val="CCCCCC"/>
+                </a:solidFill>
+                <a:latin typeface="Courier New" pitchFamily="34" charset="0"/>
+                <a:ea typeface="Courier New" pitchFamily="34" charset="-122"/>
+                <a:cs typeface="Courier New" pitchFamily="34" charset="-120"/>
+              </a:rPr>
+              <a:t>,</a:t>
+            </a:r>
+            <a:endParaRPr lang="en-US" sz="1000" dirty="0"/>
+          </a:p>
+          <a:p>
+            <a:pPr indent="0" marL="0">
+              <a:buNone/>
+            </a:pPr>
+            <a:r>
+              <a:rPr lang="en-US" sz="1000" dirty="0">
+                <a:solidFill>
+                  <a:srgbClr val="CCCCCC"/>
+                </a:solidFill>
+                <a:latin typeface="Courier New" pitchFamily="34" charset="0"/>
+                <a:ea typeface="Courier New" pitchFamily="34" charset="-122"/>
+                <a:cs typeface="Courier New" pitchFamily="34" charset="-120"/>
+              </a:rPr>
+              <a:t>  </a:t>
+            </a:r>
+            <a:pPr indent="0" marL="0">
+              <a:buNone/>
+            </a:pPr>
+            <a:r>
+              <a:rPr lang="en-US" sz="1000" dirty="0">
+                <a:solidFill>
+                  <a:srgbClr val="9CDCFE"/>
+                </a:solidFill>
+                <a:latin typeface="Courier New" pitchFamily="34" charset="0"/>
+                <a:ea typeface="Courier New" pitchFamily="34" charset="-122"/>
+                <a:cs typeface="Courier New" pitchFamily="34" charset="-120"/>
+              </a:rPr>
+              <a:t>statusReembolso</a:t>
+            </a:r>
+            <a:pPr indent="0" marL="0">
+              <a:buNone/>
+            </a:pPr>
+            <a:r>
+              <a:rPr lang="en-US" sz="1000" dirty="0">
+                <a:solidFill>
+                  <a:srgbClr val="CCCCCC"/>
+                </a:solidFill>
+                <a:latin typeface="Courier New" pitchFamily="34" charset="0"/>
+                <a:ea typeface="Courier New" pitchFamily="34" charset="-122"/>
+                <a:cs typeface="Courier New" pitchFamily="34" charset="-120"/>
+              </a:rPr>
+              <a:t>.</a:t>
+            </a:r>
+            <a:pPr indent="0" marL="0">
+              <a:buNone/>
+            </a:pPr>
+            <a:r>
+              <a:rPr lang="en-US" sz="1000" dirty="0">
+                <a:solidFill>
+                  <a:srgbClr val="9CDCFE"/>
+                </a:solidFill>
+                <a:latin typeface="Courier New" pitchFamily="34" charset="0"/>
+                <a:ea typeface="Courier New" pitchFamily="34" charset="-122"/>
+                <a:cs typeface="Courier New" pitchFamily="34" charset="-120"/>
+              </a:rPr>
+              <a:t>code</a:t>
+            </a:r>
+            <a:pPr indent="0" marL="0">
+              <a:buNone/>
+            </a:pPr>
+            <a:r>
+              <a:rPr lang="en-US" sz="1000" dirty="0">
+                <a:solidFill>
+                  <a:srgbClr val="CCCCCC"/>
+                </a:solidFill>
+                <a:latin typeface="Courier New" pitchFamily="34" charset="0"/>
+                <a:ea typeface="Courier New" pitchFamily="34" charset="-122"/>
+                <a:cs typeface="Courier New" pitchFamily="34" charset="-120"/>
+              </a:rPr>
+              <a:t> </a:t>
+            </a:r>
+            <a:pPr indent="0" marL="0">
+              <a:buNone/>
+            </a:pPr>
+            <a:r>
+              <a:rPr lang="en-US" sz="1000" dirty="0">
+                <a:solidFill>
+                  <a:srgbClr val="569CD6"/>
+                </a:solidFill>
+                <a:latin typeface="Courier New" pitchFamily="34" charset="0"/>
+                <a:ea typeface="Courier New" pitchFamily="34" charset="-122"/>
+                <a:cs typeface="Courier New" pitchFamily="34" charset="-120"/>
+              </a:rPr>
+              <a:t>as</a:t>
+            </a:r>
+            <a:pPr indent="0" marL="0">
+              <a:buNone/>
+            </a:pPr>
+            <a:r>
+              <a:rPr lang="en-US" sz="1000" dirty="0">
+                <a:solidFill>
+                  <a:srgbClr val="CCCCCC"/>
+                </a:solidFill>
+                <a:latin typeface="Courier New" pitchFamily="34" charset="0"/>
+                <a:ea typeface="Courier New" pitchFamily="34" charset="-122"/>
+                <a:cs typeface="Courier New" pitchFamily="34" charset="-120"/>
+              </a:rPr>
+              <a:t> </a:t>
+            </a:r>
+            <a:pPr indent="0" marL="0">
+              <a:buNone/>
+            </a:pPr>
+            <a:r>
+              <a:rPr lang="en-US" sz="1000" dirty="0">
+                <a:solidFill>
+                  <a:srgbClr val="9CDCFE"/>
+                </a:solidFill>
+                <a:latin typeface="Courier New" pitchFamily="34" charset="0"/>
+                <a:ea typeface="Courier New" pitchFamily="34" charset="-122"/>
+                <a:cs typeface="Courier New" pitchFamily="34" charset="-120"/>
+              </a:rPr>
+              <a:t>statusReembolso</a:t>
+            </a:r>
+            <a:pPr indent="0" marL="0">
+              <a:buNone/>
+            </a:pPr>
+            <a:r>
+              <a:rPr lang="en-US" sz="1000" dirty="0">
+                <a:solidFill>
+                  <a:srgbClr val="CCCCCC"/>
+                </a:solidFill>
+                <a:latin typeface="Courier New" pitchFamily="34" charset="0"/>
+                <a:ea typeface="Courier New" pitchFamily="34" charset="-122"/>
+                <a:cs typeface="Courier New" pitchFamily="34" charset="-120"/>
+              </a:rPr>
+              <a:t> : </a:t>
+            </a:r>
+            <a:pPr indent="0" marL="0">
+              <a:buNone/>
+            </a:pPr>
+            <a:r>
+              <a:rPr lang="en-US" sz="1000" dirty="0">
+                <a:solidFill>
+                  <a:srgbClr val="4EC9B0"/>
+                </a:solidFill>
+                <a:latin typeface="Courier New" pitchFamily="34" charset="0"/>
+                <a:ea typeface="Courier New" pitchFamily="34" charset="-122"/>
+                <a:cs typeface="Courier New" pitchFamily="34" charset="-120"/>
+              </a:rPr>
+              <a:t>String</a:t>
+            </a:r>
+            <a:pPr indent="0" marL="0">
+              <a:buNone/>
+            </a:pPr>
+            <a:r>
+              <a:rPr lang="en-US" sz="1000" dirty="0">
+                <a:solidFill>
+                  <a:srgbClr val="DA70D6"/>
+                </a:solidFill>
+                <a:latin typeface="Courier New" pitchFamily="34" charset="0"/>
+                <a:ea typeface="Courier New" pitchFamily="34" charset="-122"/>
+                <a:cs typeface="Courier New" pitchFamily="34" charset="-120"/>
+              </a:rPr>
+              <a:t>(</a:t>
+            </a:r>
+            <a:pPr indent="0" marL="0">
+              <a:buNone/>
+            </a:pPr>
+            <a:r>
+              <a:rPr lang="en-US" sz="1000" dirty="0">
+                <a:solidFill>
+                  <a:srgbClr val="B5CEA8"/>
+                </a:solidFill>
+                <a:latin typeface="Courier New" pitchFamily="34" charset="0"/>
+                <a:ea typeface="Courier New" pitchFamily="34" charset="-122"/>
+                <a:cs typeface="Courier New" pitchFamily="34" charset="-120"/>
+              </a:rPr>
+              <a:t>20</a:t>
+            </a:r>
+            <a:pPr indent="0" marL="0">
+              <a:buNone/>
+            </a:pPr>
+            <a:r>
+              <a:rPr lang="en-US" sz="1000" dirty="0">
+                <a:solidFill>
+                  <a:srgbClr val="DA70D6"/>
+                </a:solidFill>
+                <a:latin typeface="Courier New" pitchFamily="34" charset="0"/>
+                <a:ea typeface="Courier New" pitchFamily="34" charset="-122"/>
+                <a:cs typeface="Courier New" pitchFamily="34" charset="-120"/>
+              </a:rPr>
+              <a:t>)</a:t>
+            </a:r>
+            <a:pPr indent="0" marL="0">
+              <a:buNone/>
+            </a:pPr>
+            <a:r>
+              <a:rPr lang="en-US" sz="1000" dirty="0">
+                <a:solidFill>
+                  <a:srgbClr val="CCCCCC"/>
+                </a:solidFill>
+                <a:latin typeface="Courier New" pitchFamily="34" charset="0"/>
+                <a:ea typeface="Courier New" pitchFamily="34" charset="-122"/>
+                <a:cs typeface="Courier New" pitchFamily="34" charset="-120"/>
+              </a:rPr>
+              <a:t>,</a:t>
+            </a:r>
+            <a:endParaRPr lang="en-US" sz="1000" dirty="0"/>
+          </a:p>
+          <a:p>
+            <a:pPr indent="0" marL="0">
+              <a:buNone/>
+            </a:pPr>
+            <a:r>
+              <a:rPr lang="en-US" sz="1000" dirty="0">
+                <a:solidFill>
+                  <a:srgbClr val="CCCCCC"/>
+                </a:solidFill>
+                <a:latin typeface="Courier New" pitchFamily="34" charset="0"/>
+                <a:ea typeface="Courier New" pitchFamily="34" charset="-122"/>
+                <a:cs typeface="Courier New" pitchFamily="34" charset="-120"/>
+              </a:rPr>
+              <a:t>  </a:t>
+            </a:r>
+            <a:pPr indent="0" marL="0">
+              <a:buNone/>
+            </a:pPr>
+            <a:r>
+              <a:rPr lang="en-US" sz="1000" dirty="0">
+                <a:solidFill>
+                  <a:srgbClr val="9CDCFE"/>
+                </a:solidFill>
+                <a:latin typeface="Courier New" pitchFamily="34" charset="0"/>
+                <a:ea typeface="Courier New" pitchFamily="34" charset="-122"/>
+                <a:cs typeface="Courier New" pitchFamily="34" charset="-120"/>
+              </a:rPr>
+              <a:t>statusReembolso</a:t>
+            </a:r>
+            <a:pPr indent="0" marL="0">
+              <a:buNone/>
+            </a:pPr>
+            <a:r>
+              <a:rPr lang="en-US" sz="1000" dirty="0">
+                <a:solidFill>
+                  <a:srgbClr val="CCCCCC"/>
+                </a:solidFill>
+                <a:latin typeface="Courier New" pitchFamily="34" charset="0"/>
+                <a:ea typeface="Courier New" pitchFamily="34" charset="-122"/>
+                <a:cs typeface="Courier New" pitchFamily="34" charset="-120"/>
+              </a:rPr>
+              <a:t>.</a:t>
+            </a:r>
+            <a:pPr indent="0" marL="0">
+              <a:buNone/>
+            </a:pPr>
+            <a:r>
+              <a:rPr lang="en-US" sz="1000" dirty="0">
+                <a:solidFill>
+                  <a:srgbClr val="9CDCFE"/>
+                </a:solidFill>
+                <a:latin typeface="Courier New" pitchFamily="34" charset="0"/>
+                <a:ea typeface="Courier New" pitchFamily="34" charset="-122"/>
+                <a:cs typeface="Courier New" pitchFamily="34" charset="-120"/>
+              </a:rPr>
+              <a:t>name</a:t>
+            </a:r>
+            <a:pPr indent="0" marL="0">
+              <a:buNone/>
+            </a:pPr>
+            <a:r>
+              <a:rPr lang="en-US" sz="1000" dirty="0">
+                <a:solidFill>
+                  <a:srgbClr val="CCCCCC"/>
+                </a:solidFill>
+                <a:latin typeface="Courier New" pitchFamily="34" charset="0"/>
+                <a:ea typeface="Courier New" pitchFamily="34" charset="-122"/>
+                <a:cs typeface="Courier New" pitchFamily="34" charset="-120"/>
+              </a:rPr>
+              <a:t> </a:t>
+            </a:r>
+            <a:pPr indent="0" marL="0">
+              <a:buNone/>
+            </a:pPr>
+            <a:r>
+              <a:rPr lang="en-US" sz="1000" dirty="0">
+                <a:solidFill>
+                  <a:srgbClr val="569CD6"/>
+                </a:solidFill>
+                <a:latin typeface="Courier New" pitchFamily="34" charset="0"/>
+                <a:ea typeface="Courier New" pitchFamily="34" charset="-122"/>
+                <a:cs typeface="Courier New" pitchFamily="34" charset="-120"/>
+              </a:rPr>
+              <a:t>as</a:t>
+            </a:r>
+            <a:pPr indent="0" marL="0">
+              <a:buNone/>
+            </a:pPr>
+            <a:r>
+              <a:rPr lang="en-US" sz="1000" dirty="0">
+                <a:solidFill>
+                  <a:srgbClr val="CCCCCC"/>
+                </a:solidFill>
+                <a:latin typeface="Courier New" pitchFamily="34" charset="0"/>
+                <a:ea typeface="Courier New" pitchFamily="34" charset="-122"/>
+                <a:cs typeface="Courier New" pitchFamily="34" charset="-120"/>
+              </a:rPr>
+              <a:t> </a:t>
+            </a:r>
+            <a:pPr indent="0" marL="0">
+              <a:buNone/>
+            </a:pPr>
+            <a:r>
+              <a:rPr lang="en-US" sz="1000" dirty="0">
+                <a:solidFill>
+                  <a:srgbClr val="9CDCFE"/>
+                </a:solidFill>
+                <a:latin typeface="Courier New" pitchFamily="34" charset="0"/>
+                <a:ea typeface="Courier New" pitchFamily="34" charset="-122"/>
+                <a:cs typeface="Courier New" pitchFamily="34" charset="-120"/>
+              </a:rPr>
+              <a:t>statusReembolsoTexto</a:t>
+            </a:r>
+            <a:pPr indent="0" marL="0">
+              <a:buNone/>
+            </a:pPr>
+            <a:r>
+              <a:rPr lang="en-US" sz="1000" dirty="0">
+                <a:solidFill>
+                  <a:srgbClr val="CCCCCC"/>
+                </a:solidFill>
+                <a:latin typeface="Courier New" pitchFamily="34" charset="0"/>
+                <a:ea typeface="Courier New" pitchFamily="34" charset="-122"/>
+                <a:cs typeface="Courier New" pitchFamily="34" charset="-120"/>
+              </a:rPr>
+              <a:t>,</a:t>
+            </a:r>
+            <a:endParaRPr lang="en-US" sz="1000" dirty="0"/>
+          </a:p>
+          <a:p>
+            <a:pPr indent="0" marL="0">
+              <a:buNone/>
+            </a:pPr>
+            <a:r>
+              <a:rPr lang="en-US" sz="1000" dirty="0">
+                <a:solidFill>
+                  <a:srgbClr val="CCCCCC"/>
+                </a:solidFill>
+                <a:latin typeface="Courier New" pitchFamily="34" charset="0"/>
+                <a:ea typeface="Courier New" pitchFamily="34" charset="-122"/>
+                <a:cs typeface="Courier New" pitchFamily="34" charset="-120"/>
+              </a:rPr>
+              <a:t>  </a:t>
+            </a:r>
+            <a:pPr indent="0" marL="0">
+              <a:buNone/>
+            </a:pPr>
+            <a:r>
+              <a:rPr lang="en-US" sz="1000" dirty="0">
+                <a:solidFill>
+                  <a:srgbClr val="9CDCFE"/>
+                </a:solidFill>
+                <a:latin typeface="Courier New" pitchFamily="34" charset="0"/>
+                <a:ea typeface="Courier New" pitchFamily="34" charset="-122"/>
+                <a:cs typeface="Courier New" pitchFamily="34" charset="-120"/>
+              </a:rPr>
+              <a:t>motivoSolicitacao</a:t>
+            </a:r>
+            <a:pPr indent="0" marL="0">
+              <a:buNone/>
+            </a:pPr>
+            <a:r>
+              <a:rPr lang="en-US" sz="1000" dirty="0">
+                <a:solidFill>
+                  <a:srgbClr val="CCCCCC"/>
+                </a:solidFill>
+                <a:latin typeface="Courier New" pitchFamily="34" charset="0"/>
+                <a:ea typeface="Courier New" pitchFamily="34" charset="-122"/>
+                <a:cs typeface="Courier New" pitchFamily="34" charset="-120"/>
+              </a:rPr>
+              <a:t>,</a:t>
+            </a:r>
+            <a:endParaRPr lang="en-US" sz="1000" dirty="0"/>
+          </a:p>
+          <a:p>
+            <a:pPr indent="0" marL="0">
+              <a:buNone/>
+            </a:pPr>
+            <a:r>
+              <a:rPr lang="en-US" sz="1000" dirty="0">
+                <a:solidFill>
+                  <a:srgbClr val="CCCCCC"/>
+                </a:solidFill>
+                <a:latin typeface="Courier New" pitchFamily="34" charset="0"/>
+                <a:ea typeface="Courier New" pitchFamily="34" charset="-122"/>
+                <a:cs typeface="Courier New" pitchFamily="34" charset="-120"/>
+              </a:rPr>
+              <a:t>  </a:t>
+            </a:r>
+            <a:pPr indent="0" marL="0">
+              <a:buNone/>
+            </a:pPr>
+            <a:r>
+              <a:rPr lang="en-US" sz="1000" dirty="0">
+                <a:solidFill>
+                  <a:srgbClr val="9CDCFE"/>
+                </a:solidFill>
+                <a:latin typeface="Courier New" pitchFamily="34" charset="0"/>
+                <a:ea typeface="Courier New" pitchFamily="34" charset="-122"/>
+                <a:cs typeface="Courier New" pitchFamily="34" charset="-120"/>
+              </a:rPr>
+              <a:t>cliente</a:t>
+            </a:r>
+            <a:pPr indent="0" marL="0">
+              <a:buNone/>
+            </a:pPr>
+            <a:r>
+              <a:rPr lang="en-US" sz="1000" dirty="0">
+                <a:solidFill>
+                  <a:srgbClr val="CCCCCC"/>
+                </a:solidFill>
+                <a:latin typeface="Courier New" pitchFamily="34" charset="0"/>
+                <a:ea typeface="Courier New" pitchFamily="34" charset="-122"/>
+                <a:cs typeface="Courier New" pitchFamily="34" charset="-120"/>
+              </a:rPr>
+              <a:t>.</a:t>
+            </a:r>
+            <a:pPr indent="0" marL="0">
+              <a:buNone/>
+            </a:pPr>
+            <a:r>
+              <a:rPr lang="en-US" sz="1000" dirty="0">
+                <a:solidFill>
+                  <a:srgbClr val="9CDCFE"/>
+                </a:solidFill>
+                <a:latin typeface="Courier New" pitchFamily="34" charset="0"/>
+                <a:ea typeface="Courier New" pitchFamily="34" charset="-122"/>
+                <a:cs typeface="Courier New" pitchFamily="34" charset="-120"/>
+              </a:rPr>
+              <a:t>enderecoPrincipal</a:t>
+            </a:r>
+            <a:pPr indent="0" marL="0">
+              <a:buNone/>
+            </a:pPr>
+            <a:r>
+              <a:rPr lang="en-US" sz="1000" dirty="0">
+                <a:solidFill>
+                  <a:srgbClr val="CCCCCC"/>
+                </a:solidFill>
+                <a:latin typeface="Courier New" pitchFamily="34" charset="0"/>
+                <a:ea typeface="Courier New" pitchFamily="34" charset="-122"/>
+                <a:cs typeface="Courier New" pitchFamily="34" charset="-120"/>
+              </a:rPr>
+              <a:t>.</a:t>
+            </a:r>
+            <a:pPr indent="0" marL="0">
+              <a:buNone/>
+            </a:pPr>
+            <a:r>
+              <a:rPr lang="en-US" sz="1000" dirty="0">
+                <a:solidFill>
+                  <a:srgbClr val="9CDCFE"/>
+                </a:solidFill>
+                <a:latin typeface="Courier New" pitchFamily="34" charset="0"/>
+                <a:ea typeface="Courier New" pitchFamily="34" charset="-122"/>
+                <a:cs typeface="Courier New" pitchFamily="34" charset="-120"/>
+              </a:rPr>
+              <a:t>uf</a:t>
+            </a:r>
+            <a:pPr indent="0" marL="0">
+              <a:buNone/>
+            </a:pPr>
+            <a:r>
+              <a:rPr lang="en-US" sz="1000" dirty="0">
+                <a:solidFill>
+                  <a:srgbClr val="CCCCCC"/>
+                </a:solidFill>
+                <a:latin typeface="Courier New" pitchFamily="34" charset="0"/>
+                <a:ea typeface="Courier New" pitchFamily="34" charset="-122"/>
+                <a:cs typeface="Courier New" pitchFamily="34" charset="-120"/>
+              </a:rPr>
+              <a:t> </a:t>
+            </a:r>
+            <a:pPr indent="0" marL="0">
+              <a:buNone/>
+            </a:pPr>
+            <a:r>
+              <a:rPr lang="en-US" sz="1000" dirty="0">
+                <a:solidFill>
+                  <a:srgbClr val="569CD6"/>
+                </a:solidFill>
+                <a:latin typeface="Courier New" pitchFamily="34" charset="0"/>
+                <a:ea typeface="Courier New" pitchFamily="34" charset="-122"/>
+                <a:cs typeface="Courier New" pitchFamily="34" charset="-120"/>
+              </a:rPr>
+              <a:t>as</a:t>
+            </a:r>
+            <a:pPr indent="0" marL="0">
+              <a:buNone/>
+            </a:pPr>
+            <a:r>
+              <a:rPr lang="en-US" sz="1000" dirty="0">
+                <a:solidFill>
+                  <a:srgbClr val="CCCCCC"/>
+                </a:solidFill>
+                <a:latin typeface="Courier New" pitchFamily="34" charset="0"/>
+                <a:ea typeface="Courier New" pitchFamily="34" charset="-122"/>
+                <a:cs typeface="Courier New" pitchFamily="34" charset="-120"/>
+              </a:rPr>
+              <a:t> </a:t>
+            </a:r>
+            <a:pPr indent="0" marL="0">
+              <a:buNone/>
+            </a:pPr>
+            <a:r>
+              <a:rPr lang="en-US" sz="1000" dirty="0">
+                <a:solidFill>
+                  <a:srgbClr val="9CDCFE"/>
+                </a:solidFill>
+                <a:latin typeface="Courier New" pitchFamily="34" charset="0"/>
+                <a:ea typeface="Courier New" pitchFamily="34" charset="-122"/>
+                <a:cs typeface="Courier New" pitchFamily="34" charset="-120"/>
+              </a:rPr>
+              <a:t>uf</a:t>
+            </a:r>
+            <a:pPr indent="0" marL="0">
+              <a:buNone/>
+            </a:pPr>
+            <a:r>
+              <a:rPr lang="en-US" sz="1000" dirty="0">
+                <a:solidFill>
+                  <a:srgbClr val="CCCCCC"/>
+                </a:solidFill>
+                <a:latin typeface="Courier New" pitchFamily="34" charset="0"/>
+                <a:ea typeface="Courier New" pitchFamily="34" charset="-122"/>
+                <a:cs typeface="Courier New" pitchFamily="34" charset="-120"/>
+              </a:rPr>
+              <a:t> : </a:t>
+            </a:r>
+            <a:pPr indent="0" marL="0">
+              <a:buNone/>
+            </a:pPr>
+            <a:r>
+              <a:rPr lang="en-US" sz="1000" dirty="0">
+                <a:solidFill>
+                  <a:srgbClr val="4EC9B0"/>
+                </a:solidFill>
+                <a:latin typeface="Courier New" pitchFamily="34" charset="0"/>
+                <a:ea typeface="Courier New" pitchFamily="34" charset="-122"/>
+                <a:cs typeface="Courier New" pitchFamily="34" charset="-120"/>
+              </a:rPr>
+              <a:t>String</a:t>
+            </a:r>
+            <a:pPr indent="0" marL="0">
+              <a:buNone/>
+            </a:pPr>
+            <a:r>
+              <a:rPr lang="en-US" sz="1000" dirty="0">
+                <a:solidFill>
+                  <a:srgbClr val="DA70D6"/>
+                </a:solidFill>
+                <a:latin typeface="Courier New" pitchFamily="34" charset="0"/>
+                <a:ea typeface="Courier New" pitchFamily="34" charset="-122"/>
+                <a:cs typeface="Courier New" pitchFamily="34" charset="-120"/>
+              </a:rPr>
+              <a:t>(</a:t>
+            </a:r>
+            <a:pPr indent="0" marL="0">
+              <a:buNone/>
+            </a:pPr>
+            <a:r>
+              <a:rPr lang="en-US" sz="1000" dirty="0">
+                <a:solidFill>
+                  <a:srgbClr val="B5CEA8"/>
+                </a:solidFill>
+                <a:latin typeface="Courier New" pitchFamily="34" charset="0"/>
+                <a:ea typeface="Courier New" pitchFamily="34" charset="-122"/>
+                <a:cs typeface="Courier New" pitchFamily="34" charset="-120"/>
+              </a:rPr>
+              <a:t>2</a:t>
+            </a:r>
+            <a:pPr indent="0" marL="0">
+              <a:buNone/>
+            </a:pPr>
+            <a:r>
+              <a:rPr lang="en-US" sz="1000" dirty="0">
+                <a:solidFill>
+                  <a:srgbClr val="DA70D6"/>
+                </a:solidFill>
+                <a:latin typeface="Courier New" pitchFamily="34" charset="0"/>
+                <a:ea typeface="Courier New" pitchFamily="34" charset="-122"/>
+                <a:cs typeface="Courier New" pitchFamily="34" charset="-120"/>
+              </a:rPr>
+              <a:t>)</a:t>
+            </a:r>
+            <a:pPr indent="0" marL="0">
+              <a:buNone/>
+            </a:pPr>
+            <a:r>
+              <a:rPr lang="en-US" sz="1000" dirty="0">
+                <a:solidFill>
+                  <a:srgbClr val="CCCCCC"/>
+                </a:solidFill>
+                <a:latin typeface="Courier New" pitchFamily="34" charset="0"/>
+                <a:ea typeface="Courier New" pitchFamily="34" charset="-122"/>
+                <a:cs typeface="Courier New" pitchFamily="34" charset="-120"/>
+              </a:rPr>
+              <a:t>,</a:t>
+            </a:r>
+            <a:endParaRPr lang="en-US" sz="1000" dirty="0"/>
+          </a:p>
+          <a:p>
+            <a:pPr indent="0" marL="0">
+              <a:buNone/>
+            </a:pPr>
+            <a:r>
+              <a:rPr lang="en-US" sz="1000" dirty="0">
+                <a:solidFill>
+                  <a:srgbClr val="CCCCCC"/>
+                </a:solidFill>
+                <a:latin typeface="Courier New" pitchFamily="34" charset="0"/>
+                <a:ea typeface="Courier New" pitchFamily="34" charset="-122"/>
+                <a:cs typeface="Courier New" pitchFamily="34" charset="-120"/>
+              </a:rPr>
+              <a:t>  </a:t>
+            </a:r>
+            <a:pPr indent="0" marL="0">
+              <a:buNone/>
+            </a:pPr>
+            <a:r>
+              <a:rPr lang="en-US" sz="1000" dirty="0">
+                <a:solidFill>
+                  <a:srgbClr val="569CD6"/>
+                </a:solidFill>
+                <a:latin typeface="Courier New" pitchFamily="34" charset="0"/>
+                <a:ea typeface="Courier New" pitchFamily="34" charset="-122"/>
+                <a:cs typeface="Courier New" pitchFamily="34" charset="-120"/>
+              </a:rPr>
+              <a:t>cast</a:t>
+            </a:r>
+            <a:pPr indent="0" marL="0">
+              <a:buNone/>
+            </a:pPr>
+            <a:r>
+              <a:rPr lang="en-US" sz="1000" dirty="0">
+                <a:solidFill>
+                  <a:srgbClr val="DA70D6"/>
+                </a:solidFill>
+                <a:latin typeface="Courier New" pitchFamily="34" charset="0"/>
+                <a:ea typeface="Courier New" pitchFamily="34" charset="-122"/>
+                <a:cs typeface="Courier New" pitchFamily="34" charset="-120"/>
+              </a:rPr>
+              <a:t>(</a:t>
+            </a:r>
+            <a:pPr indent="0" marL="0">
+              <a:buNone/>
+            </a:pPr>
+            <a:r>
+              <a:rPr lang="en-US" sz="1000" dirty="0">
+                <a:solidFill>
+                  <a:srgbClr val="DCDCAA"/>
+                </a:solidFill>
+                <a:latin typeface="Courier New" pitchFamily="34" charset="0"/>
+                <a:ea typeface="Courier New" pitchFamily="34" charset="-122"/>
+                <a:cs typeface="Courier New" pitchFamily="34" charset="-120"/>
+              </a:rPr>
+              <a:t>year</a:t>
+            </a:r>
+            <a:pPr indent="0" marL="0">
+              <a:buNone/>
+            </a:pPr>
+            <a:r>
+              <a:rPr lang="en-US" sz="1000" dirty="0">
+                <a:solidFill>
+                  <a:srgbClr val="179FFF"/>
+                </a:solidFill>
+                <a:latin typeface="Courier New" pitchFamily="34" charset="0"/>
+                <a:ea typeface="Courier New" pitchFamily="34" charset="-122"/>
+                <a:cs typeface="Courier New" pitchFamily="34" charset="-120"/>
+              </a:rPr>
+              <a:t>(</a:t>
+            </a:r>
+            <a:pPr indent="0" marL="0">
+              <a:buNone/>
+            </a:pPr>
+            <a:r>
+              <a:rPr lang="en-US" sz="1000" dirty="0">
+                <a:solidFill>
+                  <a:srgbClr val="9CDCFE"/>
+                </a:solidFill>
+                <a:latin typeface="Courier New" pitchFamily="34" charset="0"/>
+                <a:ea typeface="Courier New" pitchFamily="34" charset="-122"/>
+                <a:cs typeface="Courier New" pitchFamily="34" charset="-120"/>
+              </a:rPr>
+              <a:t>dataSolicitacao</a:t>
+            </a:r>
+            <a:pPr indent="0" marL="0">
+              <a:buNone/>
+            </a:pPr>
+            <a:r>
+              <a:rPr lang="en-US" sz="1000" dirty="0">
+                <a:solidFill>
+                  <a:srgbClr val="179FFF"/>
+                </a:solidFill>
+                <a:latin typeface="Courier New" pitchFamily="34" charset="0"/>
+                <a:ea typeface="Courier New" pitchFamily="34" charset="-122"/>
+                <a:cs typeface="Courier New" pitchFamily="34" charset="-120"/>
+              </a:rPr>
+              <a:t>)</a:t>
+            </a:r>
+            <a:pPr indent="0" marL="0">
+              <a:buNone/>
+            </a:pPr>
+            <a:r>
+              <a:rPr lang="en-US" sz="1000" dirty="0">
+                <a:solidFill>
+                  <a:srgbClr val="CCCCCC"/>
+                </a:solidFill>
+                <a:latin typeface="Courier New" pitchFamily="34" charset="0"/>
+                <a:ea typeface="Courier New" pitchFamily="34" charset="-122"/>
+                <a:cs typeface="Courier New" pitchFamily="34" charset="-120"/>
+              </a:rPr>
+              <a:t> * </a:t>
+            </a:r>
+            <a:pPr indent="0" marL="0">
+              <a:buNone/>
+            </a:pPr>
+            <a:r>
+              <a:rPr lang="en-US" sz="1000" dirty="0">
+                <a:solidFill>
+                  <a:srgbClr val="B5CEA8"/>
+                </a:solidFill>
+                <a:latin typeface="Courier New" pitchFamily="34" charset="0"/>
+                <a:ea typeface="Courier New" pitchFamily="34" charset="-122"/>
+                <a:cs typeface="Courier New" pitchFamily="34" charset="-120"/>
+              </a:rPr>
+              <a:t>100</a:t>
+            </a:r>
+            <a:endParaRPr lang="en-US" sz="1000" dirty="0"/>
+          </a:p>
+          <a:p>
+            <a:pPr indent="0" marL="0">
+              <a:buNone/>
+            </a:pPr>
+            <a:r>
+              <a:rPr lang="en-US" sz="1000" dirty="0">
+                <a:solidFill>
+                  <a:srgbClr val="CCCCCC"/>
+                </a:solidFill>
+                <a:latin typeface="Courier New" pitchFamily="34" charset="0"/>
+                <a:ea typeface="Courier New" pitchFamily="34" charset="-122"/>
+                <a:cs typeface="Courier New" pitchFamily="34" charset="-120"/>
+              </a:rPr>
+              <a:t>       + </a:t>
+            </a:r>
+            <a:pPr indent="0" marL="0">
+              <a:buNone/>
+            </a:pPr>
+            <a:r>
+              <a:rPr lang="en-US" sz="1000" dirty="0">
+                <a:solidFill>
+                  <a:srgbClr val="DCDCAA"/>
+                </a:solidFill>
+                <a:latin typeface="Courier New" pitchFamily="34" charset="0"/>
+                <a:ea typeface="Courier New" pitchFamily="34" charset="-122"/>
+                <a:cs typeface="Courier New" pitchFamily="34" charset="-120"/>
+              </a:rPr>
+              <a:t>month</a:t>
+            </a:r>
+            <a:pPr indent="0" marL="0">
+              <a:buNone/>
+            </a:pPr>
+            <a:r>
+              <a:rPr lang="en-US" sz="1000" dirty="0">
+                <a:solidFill>
+                  <a:srgbClr val="179FFF"/>
+                </a:solidFill>
+                <a:latin typeface="Courier New" pitchFamily="34" charset="0"/>
+                <a:ea typeface="Courier New" pitchFamily="34" charset="-122"/>
+                <a:cs typeface="Courier New" pitchFamily="34" charset="-120"/>
+              </a:rPr>
+              <a:t>(</a:t>
+            </a:r>
+            <a:pPr indent="0" marL="0">
+              <a:buNone/>
+            </a:pPr>
+            <a:r>
+              <a:rPr lang="en-US" sz="1000" dirty="0">
+                <a:solidFill>
+                  <a:srgbClr val="9CDCFE"/>
+                </a:solidFill>
+                <a:latin typeface="Courier New" pitchFamily="34" charset="0"/>
+                <a:ea typeface="Courier New" pitchFamily="34" charset="-122"/>
+                <a:cs typeface="Courier New" pitchFamily="34" charset="-120"/>
+              </a:rPr>
+              <a:t>dataSolicitacao</a:t>
+            </a:r>
+            <a:pPr indent="0" marL="0">
+              <a:buNone/>
+            </a:pPr>
+            <a:r>
+              <a:rPr lang="en-US" sz="1000" dirty="0">
+                <a:solidFill>
+                  <a:srgbClr val="179FFF"/>
+                </a:solidFill>
+                <a:latin typeface="Courier New" pitchFamily="34" charset="0"/>
+                <a:ea typeface="Courier New" pitchFamily="34" charset="-122"/>
+                <a:cs typeface="Courier New" pitchFamily="34" charset="-120"/>
+              </a:rPr>
+              <a:t>)</a:t>
+            </a:r>
+            <a:pPr indent="0" marL="0">
+              <a:buNone/>
+            </a:pPr>
+            <a:r>
+              <a:rPr lang="en-US" sz="1000" dirty="0">
+                <a:solidFill>
+                  <a:srgbClr val="CCCCCC"/>
+                </a:solidFill>
+                <a:latin typeface="Courier New" pitchFamily="34" charset="0"/>
+                <a:ea typeface="Courier New" pitchFamily="34" charset="-122"/>
+                <a:cs typeface="Courier New" pitchFamily="34" charset="-120"/>
+              </a:rPr>
+              <a:t> </a:t>
+            </a:r>
+            <a:pPr indent="0" marL="0">
+              <a:buNone/>
+            </a:pPr>
+            <a:r>
+              <a:rPr lang="en-US" sz="1000" dirty="0">
+                <a:solidFill>
+                  <a:srgbClr val="569CD6"/>
+                </a:solidFill>
+                <a:latin typeface="Courier New" pitchFamily="34" charset="0"/>
+                <a:ea typeface="Courier New" pitchFamily="34" charset="-122"/>
+                <a:cs typeface="Courier New" pitchFamily="34" charset="-120"/>
+              </a:rPr>
+              <a:t>as</a:t>
+            </a:r>
+            <a:pPr indent="0" marL="0">
+              <a:buNone/>
+            </a:pPr>
+            <a:r>
+              <a:rPr lang="en-US" sz="1000" dirty="0">
+                <a:solidFill>
+                  <a:srgbClr val="CCCCCC"/>
+                </a:solidFill>
+                <a:latin typeface="Courier New" pitchFamily="34" charset="0"/>
+                <a:ea typeface="Courier New" pitchFamily="34" charset="-122"/>
+                <a:cs typeface="Courier New" pitchFamily="34" charset="-120"/>
+              </a:rPr>
+              <a:t> </a:t>
+            </a:r>
+            <a:pPr indent="0" marL="0">
+              <a:buNone/>
+            </a:pPr>
+            <a:r>
+              <a:rPr lang="en-US" sz="1000" dirty="0">
+                <a:solidFill>
+                  <a:srgbClr val="4EC9B0"/>
+                </a:solidFill>
+                <a:latin typeface="Courier New" pitchFamily="34" charset="0"/>
+                <a:ea typeface="Courier New" pitchFamily="34" charset="-122"/>
+                <a:cs typeface="Courier New" pitchFamily="34" charset="-120"/>
+              </a:rPr>
+              <a:t>String</a:t>
+            </a:r>
+            <a:pPr indent="0" marL="0">
+              <a:buNone/>
+            </a:pPr>
+            <a:r>
+              <a:rPr lang="en-US" sz="1000" dirty="0">
+                <a:solidFill>
+                  <a:srgbClr val="179FFF"/>
+                </a:solidFill>
+                <a:latin typeface="Courier New" pitchFamily="34" charset="0"/>
+                <a:ea typeface="Courier New" pitchFamily="34" charset="-122"/>
+                <a:cs typeface="Courier New" pitchFamily="34" charset="-120"/>
+              </a:rPr>
+              <a:t>(</a:t>
+            </a:r>
+            <a:pPr indent="0" marL="0">
+              <a:buNone/>
+            </a:pPr>
+            <a:r>
+              <a:rPr lang="en-US" sz="1000" dirty="0">
+                <a:solidFill>
+                  <a:srgbClr val="B5CEA8"/>
+                </a:solidFill>
+                <a:latin typeface="Courier New" pitchFamily="34" charset="0"/>
+                <a:ea typeface="Courier New" pitchFamily="34" charset="-122"/>
+                <a:cs typeface="Courier New" pitchFamily="34" charset="-120"/>
+              </a:rPr>
+              <a:t>6</a:t>
+            </a:r>
+            <a:pPr indent="0" marL="0">
+              <a:buNone/>
+            </a:pPr>
+            <a:r>
+              <a:rPr lang="en-US" sz="1000" dirty="0">
+                <a:solidFill>
+                  <a:srgbClr val="179FFF"/>
+                </a:solidFill>
+                <a:latin typeface="Courier New" pitchFamily="34" charset="0"/>
+                <a:ea typeface="Courier New" pitchFamily="34" charset="-122"/>
+                <a:cs typeface="Courier New" pitchFamily="34" charset="-120"/>
+              </a:rPr>
+              <a:t>)</a:t>
+            </a:r>
+            <a:pPr indent="0" marL="0">
+              <a:buNone/>
+            </a:pPr>
+            <a:r>
+              <a:rPr lang="en-US" sz="1000" dirty="0">
+                <a:solidFill>
+                  <a:srgbClr val="DA70D6"/>
+                </a:solidFill>
+                <a:latin typeface="Courier New" pitchFamily="34" charset="0"/>
+                <a:ea typeface="Courier New" pitchFamily="34" charset="-122"/>
+                <a:cs typeface="Courier New" pitchFamily="34" charset="-120"/>
+              </a:rPr>
+              <a:t>)</a:t>
+            </a:r>
+            <a:endParaRPr lang="en-US" sz="1000" dirty="0"/>
+          </a:p>
+          <a:p>
+            <a:pPr indent="0" marL="0">
+              <a:buNone/>
+            </a:pPr>
+            <a:r>
+              <a:rPr lang="en-US" sz="1000" dirty="0">
+                <a:solidFill>
+                  <a:srgbClr val="CCCCCC"/>
+                </a:solidFill>
+                <a:latin typeface="Courier New" pitchFamily="34" charset="0"/>
+                <a:ea typeface="Courier New" pitchFamily="34" charset="-122"/>
+                <a:cs typeface="Courier New" pitchFamily="34" charset="-120"/>
+              </a:rPr>
+              <a:t>    </a:t>
+            </a:r>
+            <a:pPr indent="0" marL="0">
+              <a:buNone/>
+            </a:pPr>
+            <a:r>
+              <a:rPr lang="en-US" sz="1000" dirty="0">
+                <a:solidFill>
+                  <a:srgbClr val="569CD6"/>
+                </a:solidFill>
+                <a:latin typeface="Courier New" pitchFamily="34" charset="0"/>
+                <a:ea typeface="Courier New" pitchFamily="34" charset="-122"/>
+                <a:cs typeface="Courier New" pitchFamily="34" charset="-120"/>
+              </a:rPr>
+              <a:t>as</a:t>
+            </a:r>
+            <a:pPr indent="0" marL="0">
+              <a:buNone/>
+            </a:pPr>
+            <a:r>
+              <a:rPr lang="en-US" sz="1000" dirty="0">
+                <a:solidFill>
+                  <a:srgbClr val="CCCCCC"/>
+                </a:solidFill>
+                <a:latin typeface="Courier New" pitchFamily="34" charset="0"/>
+                <a:ea typeface="Courier New" pitchFamily="34" charset="-122"/>
+                <a:cs typeface="Courier New" pitchFamily="34" charset="-120"/>
+              </a:rPr>
+              <a:t> </a:t>
+            </a:r>
+            <a:pPr indent="0" marL="0">
+              <a:buNone/>
+            </a:pPr>
+            <a:r>
+              <a:rPr lang="en-US" sz="1000" dirty="0">
+                <a:solidFill>
+                  <a:srgbClr val="9CDCFE"/>
+                </a:solidFill>
+                <a:latin typeface="Courier New" pitchFamily="34" charset="0"/>
+                <a:ea typeface="Courier New" pitchFamily="34" charset="-122"/>
+                <a:cs typeface="Courier New" pitchFamily="34" charset="-120"/>
+              </a:rPr>
+              <a:t>mesSolicitacao</a:t>
+            </a:r>
+            <a:pPr indent="0" marL="0">
+              <a:buNone/>
+            </a:pPr>
+            <a:r>
+              <a:rPr lang="en-US" sz="1000" dirty="0">
+                <a:solidFill>
+                  <a:srgbClr val="CCCCCC"/>
+                </a:solidFill>
+                <a:latin typeface="Courier New" pitchFamily="34" charset="0"/>
+                <a:ea typeface="Courier New" pitchFamily="34" charset="-122"/>
+                <a:cs typeface="Courier New" pitchFamily="34" charset="-120"/>
+              </a:rPr>
+              <a:t> : </a:t>
+            </a:r>
+            <a:pPr indent="0" marL="0">
+              <a:buNone/>
+            </a:pPr>
+            <a:r>
+              <a:rPr lang="en-US" sz="1000" dirty="0">
+                <a:solidFill>
+                  <a:srgbClr val="4EC9B0"/>
+                </a:solidFill>
+                <a:latin typeface="Courier New" pitchFamily="34" charset="0"/>
+                <a:ea typeface="Courier New" pitchFamily="34" charset="-122"/>
+                <a:cs typeface="Courier New" pitchFamily="34" charset="-120"/>
+              </a:rPr>
+              <a:t>String</a:t>
+            </a:r>
+            <a:pPr indent="0" marL="0">
+              <a:buNone/>
+            </a:pPr>
+            <a:r>
+              <a:rPr lang="en-US" sz="1000" dirty="0">
+                <a:solidFill>
+                  <a:srgbClr val="DA70D6"/>
+                </a:solidFill>
+                <a:latin typeface="Courier New" pitchFamily="34" charset="0"/>
+                <a:ea typeface="Courier New" pitchFamily="34" charset="-122"/>
+                <a:cs typeface="Courier New" pitchFamily="34" charset="-120"/>
+              </a:rPr>
+              <a:t>(</a:t>
+            </a:r>
+            <a:pPr indent="0" marL="0">
+              <a:buNone/>
+            </a:pPr>
+            <a:r>
+              <a:rPr lang="en-US" sz="1000" dirty="0">
+                <a:solidFill>
+                  <a:srgbClr val="B5CEA8"/>
+                </a:solidFill>
+                <a:latin typeface="Courier New" pitchFamily="34" charset="0"/>
+                <a:ea typeface="Courier New" pitchFamily="34" charset="-122"/>
+                <a:cs typeface="Courier New" pitchFamily="34" charset="-120"/>
+              </a:rPr>
+              <a:t>6</a:t>
+            </a:r>
+            <a:pPr indent="0" marL="0">
+              <a:buNone/>
+            </a:pPr>
+            <a:r>
+              <a:rPr lang="en-US" sz="1000" dirty="0">
+                <a:solidFill>
+                  <a:srgbClr val="DA70D6"/>
+                </a:solidFill>
+                <a:latin typeface="Courier New" pitchFamily="34" charset="0"/>
+                <a:ea typeface="Courier New" pitchFamily="34" charset="-122"/>
+                <a:cs typeface="Courier New" pitchFamily="34" charset="-120"/>
+              </a:rPr>
+              <a:t>)</a:t>
+            </a:r>
+            <a:pPr indent="0" marL="0">
+              <a:buNone/>
+            </a:pPr>
+            <a:r>
+              <a:rPr lang="en-US" sz="1000" dirty="0">
+                <a:solidFill>
+                  <a:srgbClr val="CCCCCC"/>
+                </a:solidFill>
+                <a:latin typeface="Courier New" pitchFamily="34" charset="0"/>
+                <a:ea typeface="Courier New" pitchFamily="34" charset="-122"/>
+                <a:cs typeface="Courier New" pitchFamily="34" charset="-120"/>
+              </a:rPr>
+              <a:t>,</a:t>
+            </a:r>
+            <a:endParaRPr lang="en-US" sz="1000" dirty="0"/>
+          </a:p>
+          <a:p>
+            <a:pPr indent="0" marL="0">
+              <a:buNone/>
+            </a:pPr>
+            <a:r>
+              <a:rPr lang="en-US" sz="1000" dirty="0">
+                <a:solidFill>
+                  <a:srgbClr val="CCCCCC"/>
+                </a:solidFill>
+                <a:latin typeface="Courier New" pitchFamily="34" charset="0"/>
+                <a:ea typeface="Courier New" pitchFamily="34" charset="-122"/>
+                <a:cs typeface="Courier New" pitchFamily="34" charset="-120"/>
+              </a:rPr>
+              <a:t>  </a:t>
+            </a:r>
+            <a:pPr indent="0" marL="0">
+              <a:buNone/>
+            </a:pPr>
+            <a:r>
+              <a:rPr lang="en-US" sz="1000" dirty="0">
+                <a:solidFill>
+                  <a:srgbClr val="9CDCFE"/>
+                </a:solidFill>
+                <a:latin typeface="Courier New" pitchFamily="34" charset="0"/>
+                <a:ea typeface="Courier New" pitchFamily="34" charset="-122"/>
+                <a:cs typeface="Courier New" pitchFamily="34" charset="-120"/>
+              </a:rPr>
+              <a:t>currency</a:t>
+            </a:r>
+            <a:pPr indent="0" marL="0">
+              <a:buNone/>
+            </a:pPr>
+            <a:r>
+              <a:rPr lang="en-US" sz="1000" dirty="0">
+                <a:solidFill>
+                  <a:srgbClr val="CCCCCC"/>
+                </a:solidFill>
+                <a:latin typeface="Courier New" pitchFamily="34" charset="0"/>
+                <a:ea typeface="Courier New" pitchFamily="34" charset="-122"/>
+                <a:cs typeface="Courier New" pitchFamily="34" charset="-120"/>
+              </a:rPr>
+              <a:t>.</a:t>
+            </a:r>
+            <a:pPr indent="0" marL="0">
+              <a:buNone/>
+            </a:pPr>
+            <a:r>
+              <a:rPr lang="en-US" sz="1000" dirty="0">
+                <a:solidFill>
+                  <a:srgbClr val="9CDCFE"/>
+                </a:solidFill>
+                <a:latin typeface="Courier New" pitchFamily="34" charset="0"/>
+                <a:ea typeface="Courier New" pitchFamily="34" charset="-122"/>
+                <a:cs typeface="Courier New" pitchFamily="34" charset="-120"/>
+              </a:rPr>
+              <a:t>code</a:t>
+            </a:r>
+            <a:pPr indent="0" marL="0">
+              <a:buNone/>
+            </a:pPr>
+            <a:r>
+              <a:rPr lang="en-US" sz="1000" dirty="0">
+                <a:solidFill>
+                  <a:srgbClr val="CCCCCC"/>
+                </a:solidFill>
+                <a:latin typeface="Courier New" pitchFamily="34" charset="0"/>
+                <a:ea typeface="Courier New" pitchFamily="34" charset="-122"/>
+                <a:cs typeface="Courier New" pitchFamily="34" charset="-120"/>
+              </a:rPr>
+              <a:t> </a:t>
+            </a:r>
+            <a:pPr indent="0" marL="0">
+              <a:buNone/>
+            </a:pPr>
+            <a:r>
+              <a:rPr lang="en-US" sz="1000" dirty="0">
+                <a:solidFill>
+                  <a:srgbClr val="569CD6"/>
+                </a:solidFill>
+                <a:latin typeface="Courier New" pitchFamily="34" charset="0"/>
+                <a:ea typeface="Courier New" pitchFamily="34" charset="-122"/>
+                <a:cs typeface="Courier New" pitchFamily="34" charset="-120"/>
+              </a:rPr>
+              <a:t>as</a:t>
+            </a:r>
+            <a:pPr indent="0" marL="0">
+              <a:buNone/>
+            </a:pPr>
+            <a:r>
+              <a:rPr lang="en-US" sz="1000" dirty="0">
+                <a:solidFill>
+                  <a:srgbClr val="CCCCCC"/>
+                </a:solidFill>
+                <a:latin typeface="Courier New" pitchFamily="34" charset="0"/>
+                <a:ea typeface="Courier New" pitchFamily="34" charset="-122"/>
+                <a:cs typeface="Courier New" pitchFamily="34" charset="-120"/>
+              </a:rPr>
+              <a:t> </a:t>
+            </a:r>
+            <a:pPr indent="0" marL="0">
+              <a:buNone/>
+            </a:pPr>
+            <a:r>
+              <a:rPr lang="en-US" sz="1000" dirty="0">
+                <a:solidFill>
+                  <a:srgbClr val="9CDCFE"/>
+                </a:solidFill>
+                <a:latin typeface="Courier New" pitchFamily="34" charset="0"/>
+                <a:ea typeface="Courier New" pitchFamily="34" charset="-122"/>
+                <a:cs typeface="Courier New" pitchFamily="34" charset="-120"/>
+              </a:rPr>
+              <a:t>currency</a:t>
+            </a:r>
+            <a:pPr indent="0" marL="0">
+              <a:buNone/>
+            </a:pPr>
+            <a:r>
+              <a:rPr lang="en-US" sz="1000" dirty="0">
+                <a:solidFill>
+                  <a:srgbClr val="CCCCCC"/>
+                </a:solidFill>
+                <a:latin typeface="Courier New" pitchFamily="34" charset="0"/>
+                <a:ea typeface="Courier New" pitchFamily="34" charset="-122"/>
+                <a:cs typeface="Courier New" pitchFamily="34" charset="-120"/>
+              </a:rPr>
+              <a:t> : </a:t>
+            </a:r>
+            <a:pPr indent="0" marL="0">
+              <a:buNone/>
+            </a:pPr>
+            <a:r>
+              <a:rPr lang="en-US" sz="1000" dirty="0">
+                <a:solidFill>
+                  <a:srgbClr val="4EC9B0"/>
+                </a:solidFill>
+                <a:latin typeface="Courier New" pitchFamily="34" charset="0"/>
+                <a:ea typeface="Courier New" pitchFamily="34" charset="-122"/>
+                <a:cs typeface="Courier New" pitchFamily="34" charset="-120"/>
+              </a:rPr>
+              <a:t>String</a:t>
+            </a:r>
+            <a:pPr indent="0" marL="0">
+              <a:buNone/>
+            </a:pPr>
+            <a:r>
+              <a:rPr lang="en-US" sz="1000" dirty="0">
+                <a:solidFill>
+                  <a:srgbClr val="DA70D6"/>
+                </a:solidFill>
+                <a:latin typeface="Courier New" pitchFamily="34" charset="0"/>
+                <a:ea typeface="Courier New" pitchFamily="34" charset="-122"/>
+                <a:cs typeface="Courier New" pitchFamily="34" charset="-120"/>
+              </a:rPr>
+              <a:t>(</a:t>
+            </a:r>
+            <a:pPr indent="0" marL="0">
+              <a:buNone/>
+            </a:pPr>
+            <a:r>
+              <a:rPr lang="en-US" sz="1000" dirty="0">
+                <a:solidFill>
+                  <a:srgbClr val="B5CEA8"/>
+                </a:solidFill>
+                <a:latin typeface="Courier New" pitchFamily="34" charset="0"/>
+                <a:ea typeface="Courier New" pitchFamily="34" charset="-122"/>
+                <a:cs typeface="Courier New" pitchFamily="34" charset="-120"/>
+              </a:rPr>
+              <a:t>3</a:t>
+            </a:r>
+            <a:pPr indent="0" marL="0">
+              <a:buNone/>
+            </a:pPr>
+            <a:r>
+              <a:rPr lang="en-US" sz="1000" dirty="0">
+                <a:solidFill>
+                  <a:srgbClr val="DA70D6"/>
+                </a:solidFill>
+                <a:latin typeface="Courier New" pitchFamily="34" charset="0"/>
+                <a:ea typeface="Courier New" pitchFamily="34" charset="-122"/>
+                <a:cs typeface="Courier New" pitchFamily="34" charset="-120"/>
+              </a:rPr>
+              <a:t>)</a:t>
+            </a:r>
+            <a:pPr indent="0" marL="0">
+              <a:buNone/>
+            </a:pPr>
+            <a:r>
+              <a:rPr lang="en-US" sz="1000" dirty="0">
+                <a:solidFill>
+                  <a:srgbClr val="CCCCCC"/>
+                </a:solidFill>
+                <a:latin typeface="Courier New" pitchFamily="34" charset="0"/>
+                <a:ea typeface="Courier New" pitchFamily="34" charset="-122"/>
+                <a:cs typeface="Courier New" pitchFamily="34" charset="-120"/>
+              </a:rPr>
+              <a:t>,</a:t>
+            </a:r>
+            <a:endParaRPr lang="en-US" sz="1000" dirty="0"/>
+          </a:p>
+          <a:p>
+            <a:pPr indent="0" marL="0">
+              <a:buNone/>
+            </a:pPr>
+            <a:r>
+              <a:rPr lang="en-US" sz="1000" dirty="0">
+                <a:solidFill>
+                  <a:srgbClr val="CCCCCC"/>
+                </a:solidFill>
+                <a:latin typeface="Courier New" pitchFamily="34" charset="0"/>
+                <a:ea typeface="Courier New" pitchFamily="34" charset="-122"/>
+                <a:cs typeface="Courier New" pitchFamily="34" charset="-120"/>
+              </a:rPr>
+              <a:t>  </a:t>
+            </a:r>
+            <a:pPr indent="0" marL="0">
+              <a:buNone/>
+            </a:pPr>
+            <a:r>
+              <a:rPr lang="en-US" sz="1000" dirty="0">
+                <a:solidFill>
+                  <a:srgbClr val="DCDCAA"/>
+                </a:solidFill>
+                <a:latin typeface="Courier New" pitchFamily="34" charset="0"/>
+                <a:ea typeface="Courier New" pitchFamily="34" charset="-122"/>
+                <a:cs typeface="Courier New" pitchFamily="34" charset="-120"/>
+              </a:rPr>
+              <a:t>@Aggregation.default</a:t>
+            </a:r>
+            <a:pPr indent="0" marL="0">
+              <a:buNone/>
+            </a:pPr>
+            <a:r>
+              <a:rPr lang="en-US" sz="1000" dirty="0">
+                <a:solidFill>
+                  <a:srgbClr val="CCCCCC"/>
+                </a:solidFill>
+                <a:latin typeface="Courier New" pitchFamily="34" charset="0"/>
+                <a:ea typeface="Courier New" pitchFamily="34" charset="-122"/>
+                <a:cs typeface="Courier New" pitchFamily="34" charset="-120"/>
+              </a:rPr>
+              <a:t>: </a:t>
+            </a:r>
+            <a:pPr indent="0" marL="0">
+              <a:buNone/>
+            </a:pPr>
+            <a:r>
+              <a:rPr lang="en-US" sz="1000" dirty="0">
+                <a:solidFill>
+                  <a:srgbClr val="4FC1FF"/>
+                </a:solidFill>
+                <a:latin typeface="Courier New" pitchFamily="34" charset="0"/>
+                <a:ea typeface="Courier New" pitchFamily="34" charset="-122"/>
+                <a:cs typeface="Courier New" pitchFamily="34" charset="-120"/>
+              </a:rPr>
+              <a:t>#SUM</a:t>
+            </a:r>
+            <a:pPr indent="0" marL="0">
+              <a:buNone/>
+            </a:pPr>
+            <a:r>
+              <a:rPr lang="en-US" sz="1000" dirty="0">
+                <a:solidFill>
+                  <a:srgbClr val="CCCCCC"/>
+                </a:solidFill>
+                <a:latin typeface="Courier New" pitchFamily="34" charset="0"/>
+                <a:ea typeface="Courier New" pitchFamily="34" charset="-122"/>
+                <a:cs typeface="Courier New" pitchFamily="34" charset="-120"/>
+              </a:rPr>
+              <a:t>  </a:t>
+            </a:r>
+            <a:pPr indent="0" marL="0">
+              <a:buNone/>
+            </a:pPr>
+            <a:r>
+              <a:rPr lang="en-US" sz="1000" dirty="0">
+                <a:solidFill>
+                  <a:srgbClr val="9CDCFE"/>
+                </a:solidFill>
+                <a:latin typeface="Courier New" pitchFamily="34" charset="0"/>
+                <a:ea typeface="Courier New" pitchFamily="34" charset="-122"/>
+                <a:cs typeface="Courier New" pitchFamily="34" charset="-120"/>
+              </a:rPr>
+              <a:t>valorReembolso</a:t>
+            </a:r>
+            <a:pPr indent="0" marL="0">
+              <a:buNone/>
+            </a:pPr>
+            <a:r>
+              <a:rPr lang="en-US" sz="1000" dirty="0">
+                <a:solidFill>
+                  <a:srgbClr val="CCCCCC"/>
+                </a:solidFill>
+                <a:latin typeface="Courier New" pitchFamily="34" charset="0"/>
+                <a:ea typeface="Courier New" pitchFamily="34" charset="-122"/>
+                <a:cs typeface="Courier New" pitchFamily="34" charset="-120"/>
+              </a:rPr>
+              <a:t>,</a:t>
+            </a:r>
+            <a:endParaRPr lang="en-US" sz="1000" dirty="0"/>
+          </a:p>
+          <a:p>
+            <a:pPr indent="0" marL="0">
+              <a:buNone/>
+            </a:pPr>
+            <a:r>
+              <a:rPr lang="en-US" sz="1000" dirty="0">
+                <a:solidFill>
+                  <a:srgbClr val="CCCCCC"/>
+                </a:solidFill>
+                <a:latin typeface="Courier New" pitchFamily="34" charset="0"/>
+                <a:ea typeface="Courier New" pitchFamily="34" charset="-122"/>
+                <a:cs typeface="Courier New" pitchFamily="34" charset="-120"/>
+              </a:rPr>
+              <a:t>  </a:t>
+            </a:r>
+            <a:pPr indent="0" marL="0">
+              <a:buNone/>
+            </a:pPr>
+            <a:r>
+              <a:rPr lang="en-US" sz="1000" dirty="0">
+                <a:solidFill>
+                  <a:srgbClr val="DCDCAA"/>
+                </a:solidFill>
+                <a:latin typeface="Courier New" pitchFamily="34" charset="0"/>
+                <a:ea typeface="Courier New" pitchFamily="34" charset="-122"/>
+                <a:cs typeface="Courier New" pitchFamily="34" charset="-120"/>
+              </a:rPr>
+              <a:t>@Aggregation.default</a:t>
+            </a:r>
+            <a:pPr indent="0" marL="0">
+              <a:buNone/>
+            </a:pPr>
+            <a:r>
+              <a:rPr lang="en-US" sz="1000" dirty="0">
+                <a:solidFill>
+                  <a:srgbClr val="CCCCCC"/>
+                </a:solidFill>
+                <a:latin typeface="Courier New" pitchFamily="34" charset="0"/>
+                <a:ea typeface="Courier New" pitchFamily="34" charset="-122"/>
+                <a:cs typeface="Courier New" pitchFamily="34" charset="-120"/>
+              </a:rPr>
+              <a:t>: </a:t>
+            </a:r>
+            <a:pPr indent="0" marL="0">
+              <a:buNone/>
+            </a:pPr>
+            <a:r>
+              <a:rPr lang="en-US" sz="1000" dirty="0">
+                <a:solidFill>
+                  <a:srgbClr val="4FC1FF"/>
+                </a:solidFill>
+                <a:latin typeface="Courier New" pitchFamily="34" charset="0"/>
+                <a:ea typeface="Courier New" pitchFamily="34" charset="-122"/>
+                <a:cs typeface="Courier New" pitchFamily="34" charset="-120"/>
+              </a:rPr>
+              <a:t>#SUM</a:t>
+            </a:r>
+            <a:pPr indent="0" marL="0">
+              <a:buNone/>
+            </a:pPr>
+            <a:r>
+              <a:rPr lang="en-US" sz="1000" dirty="0">
+                <a:solidFill>
+                  <a:srgbClr val="CCCCCC"/>
+                </a:solidFill>
+                <a:latin typeface="Courier New" pitchFamily="34" charset="0"/>
+                <a:ea typeface="Courier New" pitchFamily="34" charset="-122"/>
+                <a:cs typeface="Courier New" pitchFamily="34" charset="-120"/>
+              </a:rPr>
+              <a:t>  </a:t>
+            </a:r>
+            <a:pPr indent="0" marL="0">
+              <a:buNone/>
+            </a:pPr>
+            <a:r>
+              <a:rPr lang="en-US" sz="1000" dirty="0">
+                <a:solidFill>
+                  <a:srgbClr val="B5CEA8"/>
+                </a:solidFill>
+                <a:latin typeface="Courier New" pitchFamily="34" charset="0"/>
+                <a:ea typeface="Courier New" pitchFamily="34" charset="-122"/>
+                <a:cs typeface="Courier New" pitchFamily="34" charset="-120"/>
+              </a:rPr>
+              <a:t>1</a:t>
+            </a:r>
+            <a:pPr indent="0" marL="0">
+              <a:buNone/>
+            </a:pPr>
+            <a:r>
+              <a:rPr lang="en-US" sz="1000" dirty="0">
+                <a:solidFill>
+                  <a:srgbClr val="CCCCCC"/>
+                </a:solidFill>
+                <a:latin typeface="Courier New" pitchFamily="34" charset="0"/>
+                <a:ea typeface="Courier New" pitchFamily="34" charset="-122"/>
+                <a:cs typeface="Courier New" pitchFamily="34" charset="-120"/>
+              </a:rPr>
+              <a:t> </a:t>
+            </a:r>
+            <a:pPr indent="0" marL="0">
+              <a:buNone/>
+            </a:pPr>
+            <a:r>
+              <a:rPr lang="en-US" sz="1000" dirty="0">
+                <a:solidFill>
+                  <a:srgbClr val="569CD6"/>
+                </a:solidFill>
+                <a:latin typeface="Courier New" pitchFamily="34" charset="0"/>
+                <a:ea typeface="Courier New" pitchFamily="34" charset="-122"/>
+                <a:cs typeface="Courier New" pitchFamily="34" charset="-120"/>
+              </a:rPr>
+              <a:t>as</a:t>
+            </a:r>
+            <a:pPr indent="0" marL="0">
+              <a:buNone/>
+            </a:pPr>
+            <a:r>
+              <a:rPr lang="en-US" sz="1000" dirty="0">
+                <a:solidFill>
+                  <a:srgbClr val="CCCCCC"/>
+                </a:solidFill>
+                <a:latin typeface="Courier New" pitchFamily="34" charset="0"/>
+                <a:ea typeface="Courier New" pitchFamily="34" charset="-122"/>
+                <a:cs typeface="Courier New" pitchFamily="34" charset="-120"/>
+              </a:rPr>
+              <a:t> </a:t>
+            </a:r>
+            <a:pPr indent="0" marL="0">
+              <a:buNone/>
+            </a:pPr>
+            <a:r>
+              <a:rPr lang="en-US" sz="1000" dirty="0">
+                <a:solidFill>
+                  <a:srgbClr val="9CDCFE"/>
+                </a:solidFill>
+                <a:latin typeface="Courier New" pitchFamily="34" charset="0"/>
+                <a:ea typeface="Courier New" pitchFamily="34" charset="-122"/>
+                <a:cs typeface="Courier New" pitchFamily="34" charset="-120"/>
+              </a:rPr>
+              <a:t>qtdeReembolsos</a:t>
+            </a:r>
+            <a:pPr indent="0" marL="0">
+              <a:buNone/>
+            </a:pPr>
+            <a:r>
+              <a:rPr lang="en-US" sz="1000" dirty="0">
+                <a:solidFill>
+                  <a:srgbClr val="CCCCCC"/>
+                </a:solidFill>
+                <a:latin typeface="Courier New" pitchFamily="34" charset="0"/>
+                <a:ea typeface="Courier New" pitchFamily="34" charset="-122"/>
+                <a:cs typeface="Courier New" pitchFamily="34" charset="-120"/>
+              </a:rPr>
+              <a:t> : </a:t>
+            </a:r>
+            <a:pPr indent="0" marL="0">
+              <a:buNone/>
+            </a:pPr>
+            <a:r>
+              <a:rPr lang="en-US" sz="1000" dirty="0">
+                <a:solidFill>
+                  <a:srgbClr val="4EC9B0"/>
+                </a:solidFill>
+                <a:latin typeface="Courier New" pitchFamily="34" charset="0"/>
+                <a:ea typeface="Courier New" pitchFamily="34" charset="-122"/>
+                <a:cs typeface="Courier New" pitchFamily="34" charset="-120"/>
+              </a:rPr>
+              <a:t>Integer</a:t>
+            </a:r>
+            <a:endParaRPr lang="en-US" sz="1000" dirty="0"/>
+          </a:p>
+          <a:p>
+            <a:pPr indent="0" marL="0">
+              <a:buNone/>
+            </a:pPr>
+            <a:r>
+              <a:rPr lang="en-US" sz="1000" dirty="0">
+                <a:solidFill>
+                  <a:srgbClr val="FFD700"/>
+                </a:solidFill>
+                <a:latin typeface="Courier New" pitchFamily="34" charset="0"/>
+                <a:ea typeface="Courier New" pitchFamily="34" charset="-122"/>
+                <a:cs typeface="Courier New" pitchFamily="34" charset="-120"/>
+              </a:rPr>
+              <a:t>}</a:t>
+            </a:r>
+            <a:pPr indent="0" marL="0">
+              <a:buNone/>
+            </a:pPr>
+            <a:r>
+              <a:rPr lang="en-US" sz="1000" dirty="0">
+                <a:solidFill>
+                  <a:srgbClr val="CCCCCC"/>
+                </a:solidFill>
+                <a:latin typeface="Courier New" pitchFamily="34" charset="0"/>
+                <a:ea typeface="Courier New" pitchFamily="34" charset="-122"/>
+                <a:cs typeface="Courier New" pitchFamily="34" charset="-120"/>
+              </a:rPr>
+              <a:t>;</a:t>
+            </a:r>
+            <a:endParaRPr lang="en-US" sz="1000" dirty="0"/>
+          </a:p>
+        </p:txBody>
+      </p:sp>
+      <p:sp>
+        <p:nvSpPr>
+          <p:cNvPr id="7" name="Cartão"/>
+          <p:cNvSpPr/>
+          <p:nvPr/>
+        </p:nvSpPr>
+        <p:spPr>
+          <a:xfrm>
+            <a:off x="6812280" y="1538986"/>
+            <a:ext cx="4828032" cy="2957068"/>
+          </a:xfrm>
+          <a:prstGeom prst="roundRect">
+            <a:avLst>
+              <a:gd name="adj" fmla="val 3711"/>
+            </a:avLst>
+          </a:prstGeom>
+          <a:solidFill>
+            <a:schemeClr val="bg1"/>
+          </a:solidFill>
+          <a:ln w="9525">
+            <a:solidFill>
+              <a:srgbClr val="E5E5E5"/>
+            </a:solidFill>
+            <a:prstDash val="solid"/>
+          </a:ln>
+          <a:effectLst>
+            <a:outerShdw sx="100000" sy="100000" kx="0" ky="0" algn="bl" rotWithShape="0" blurRad="101600" dist="25400" dir="5400000">
+              <a:srgbClr val="223649">
+                <a:alpha val="14000"/>
+              </a:srgbClr>
+            </a:outerShdw>
+          </a:effectLst>
+        </p:spPr>
+      </p:sp>
+      <p:pic>
+        <p:nvPicPr>
+          <p:cNvPr id="8" name="Image 0" descr="Análise de Pedidos de Reembolsos">    </p:cNvPr>
+          <p:cNvPicPr>
+            <a:picLocks noChangeAspect="1"/>
+          </p:cNvPicPr>
+          <p:nvPr/>
+        </p:nvPicPr>
+        <p:blipFill>
+          <a:blip r:embed="rId2"/>
+          <a:stretch>
+            <a:fillRect/>
+          </a:stretch>
+        </p:blipFill>
+        <p:spPr>
+          <a:xfrm>
+            <a:off x="6903720" y="1630426"/>
+            <a:ext cx="4645152" cy="2774188"/>
+          </a:xfrm>
+          <a:prstGeom prst="rect">
+            <a:avLst/>
+          </a:prstGeom>
+        </p:spPr>
+      </p:pic>
+      <p:sp>
+        <p:nvSpPr>
+          <p:cNvPr id="9" name="Avatar LuChartColumn"/>
+          <p:cNvSpPr/>
+          <p:nvPr/>
+        </p:nvSpPr>
+        <p:spPr>
+          <a:xfrm>
+            <a:off x="6903720" y="4754880"/>
+            <a:ext cx="457200" cy="457200"/>
+          </a:xfrm>
+          <a:prstGeom prst="roundRect">
+            <a:avLst>
+              <a:gd name="adj" fmla="val 22000"/>
+            </a:avLst>
+          </a:prstGeom>
+          <a:solidFill>
+            <a:srgbClr val="EBF8FF"/>
+          </a:solidFill>
+          <a:ln/>
+        </p:spPr>
+      </p:sp>
+      <p:pic>
+        <p:nvPicPr>
+          <p:cNvPr id="10" name="Image 1" descr="LuChartColumn">    </p:cNvPr>
+          <p:cNvPicPr>
+            <a:picLocks noChangeAspect="1"/>
+          </p:cNvPicPr>
+          <p:nvPr/>
+        </p:nvPicPr>
+        <p:blipFill>
+          <a:blip r:embed="rId3"/>
+          <a:stretch>
+            <a:fillRect/>
+          </a:stretch>
+        </p:blipFill>
+        <p:spPr>
+          <a:xfrm>
+            <a:off x="7013448" y="4864608"/>
+            <a:ext cx="237744" cy="237744"/>
+          </a:xfrm>
+          <a:prstGeom prst="rect">
+            <a:avLst/>
+          </a:prstGeom>
+        </p:spPr>
+      </p:pic>
+      <p:sp>
+        <p:nvSpPr>
+          <p:cNvPr id="11" name="Text 6"/>
+          <p:cNvSpPr txBox="1"/>
+          <p:nvPr/>
+        </p:nvSpPr>
+        <p:spPr>
+          <a:xfrm>
+            <a:off x="7589520" y="4718304"/>
+            <a:ext cx="4069080" cy="310896"/>
+          </a:xfrm>
+          <a:prstGeom prst="rect">
+            <a:avLst/>
+          </a:prstGeom>
+          <a:noFill/>
+          <a:ln/>
+        </p:spPr>
+        <p:txBody>
+          <a:bodyPr wrap="square" lIns="0" tIns="0" rIns="0" bIns="0" rtlCol="0" anchor="ctr"/>
+          <a:lstStyle/>
+          <a:p>
+            <a:pPr indent="0" marL="0">
+              <a:buNone/>
+            </a:pPr>
+            <a:r>
+              <a:rPr lang="en-US" sz="1500" b="1" dirty="0">
+                <a:solidFill>
+                  <a:schemeClr val="tx1"/>
+                </a:solidFill>
+              </a:rPr>
+              <a:t>5 cenários</a:t>
+            </a:r>
+            <a:endParaRPr lang="en-US" sz="1500" dirty="0"/>
+          </a:p>
+        </p:txBody>
+      </p:sp>
+      <p:sp>
+        <p:nvSpPr>
+          <p:cNvPr id="12" name="Text 7"/>
+          <p:cNvSpPr txBox="1"/>
+          <p:nvPr/>
+        </p:nvSpPr>
+        <p:spPr>
+          <a:xfrm>
+            <a:off x="7589520" y="5038344"/>
+            <a:ext cx="4069080" cy="658368"/>
+          </a:xfrm>
+          <a:prstGeom prst="rect">
+            <a:avLst/>
+          </a:prstGeom>
+          <a:noFill/>
+          <a:ln/>
+        </p:spPr>
+        <p:txBody>
+          <a:bodyPr wrap="square" lIns="0" tIns="0" rIns="0" bIns="0" rtlCol="0" anchor="t"/>
+          <a:lstStyle/>
+          <a:p>
+            <a:pPr indent="0" marL="0">
+              <a:buNone/>
+            </a:pPr>
+            <a:r>
+              <a:rPr lang="en-US" sz="1400" dirty="0">
+                <a:solidFill>
+                  <a:srgbClr val="556B82"/>
+                </a:solidFill>
+              </a:rPr>
+              <a:t>Valor e quantidade por status, mês, UF e motivo.</a:t>
+            </a:r>
+            <a:endParaRPr lang="en-US" sz="1400" dirty="0"/>
+          </a:p>
+        </p:txBody>
+      </p:sp>
+      <p:sp>
+        <p:nvSpPr>
+          <p:cNvPr id="25" name="Slide Number Placeholder 0"/>
+          <p:cNvSpPr>
+            <a:spLocks noGrp="1"/>
+          </p:cNvSpPr>
+          <p:nvPr>
+            <p:ph type="sldNum" sz="quarter" idx="4294967295"/>
+          </p:nvPr>
+        </p:nvSpPr>
+        <p:spPr>
+          <a:xfrm>
+            <a:off x="11155680" y="6419088"/>
+            <a:ext cx="484632" cy="274320"/>
+          </a:xfrm>
+          <a:prstGeom prst="rect">
+            <a:avLst/>
+          </a:prstGeom>
+          <a:extLst>
+            <a:ext uri="{C572A759-6A51-4108-AA02-DFA0A04FC94B}">
+              <ma14:wrappingTextBoxFlag xmlns:ma14="http://schemas.microsoft.com/office/mac/drawingml/2011/main" val="0"/>
+            </a:ext>
+          </a:extLst>
+        </p:spPr>
+        <p:txBody>
+          <a:bodyPr/>
+          <a:lstStyle>
+            <a:lvl1pPr>
+              <a:defRPr sz="1000">
+                <a:solidFill>
+                  <a:srgbClr val="556B82"/>
+                </a:solidFill>
+              </a:defRPr>
+            </a:lvl1pPr>
+          </a:lstStyle>
+          <a:p>
+            <a:pPr algn="r"/>
+            <a:fld id="{F7021451-1387-4CA6-816F-3879F97B5CBC}" type="slidenum">
+              <a:rPr b="0" lang="en-US"/>
+              <a:t>13</a:t>
             </a:fld>
             <a:endParaRPr lang="en-US"/>
           </a:p>
@@ -21506,7 +26451,7 @@
                   <a:schemeClr val="accent1"/>
                 </a:solidFill>
               </a:rPr>
-              <a:t>DOMÍNIOS</a:t>
+              <a:t>PEDIDOS · ANÁLISE</a:t>
             </a:r>
             <a:endParaRPr lang="en-US" sz="1200" dirty="0"/>
           </a:p>
@@ -23279,7 +28224,7 @@
                   <a:schemeClr val="accent1"/>
                 </a:solidFill>
               </a:rPr>
-              <a:t>DOMÍNIOS</a:t>
+              <a:t>CLIENTES · ANÁLISE</a:t>
             </a:r>
             <a:endParaRPr lang="en-US" sz="1200" dirty="0"/>
           </a:p>
@@ -25052,7 +29997,7 @@
                   <a:schemeClr val="accent1"/>
                 </a:solidFill>
               </a:rPr>
-              <a:t>DOMÍNIOS</a:t>
+              <a:t>ESTOQUE · ANÁLISE</a:t>
             </a:r>
             <a:endParaRPr lang="en-US" sz="1200" dirty="0"/>
           </a:p>
@@ -26825,7 +31770,7 @@
                   <a:schemeClr val="accent1"/>
                 </a:solidFill>
               </a:rPr>
-              <a:t>DOMÍNIOS</a:t>
+              <a:t>REEMBOLSOS · ANÁLISE</a:t>
             </a:r>
             <a:endParaRPr lang="en-US" sz="1200" dirty="0"/>
           </a:p>
